--- a/library/lectures/lec-16/rendered/lec-16.pptx
+++ b/library/lectures/lec-16/rendered/lec-16.pptx
@@ -11568,7 +11568,7 @@
                 </a:solidFill>
                 <a:latin typeface="Arial"/>
               </a:rPr>
-              <a:t>LO2 — главный навык курса: уметь сказать «нет» там, где AI не нужен. 14% successful vs 86% pilot stuck — разница часто именно здесь.</a:t>
+              <a:t>Главный навык курса: уметь сказать «нет» там, где AI не нужен. 14% successful vs 86% pilot stuck — разница часто именно здесь.</a:t>
             </a:r>
           </a:p>
         </p:txBody>
@@ -12175,7 +12175,7 @@
                 </a:solidFill>
                 <a:latin typeface="Arial"/>
               </a:rPr>
-              <a:t>7. Cross-cutting</a:t>
+              <a:t>7. Сквозные</a:t>
             </a:r>
           </a:p>
         </p:txBody>
@@ -12189,7 +12189,7 @@
         <p:spPr>
           <a:xfrm>
             <a:off x="457200" y="914400"/>
-            <a:ext cx="5029200" cy="4114800"/>
+            <a:ext cx="5029200" cy="3291840"/>
           </a:xfrm>
           <a:prstGeom prst="rect">
             <a:avLst/>
@@ -12227,8 +12227,8 @@
         </p:nvSpPr>
         <p:spPr>
           <a:xfrm>
-            <a:off x="457200" y="4389120"/>
-            <a:ext cx="5029200" cy="548640"/>
+            <a:off x="457200" y="4434840"/>
+            <a:ext cx="5029200" cy="502920"/>
           </a:xfrm>
           <a:prstGeom prst="rect">
             <a:avLst/>
@@ -12247,13 +12247,13 @@
               </a:lnSpc>
             </a:pPr>
             <a:r>
-              <a:rPr sz="2400" b="1" i="0">
-                <a:solidFill>
-                  <a:srgbClr val="21295C"/>
-                </a:solidFill>
-                <a:latin typeface="Arial"/>
-              </a:rPr>
-              <a:t>Frontier exploration</a:t>
+              <a:rPr sz="2200" b="1" i="0">
+                <a:solidFill>
+                  <a:srgbClr val="21295C"/>
+                </a:solidFill>
+                <a:latin typeface="Arial"/>
+              </a:rPr>
+              <a:t>Разведка фронтиров</a:t>
             </a:r>
           </a:p>
         </p:txBody>
@@ -12292,7 +12292,7 @@
                 </a:solidFill>
                 <a:latin typeface="Arial"/>
               </a:rPr>
-              <a:t>Каждая wildcat скважина = $50–100M. Sample size 1–5 wells. ML не generalize без аналогов. Physics ground truth, AI augmentation.</a:t>
+              <a:t>Каждая wildcat-скважина = $50–100M. Размер выборки 1–5 скважин. ML не обобщается без аналогов. Physics ground truth, AI как дополнение.</a:t>
             </a:r>
           </a:p>
         </p:txBody>
@@ -12379,7 +12379,7 @@
                 </a:solidFill>
                 <a:latin typeface="Arial"/>
               </a:rPr>
-              <a:t>3 working cases · 2 провала десятилетия · HPC-гонка $100–400M на инсталляцию</a:t>
+              <a:t>3 рабочих кейса · 2 провала десятилетия · HPC-гонка $100–400M на инсталляцию</a:t>
             </a:r>
           </a:p>
         </p:txBody>
@@ -16493,7 +16493,7 @@
                 </a:solidFill>
                 <a:latin typeface="Arial"/>
               </a:rPr>
-              <a:t>7. Cross-cutting</a:t>
+              <a:t>7. Сквозные</a:t>
             </a:r>
           </a:p>
         </p:txBody>
@@ -16777,7 +16777,7 @@
                 </a:solidFill>
                 <a:latin typeface="Arial"/>
               </a:rPr>
-              <a:t>а где он либо essential, либо опасен — на материале</a:t>
+              <a:t>а где он либо необходим, либо опасен — на материале</a:t>
             </a:r>
           </a:p>
           <a:p>
@@ -16793,7 +16793,7 @@
                 </a:solidFill>
                 <a:latin typeface="Arial"/>
               </a:rPr>
-              <a:t>10 documented failures индустрии 2014–2026?</a:t>
+              <a:t>10 documented провалов индустрии 2014–2026?</a:t>
             </a:r>
           </a:p>
         </p:txBody>
@@ -19541,7 +19541,7 @@
                 </a:solidFill>
                 <a:latin typeface="Arial"/>
               </a:rPr>
-              <a:t>7. Cross-cutting</a:t>
+              <a:t>7. Сквозные</a:t>
             </a:r>
           </a:p>
         </p:txBody>
@@ -19555,7 +19555,7 @@
         <p:spPr>
           <a:xfrm>
             <a:off x="457200" y="914400"/>
-            <a:ext cx="5029200" cy="4114800"/>
+            <a:ext cx="5029200" cy="3291840"/>
           </a:xfrm>
           <a:prstGeom prst="rect">
             <a:avLst/>
@@ -19593,8 +19593,8 @@
         </p:nvSpPr>
         <p:spPr>
           <a:xfrm>
-            <a:off x="457200" y="4389120"/>
-            <a:ext cx="5029200" cy="548640"/>
+            <a:off x="457200" y="4434840"/>
+            <a:ext cx="5029200" cy="502920"/>
           </a:xfrm>
           <a:prstGeom prst="rect">
             <a:avLst/>
@@ -19613,13 +19613,13 @@
               </a:lnSpc>
             </a:pPr>
             <a:r>
-              <a:rPr sz="2400" b="1" i="0">
-                <a:solidFill>
-                  <a:srgbClr val="21295C"/>
-                </a:solidFill>
-                <a:latin typeface="Arial"/>
-              </a:rPr>
-              <a:t>Methane MRV</a:t>
+              <a:rPr sz="2200" b="1" i="0">
+                <a:solidFill>
+                  <a:srgbClr val="21295C"/>
+                </a:solidFill>
+                <a:latin typeface="Arial"/>
+              </a:rPr>
+              <a:t>Метановая MRV</a:t>
             </a:r>
           </a:p>
         </p:txBody>
@@ -19658,7 +19658,7 @@
                 </a:solidFill>
                 <a:latin typeface="Arial"/>
               </a:rPr>
-              <a:t>Данные — петабайты в день. Физика — разорвана. Слияние 4 сенсоров + атрибуция малой утечки — открытая ML-задача. AI essential. Но один спутник = catastrophic SPOF.</a:t>
+              <a:t>Данные — петабайты в день. Физика — разорвана. Слияние 4 сенсоров + атрибуция малой утечки — открытая ML-задача. AI необходим. Но один спутник = катастрофическая единичная уязвимость.</a:t>
             </a:r>
           </a:p>
         </p:txBody>
@@ -19745,7 +19745,7 @@
                 </a:solidFill>
                 <a:latin typeface="Arial"/>
               </a:rPr>
-              <a:t>4 working systems · 2 провала · regulatory pressure из EU 2024/1787</a:t>
+              <a:t>4 рабочих системы · 2 провала · регуляторное давление из EU 2024/1787</a:t>
             </a:r>
           </a:p>
         </p:txBody>
@@ -24961,7 +24961,7 @@
                 </a:solidFill>
                 <a:latin typeface="Arial"/>
               </a:rPr>
-              <a:t>7. Cross-cutting</a:t>
+              <a:t>7. Сквозные</a:t>
             </a:r>
           </a:p>
         </p:txBody>
@@ -24975,7 +24975,7 @@
         <p:spPr>
           <a:xfrm>
             <a:off x="457200" y="914400"/>
-            <a:ext cx="5029200" cy="4114800"/>
+            <a:ext cx="5029200" cy="3291840"/>
           </a:xfrm>
           <a:prstGeom prst="rect">
             <a:avLst/>
@@ -25013,8 +25013,8 @@
         </p:nvSpPr>
         <p:spPr>
           <a:xfrm>
-            <a:off x="457200" y="4389120"/>
-            <a:ext cx="5029200" cy="548640"/>
+            <a:off x="457200" y="4434840"/>
+            <a:ext cx="5029200" cy="502920"/>
           </a:xfrm>
           <a:prstGeom prst="rect">
             <a:avLst/>
@@ -25033,13 +25033,13 @@
               </a:lnSpc>
             </a:pPr>
             <a:r>
-              <a:rPr sz="2400" b="1" i="0">
-                <a:solidFill>
-                  <a:srgbClr val="21295C"/>
-                </a:solidFill>
-                <a:latin typeface="Arial"/>
-              </a:rPr>
-              <a:t>Energy transition: CCS + EGS</a:t>
+              <a:rPr sz="2200" b="1" i="0">
+                <a:solidFill>
+                  <a:srgbClr val="21295C"/>
+                </a:solidFill>
+                <a:latin typeface="Arial"/>
+              </a:rPr>
+              <a:t>Энергопереход: CCS + EGS</a:t>
             </a:r>
           </a:p>
         </p:txBody>
@@ -25078,7 +25078,7 @@
                 </a:solidFill>
                 <a:latin typeface="Arial"/>
               </a:rPr>
-              <a:t>Здесь AI и физика struggle вместе. Long-horizon, low-data, low-physics-certainty. Самый честный квадрант.</a:t>
+              <a:t>Здесь AI и физика буксуют вместе. Long-horizon, low-data, low-physics-certainty. Самый честный квадрант.</a:t>
             </a:r>
           </a:p>
         </p:txBody>
@@ -25165,7 +25165,7 @@
                 </a:solidFill>
                 <a:latin typeface="Arial"/>
               </a:rPr>
-              <a:t>2 working pilots · 2 структурных провала · 190× scale-up gap</a:t>
+              <a:t>2 рабочих пилота · 2 структурных провала · 190× разрыв масштабирования</a:t>
             </a:r>
           </a:p>
         </p:txBody>
@@ -25613,10 +25613,11 @@
                 </a:solidFill>
                 <a:latin typeface="Arial"/>
               </a:rPr>
-              <a:t>75 минут
-· 42 слайда
-· 10 documented
+              <a:t>42 слайда
+· 10 разобранных
 провалов
+· 12+ рабочих
+кейсов
 · 7 разделов</a:t>
             </a:r>
           </a:p>
@@ -25794,7 +25795,7 @@
 · Применять критерии
 «AI не нужен»
 · Альтернативы
-не-AI</a:t>
+без AI</a:t>
             </a:r>
           </a:p>
         </p:txBody>
@@ -25881,7 +25882,7 @@
                 </a:solidFill>
                 <a:latin typeface="Arial"/>
               </a:rPr>
-              <a:t>10 documented failures + 12+ working cases = инженерный фильтр, не каталог инноваций.</a:t>
+              <a:t>10 разобранных провалов + 12+ рабочих кейсов = инженерный фильтр, не каталог инноваций.</a:t>
             </a:r>
           </a:p>
         </p:txBody>
@@ -29489,7 +29490,7 @@
                 </a:solidFill>
                 <a:latin typeface="Arial"/>
               </a:rPr>
-              <a:t>7. Cross-cutting</a:t>
+              <a:t>7. Сквозные</a:t>
             </a:r>
           </a:p>
         </p:txBody>
@@ -33752,7 +33753,7 @@
                 </a:solidFill>
                 <a:latin typeface="Arial"/>
               </a:rPr>
-              <a:t>3 cases · 2 провала</a:t>
+              <a:t>3 кейса · 2 провала</a:t>
             </a:r>
           </a:p>
         </p:txBody>
@@ -34000,7 +34001,7 @@
                 </a:solidFill>
                 <a:latin typeface="Arial"/>
               </a:rPr>
-              <a:t>3 cases · 2 провала</a:t>
+              <a:t>3 кейса · 2 провала</a:t>
             </a:r>
           </a:p>
         </p:txBody>
@@ -34248,7 +34249,7 @@
                 </a:solidFill>
                 <a:latin typeface="Arial"/>
               </a:rPr>
-              <a:t>4 systems · 2 провала</a:t>
+              <a:t>4 системы · 2 провала</a:t>
             </a:r>
           </a:p>
         </p:txBody>
@@ -34496,7 +34497,7 @@
                 </a:solidFill>
                 <a:latin typeface="Arial"/>
               </a:rPr>
-              <a:t>2 pilots · 2 провала</a:t>
+              <a:t>2 пилота · 2 провала</a:t>
             </a:r>
           </a:p>
         </p:txBody>
@@ -34744,7 +34745,7 @@
                 </a:solidFill>
                 <a:latin typeface="Arial"/>
               </a:rPr>
-              <a:t>3 programs</a:t>
+              <a:t>3 программы</a:t>
             </a:r>
           </a:p>
         </p:txBody>
@@ -34783,7 +34784,7 @@
                 </a:solidFill>
                 <a:latin typeface="Arial"/>
               </a:rPr>
-              <a:t>Sanctions, insourcing</a:t>
+              <a:t>Санкции, инсорсинг</a:t>
             </a:r>
           </a:p>
         </p:txBody>
@@ -34953,7 +34954,7 @@
                 </a:solidFill>
                 <a:latin typeface="Arial"/>
               </a:rPr>
-              <a:t>Cross-cutting</a:t>
+              <a:t>Сквозные риски</a:t>
             </a:r>
           </a:p>
         </p:txBody>
@@ -34992,7 +34993,7 @@
                 </a:solidFill>
                 <a:latin typeface="Arial"/>
               </a:rPr>
-              <a:t>2 failures</a:t>
+              <a:t>2 провала</a:t>
             </a:r>
           </a:p>
         </p:txBody>
@@ -37040,86 +37041,8 @@
         </p:nvSpPr>
         <p:spPr>
           <a:xfrm>
-            <a:off x="457200" y="1965960"/>
-            <a:ext cx="1188720" cy="457200"/>
-          </a:xfrm>
-          <a:prstGeom prst="rect">
-            <a:avLst/>
-          </a:prstGeom>
-          <a:noFill/>
-        </p:spPr>
-        <p:txBody>
-          <a:bodyPr wrap="square" lIns="0" rIns="0" tIns="0" bIns="0" anchor="t">
-            <a:spAutoFit/>
-          </a:bodyPr>
-          <a:lstStyle/>
-          <a:p>
-            <a:pPr algn="ctr">
-              <a:lnSpc>
-                <a:spcPct val="115000"/>
-              </a:lnSpc>
-            </a:pPr>
-            <a:r>
-              <a:rPr sz="2200" b="1" i="0">
-                <a:solidFill>
-                  <a:srgbClr val="FFFFFF"/>
-                </a:solidFill>
-                <a:latin typeface="Arial"/>
-              </a:rPr>
-              <a:t>Q1</a:t>
-            </a:r>
-          </a:p>
-        </p:txBody>
-      </p:sp>
-      <p:sp>
-        <p:nvSpPr>
-          <p:cNvPr id="7" name="TextBox 6"/>
-          <p:cNvSpPr txBox="1"/>
-          <p:nvPr/>
-        </p:nvSpPr>
-        <p:spPr>
-          <a:xfrm>
-            <a:off x="457200" y="2514600"/>
-            <a:ext cx="1188720" cy="365760"/>
-          </a:xfrm>
-          <a:prstGeom prst="rect">
-            <a:avLst/>
-          </a:prstGeom>
-          <a:noFill/>
-        </p:spPr>
-        <p:txBody>
-          <a:bodyPr wrap="square" lIns="0" rIns="0" tIns="0" bIns="0" anchor="t">
-            <a:spAutoFit/>
-          </a:bodyPr>
-          <a:lstStyle/>
-          <a:p>
-            <a:pPr algn="ctr">
-              <a:lnSpc>
-                <a:spcPct val="115000"/>
-              </a:lnSpc>
-            </a:pPr>
-            <a:r>
-              <a:rPr sz="1000" b="0" i="1">
-                <a:solidFill>
-                  <a:srgbClr val="FFFFFF"/>
-                </a:solidFill>
-                <a:latin typeface="Arial"/>
-              </a:rPr>
-              <a:t>LO1</a:t>
-            </a:r>
-          </a:p>
-        </p:txBody>
-      </p:sp>
-      <p:sp>
-        <p:nvSpPr>
-          <p:cNvPr id="8" name="TextBox 7"/>
-          <p:cNvSpPr txBox="1"/>
-          <p:nvPr/>
-        </p:nvSpPr>
-        <p:spPr>
-          <a:xfrm>
-            <a:off x="1828800" y="1965960"/>
-            <a:ext cx="9720072" cy="1005839"/>
+            <a:off x="457200" y="2194560"/>
+            <a:ext cx="1188720" cy="548640"/>
           </a:xfrm>
           <a:prstGeom prst="rect">
             <a:avLst/>
@@ -37132,6 +37055,45 @@
           </a:bodyPr>
           <a:lstStyle/>
           <a:p>
+            <a:pPr algn="ctr">
+              <a:lnSpc>
+                <a:spcPct val="115000"/>
+              </a:lnSpc>
+            </a:pPr>
+            <a:r>
+              <a:rPr sz="2800" b="1" i="0">
+                <a:solidFill>
+                  <a:srgbClr val="FFFFFF"/>
+                </a:solidFill>
+                <a:latin typeface="Arial"/>
+              </a:rPr>
+              <a:t>Q1</a:t>
+            </a:r>
+          </a:p>
+        </p:txBody>
+      </p:sp>
+      <p:sp>
+        <p:nvSpPr>
+          <p:cNvPr id="7" name="TextBox 6"/>
+          <p:cNvSpPr txBox="1"/>
+          <p:nvPr/>
+        </p:nvSpPr>
+        <p:spPr>
+          <a:xfrm>
+            <a:off x="1828800" y="1965960"/>
+            <a:ext cx="9720072" cy="1005839"/>
+          </a:xfrm>
+          <a:prstGeom prst="rect">
+            <a:avLst/>
+          </a:prstGeom>
+          <a:noFill/>
+        </p:spPr>
+        <p:txBody>
+          <a:bodyPr wrap="square" lIns="0" rIns="0" tIns="0" bIns="0" anchor="ctr">
+            <a:spAutoFit/>
+          </a:bodyPr>
+          <a:lstStyle/>
+          <a:p>
             <a:pPr algn="l">
               <a:lnSpc>
                 <a:spcPct val="135000"/>
@@ -37151,7 +37113,7 @@
       </p:sp>
       <p:sp>
         <p:nvSpPr>
-          <p:cNvPr id="9" name="Rounded Rectangle 8"/>
+          <p:cNvPr id="8" name="Rounded Rectangle 7"/>
           <p:cNvSpPr/>
           <p:nvPr/>
         </p:nvSpPr>
@@ -37199,7 +37161,7 @@
       </p:sp>
       <p:sp>
         <p:nvSpPr>
-          <p:cNvPr id="10" name="Rectangle 9"/>
+          <p:cNvPr id="9" name="Rectangle 8"/>
           <p:cNvSpPr/>
           <p:nvPr/>
         </p:nvSpPr>
@@ -37243,92 +37205,14 @@
       </p:sp>
       <p:sp>
         <p:nvSpPr>
-          <p:cNvPr id="11" name="TextBox 10"/>
+          <p:cNvPr id="10" name="TextBox 9"/>
           <p:cNvSpPr txBox="1"/>
           <p:nvPr/>
         </p:nvSpPr>
         <p:spPr>
           <a:xfrm>
-            <a:off x="457200" y="3383279"/>
-            <a:ext cx="1188720" cy="457200"/>
-          </a:xfrm>
-          <a:prstGeom prst="rect">
-            <a:avLst/>
-          </a:prstGeom>
-          <a:noFill/>
-        </p:spPr>
-        <p:txBody>
-          <a:bodyPr wrap="square" lIns="0" rIns="0" tIns="0" bIns="0" anchor="t">
-            <a:spAutoFit/>
-          </a:bodyPr>
-          <a:lstStyle/>
-          <a:p>
-            <a:pPr algn="ctr">
-              <a:lnSpc>
-                <a:spcPct val="115000"/>
-              </a:lnSpc>
-            </a:pPr>
-            <a:r>
-              <a:rPr sz="2200" b="1" i="0">
-                <a:solidFill>
-                  <a:srgbClr val="FFFFFF"/>
-                </a:solidFill>
-                <a:latin typeface="Arial"/>
-              </a:rPr>
-              <a:t>Q2</a:t>
-            </a:r>
-          </a:p>
-        </p:txBody>
-      </p:sp>
-      <p:sp>
-        <p:nvSpPr>
-          <p:cNvPr id="12" name="TextBox 11"/>
-          <p:cNvSpPr txBox="1"/>
-          <p:nvPr/>
-        </p:nvSpPr>
-        <p:spPr>
-          <a:xfrm>
-            <a:off x="457200" y="3931920"/>
-            <a:ext cx="1188720" cy="365760"/>
-          </a:xfrm>
-          <a:prstGeom prst="rect">
-            <a:avLst/>
-          </a:prstGeom>
-          <a:noFill/>
-        </p:spPr>
-        <p:txBody>
-          <a:bodyPr wrap="square" lIns="0" rIns="0" tIns="0" bIns="0" anchor="t">
-            <a:spAutoFit/>
-          </a:bodyPr>
-          <a:lstStyle/>
-          <a:p>
-            <a:pPr algn="ctr">
-              <a:lnSpc>
-                <a:spcPct val="115000"/>
-              </a:lnSpc>
-            </a:pPr>
-            <a:r>
-              <a:rPr sz="1000" b="0" i="1">
-                <a:solidFill>
-                  <a:srgbClr val="FFFFFF"/>
-                </a:solidFill>
-                <a:latin typeface="Arial"/>
-              </a:rPr>
-              <a:t>LO2 + cross</a:t>
-            </a:r>
-          </a:p>
-        </p:txBody>
-      </p:sp>
-      <p:sp>
-        <p:nvSpPr>
-          <p:cNvPr id="13" name="TextBox 12"/>
-          <p:cNvSpPr txBox="1"/>
-          <p:nvPr/>
-        </p:nvSpPr>
-        <p:spPr>
-          <a:xfrm>
-            <a:off x="1828800" y="3383279"/>
-            <a:ext cx="9720072" cy="1005839"/>
+            <a:off x="457200" y="3611879"/>
+            <a:ext cx="1188720" cy="548640"/>
           </a:xfrm>
           <a:prstGeom prst="rect">
             <a:avLst/>
@@ -37341,6 +37225,45 @@
           </a:bodyPr>
           <a:lstStyle/>
           <a:p>
+            <a:pPr algn="ctr">
+              <a:lnSpc>
+                <a:spcPct val="115000"/>
+              </a:lnSpc>
+            </a:pPr>
+            <a:r>
+              <a:rPr sz="2800" b="1" i="0">
+                <a:solidFill>
+                  <a:srgbClr val="FFFFFF"/>
+                </a:solidFill>
+                <a:latin typeface="Arial"/>
+              </a:rPr>
+              <a:t>Q2</a:t>
+            </a:r>
+          </a:p>
+        </p:txBody>
+      </p:sp>
+      <p:sp>
+        <p:nvSpPr>
+          <p:cNvPr id="11" name="TextBox 10"/>
+          <p:cNvSpPr txBox="1"/>
+          <p:nvPr/>
+        </p:nvSpPr>
+        <p:spPr>
+          <a:xfrm>
+            <a:off x="1828800" y="3383279"/>
+            <a:ext cx="9720072" cy="1005839"/>
+          </a:xfrm>
+          <a:prstGeom prst="rect">
+            <a:avLst/>
+          </a:prstGeom>
+          <a:noFill/>
+        </p:spPr>
+        <p:txBody>
+          <a:bodyPr wrap="square" lIns="0" rIns="0" tIns="0" bIns="0" anchor="ctr">
+            <a:spAutoFit/>
+          </a:bodyPr>
+          <a:lstStyle/>
+          <a:p>
             <a:pPr algn="l">
               <a:lnSpc>
                 <a:spcPct val="135000"/>
@@ -37360,7 +37283,7 @@
       </p:sp>
       <p:sp>
         <p:nvSpPr>
-          <p:cNvPr id="14" name="Rounded Rectangle 13"/>
+          <p:cNvPr id="12" name="Rounded Rectangle 11"/>
           <p:cNvSpPr/>
           <p:nvPr/>
         </p:nvSpPr>
@@ -37408,7 +37331,7 @@
       </p:sp>
       <p:sp>
         <p:nvSpPr>
-          <p:cNvPr id="15" name="Rectangle 14"/>
+          <p:cNvPr id="13" name="Rectangle 12"/>
           <p:cNvSpPr/>
           <p:nvPr/>
         </p:nvSpPr>
@@ -37452,92 +37375,14 @@
       </p:sp>
       <p:sp>
         <p:nvSpPr>
-          <p:cNvPr id="16" name="TextBox 15"/>
+          <p:cNvPr id="14" name="TextBox 13"/>
           <p:cNvSpPr txBox="1"/>
           <p:nvPr/>
         </p:nvSpPr>
         <p:spPr>
           <a:xfrm>
-            <a:off x="457200" y="4800600"/>
-            <a:ext cx="1188720" cy="457200"/>
-          </a:xfrm>
-          <a:prstGeom prst="rect">
-            <a:avLst/>
-          </a:prstGeom>
-          <a:noFill/>
-        </p:spPr>
-        <p:txBody>
-          <a:bodyPr wrap="square" lIns="0" rIns="0" tIns="0" bIns="0" anchor="t">
-            <a:spAutoFit/>
-          </a:bodyPr>
-          <a:lstStyle/>
-          <a:p>
-            <a:pPr algn="ctr">
-              <a:lnSpc>
-                <a:spcPct val="115000"/>
-              </a:lnSpc>
-            </a:pPr>
-            <a:r>
-              <a:rPr sz="2200" b="1" i="0">
-                <a:solidFill>
-                  <a:srgbClr val="FFFFFF"/>
-                </a:solidFill>
-                <a:latin typeface="Arial"/>
-              </a:rPr>
-              <a:t>Q3</a:t>
-            </a:r>
-          </a:p>
-        </p:txBody>
-      </p:sp>
-      <p:sp>
-        <p:nvSpPr>
-          <p:cNvPr id="17" name="TextBox 16"/>
-          <p:cNvSpPr txBox="1"/>
-          <p:nvPr/>
-        </p:nvSpPr>
-        <p:spPr>
-          <a:xfrm>
-            <a:off x="457200" y="5349240"/>
-            <a:ext cx="1188720" cy="365760"/>
-          </a:xfrm>
-          <a:prstGeom prst="rect">
-            <a:avLst/>
-          </a:prstGeom>
-          <a:noFill/>
-        </p:spPr>
-        <p:txBody>
-          <a:bodyPr wrap="square" lIns="0" rIns="0" tIns="0" bIns="0" anchor="t">
-            <a:spAutoFit/>
-          </a:bodyPr>
-          <a:lstStyle/>
-          <a:p>
-            <a:pPr algn="ctr">
-              <a:lnSpc>
-                <a:spcPct val="115000"/>
-              </a:lnSpc>
-            </a:pPr>
-            <a:r>
-              <a:rPr sz="1000" b="0" i="1">
-                <a:solidFill>
-                  <a:srgbClr val="FFFFFF"/>
-                </a:solidFill>
-                <a:latin typeface="Arial"/>
-              </a:rPr>
-              <a:t>LO2 + LO3</a:t>
-            </a:r>
-          </a:p>
-        </p:txBody>
-      </p:sp>
-      <p:sp>
-        <p:nvSpPr>
-          <p:cNvPr id="18" name="TextBox 17"/>
-          <p:cNvSpPr txBox="1"/>
-          <p:nvPr/>
-        </p:nvSpPr>
-        <p:spPr>
-          <a:xfrm>
-            <a:off x="1828800" y="4800600"/>
-            <a:ext cx="9720072" cy="1005839"/>
+            <a:off x="457200" y="5029200"/>
+            <a:ext cx="1188720" cy="548640"/>
           </a:xfrm>
           <a:prstGeom prst="rect">
             <a:avLst/>
@@ -37550,6 +37395,45 @@
           </a:bodyPr>
           <a:lstStyle/>
           <a:p>
+            <a:pPr algn="ctr">
+              <a:lnSpc>
+                <a:spcPct val="115000"/>
+              </a:lnSpc>
+            </a:pPr>
+            <a:r>
+              <a:rPr sz="2800" b="1" i="0">
+                <a:solidFill>
+                  <a:srgbClr val="FFFFFF"/>
+                </a:solidFill>
+                <a:latin typeface="Arial"/>
+              </a:rPr>
+              <a:t>Q3</a:t>
+            </a:r>
+          </a:p>
+        </p:txBody>
+      </p:sp>
+      <p:sp>
+        <p:nvSpPr>
+          <p:cNvPr id="15" name="TextBox 14"/>
+          <p:cNvSpPr txBox="1"/>
+          <p:nvPr/>
+        </p:nvSpPr>
+        <p:spPr>
+          <a:xfrm>
+            <a:off x="1828800" y="4800600"/>
+            <a:ext cx="9720072" cy="1005839"/>
+          </a:xfrm>
+          <a:prstGeom prst="rect">
+            <a:avLst/>
+          </a:prstGeom>
+          <a:noFill/>
+        </p:spPr>
+        <p:txBody>
+          <a:bodyPr wrap="square" lIns="0" rIns="0" tIns="0" bIns="0" anchor="ctr">
+            <a:spAutoFit/>
+          </a:bodyPr>
+          <a:lstStyle/>
+          <a:p>
             <a:pPr algn="l">
               <a:lnSpc>
                 <a:spcPct val="135000"/>
@@ -37569,7 +37453,7 @@
       </p:sp>
       <p:sp>
         <p:nvSpPr>
-          <p:cNvPr id="19" name="Rounded Rectangle 18"/>
+          <p:cNvPr id="16" name="Rounded Rectangle 15"/>
           <p:cNvSpPr/>
           <p:nvPr/>
         </p:nvSpPr>
@@ -37617,7 +37501,7 @@
       </p:sp>
       <p:sp>
         <p:nvSpPr>
-          <p:cNvPr id="20" name="TextBox 19"/>
+          <p:cNvPr id="17" name="TextBox 16"/>
           <p:cNvSpPr txBox="1"/>
           <p:nvPr/>
         </p:nvSpPr>
@@ -37696,8 +37580,8 @@
         </p:blipFill>
         <p:spPr>
           <a:xfrm>
-            <a:off x="457200" y="801876"/>
-            <a:ext cx="7315200" cy="4339846"/>
+            <a:off x="457200" y="718964"/>
+            <a:ext cx="7132320" cy="4231350"/>
           </a:xfrm>
           <a:prstGeom prst="rect">
             <a:avLst/>
@@ -37712,8 +37596,8 @@
         </p:nvSpPr>
         <p:spPr>
           <a:xfrm>
-            <a:off x="457200" y="5623560"/>
-            <a:ext cx="7315200" cy="274320"/>
+            <a:off x="457200" y="5349240"/>
+            <a:ext cx="7132320" cy="274320"/>
           </a:xfrm>
           <a:prstGeom prst="rect">
             <a:avLst/>
@@ -37751,8 +37635,8 @@
         </p:nvSpPr>
         <p:spPr>
           <a:xfrm>
-            <a:off x="8046720" y="548640"/>
-            <a:ext cx="3749039" cy="5029200"/>
+            <a:off x="7680960" y="457200"/>
+            <a:ext cx="4206240" cy="5029200"/>
           </a:xfrm>
           <a:prstGeom prst="rect">
             <a:avLst/>
@@ -37767,11 +37651,59 @@
           <a:p>
             <a:pPr algn="l">
               <a:lnSpc>
-                <a:spcPct val="125000"/>
-              </a:lnSpc>
-            </a:pPr>
-            <a:r>
-              <a:rPr sz="1400" b="1" i="0">
+                <a:spcPct val="120000"/>
+              </a:lnSpc>
+            </a:pPr>
+            <a:r>
+              <a:rPr sz="2200" b="1" i="0">
+                <a:solidFill>
+                  <a:srgbClr val="21295C"/>
+                </a:solidFill>
+                <a:latin typeface="Arial"/>
+              </a:rPr>
+              <a:t>Спутник потерян —</a:t>
+            </a:r>
+          </a:p>
+          <a:p>
+            <a:pPr algn="l">
+              <a:lnSpc>
+                <a:spcPct val="120000"/>
+              </a:lnSpc>
+            </a:pPr>
+            <a:r>
+              <a:rPr sz="2600" b="1" i="0">
+                <a:solidFill>
+                  <a:srgbClr val="F0AB00"/>
+                </a:solidFill>
+                <a:latin typeface="Arial"/>
+              </a:rPr>
+              <a:t>карта осталась.</a:t>
+            </a:r>
+          </a:p>
+          <a:p>
+            <a:pPr algn="l">
+              <a:lnSpc>
+                <a:spcPct val="120000"/>
+              </a:lnSpc>
+            </a:pPr>
+            <a:r>
+              <a:rPr sz="1200" b="0" i="0">
+                <a:solidFill>
+                  <a:srgbClr val="21295C"/>
+                </a:solidFill>
+                <a:latin typeface="Arial"/>
+              </a:rPr>
+              <a:t/>
+            </a:r>
+          </a:p>
+          <a:p>
+            <a:pPr algn="l">
+              <a:lnSpc>
+                <a:spcPct val="120000"/>
+              </a:lnSpc>
+            </a:pPr>
+            <a:r>
+              <a:rPr sz="1300" b="1" i="0">
                 <a:solidFill>
                   <a:srgbClr val="065A82"/>
                 </a:solidFill>
@@ -37783,11 +37715,43 @@
           <a:p>
             <a:pPr algn="l">
               <a:lnSpc>
-                <a:spcPct val="125000"/>
-              </a:lnSpc>
-            </a:pPr>
-            <a:r>
-              <a:rPr sz="400" b="0" i="0">
+                <a:spcPct val="120000"/>
+              </a:lnSpc>
+            </a:pPr>
+            <a:r>
+              <a:rPr sz="1100" b="0" i="0">
+                <a:solidFill>
+                  <a:srgbClr val="21295C"/>
+                </a:solidFill>
+                <a:latin typeface="Arial"/>
+              </a:rPr>
+              <a:t>· 20 июня 2025 — потеря MethaneSAT</a:t>
+            </a:r>
+          </a:p>
+          <a:p>
+            <a:pPr algn="l">
+              <a:lnSpc>
+                <a:spcPct val="120000"/>
+              </a:lnSpc>
+            </a:pPr>
+            <a:r>
+              <a:rPr sz="1100" b="0" i="1">
+                <a:solidFill>
+                  <a:srgbClr val="21295C"/>
+                </a:solidFill>
+                <a:latin typeface="Arial"/>
+              </a:rPr>
+              <a:t>· ~2 000 data files за 15,5 мес → retrospective inventory</a:t>
+            </a:r>
+          </a:p>
+          <a:p>
+            <a:pPr algn="l">
+              <a:lnSpc>
+                <a:spcPct val="120000"/>
+              </a:lnSpc>
+            </a:pPr>
+            <a:r>
+              <a:rPr sz="800" b="0" i="0">
                 <a:solidFill>
                   <a:srgbClr val="21295C"/>
                 </a:solidFill>
@@ -37799,7 +37763,23 @@
           <a:p>
             <a:pPr algn="l">
               <a:lnSpc>
-                <a:spcPct val="125000"/>
+                <a:spcPct val="120000"/>
+              </a:lnSpc>
+            </a:pPr>
+            <a:r>
+              <a:rPr sz="1300" b="1" i="0">
+                <a:solidFill>
+                  <a:srgbClr val="065A82"/>
+                </a:solidFill>
+                <a:latin typeface="Arial"/>
+              </a:rPr>
+              <a:t>Final framing:</a:t>
+            </a:r>
+          </a:p>
+          <a:p>
+            <a:pPr algn="l">
+              <a:lnSpc>
+                <a:spcPct val="120000"/>
               </a:lnSpc>
             </a:pPr>
             <a:r>
@@ -37809,49 +37789,65 @@
                 </a:solidFill>
                 <a:latin typeface="Arial"/>
               </a:rPr>
-              <a:t>· Спутник потерян 20 июня 2025</a:t>
-            </a:r>
-          </a:p>
-          <a:p>
-            <a:pPr algn="l">
-              <a:lnSpc>
-                <a:spcPct val="125000"/>
-              </a:lnSpc>
-            </a:pPr>
-            <a:r>
-              <a:rPr sz="1400" b="1" i="0">
+              <a:t>AI в нефтегазе — это</a:t>
+            </a:r>
+          </a:p>
+          <a:p>
+            <a:pPr algn="l">
+              <a:lnSpc>
+                <a:spcPct val="120000"/>
+              </a:lnSpc>
+            </a:pPr>
+            <a:r>
+              <a:rPr sz="1300" b="1" i="0">
+                <a:solidFill>
+                  <a:srgbClr val="21295C"/>
+                </a:solidFill>
+                <a:latin typeface="Arial"/>
+              </a:rPr>
+              <a:t>измеримый успех</a:t>
+            </a:r>
+          </a:p>
+          <a:p>
+            <a:pPr algn="l">
+              <a:lnSpc>
+                <a:spcPct val="120000"/>
+              </a:lnSpc>
+            </a:pPr>
+            <a:r>
+              <a:rPr sz="1300" b="1" i="0">
                 <a:solidFill>
                   <a:srgbClr val="F0AB00"/>
                 </a:solidFill>
                 <a:latin typeface="Arial"/>
               </a:rPr>
-              <a:t>· Но карта осталась</a:t>
-            </a:r>
-          </a:p>
-          <a:p>
-            <a:pPr algn="l">
-              <a:lnSpc>
-                <a:spcPct val="125000"/>
-              </a:lnSpc>
-            </a:pPr>
-            <a:r>
-              <a:rPr sz="1100" b="0" i="1">
-                <a:solidFill>
-                  <a:srgbClr val="21295C"/>
-                </a:solidFill>
-                <a:latin typeface="Arial"/>
-              </a:rPr>
-              <a:t>· ~2 000 data files за 15,5 мес работы → retrospective inventory</a:t>
-            </a:r>
-          </a:p>
-          <a:p>
-            <a:pPr algn="l">
-              <a:lnSpc>
-                <a:spcPct val="125000"/>
-              </a:lnSpc>
-            </a:pPr>
-            <a:r>
-              <a:rPr sz="1000" b="0" i="0">
+              <a:t>+ структурная уязвимость</a:t>
+            </a:r>
+          </a:p>
+          <a:p>
+            <a:pPr algn="l">
+              <a:lnSpc>
+                <a:spcPct val="120000"/>
+              </a:lnSpc>
+            </a:pPr>
+            <a:r>
+              <a:rPr sz="1200" b="0" i="0">
+                <a:solidFill>
+                  <a:srgbClr val="21295C"/>
+                </a:solidFill>
+                <a:latin typeface="Arial"/>
+              </a:rPr>
+              <a:t>в одном кадре.</a:t>
+            </a:r>
+          </a:p>
+          <a:p>
+            <a:pPr algn="l">
+              <a:lnSpc>
+                <a:spcPct val="120000"/>
+              </a:lnSpc>
+            </a:pPr>
+            <a:r>
+              <a:rPr sz="600" b="0" i="0">
                 <a:solidFill>
                   <a:srgbClr val="21295C"/>
                 </a:solidFill>
@@ -37863,129 +37859,17 @@
           <a:p>
             <a:pPr algn="l">
               <a:lnSpc>
-                <a:spcPct val="125000"/>
-              </a:lnSpc>
-            </a:pPr>
-            <a:r>
-              <a:rPr sz="1400" b="1" i="0">
-                <a:solidFill>
-                  <a:srgbClr val="065A82"/>
-                </a:solidFill>
-                <a:latin typeface="Arial"/>
-              </a:rPr>
-              <a:t>Final framing:</a:t>
-            </a:r>
-          </a:p>
-          <a:p>
-            <a:pPr algn="l">
-              <a:lnSpc>
-                <a:spcPct val="125000"/>
-              </a:lnSpc>
-            </a:pPr>
-            <a:r>
-              <a:rPr sz="400" b="0" i="0">
-                <a:solidFill>
-                  <a:srgbClr val="21295C"/>
-                </a:solidFill>
-                <a:latin typeface="Arial"/>
-              </a:rPr>
-              <a:t/>
-            </a:r>
-          </a:p>
-          <a:p>
-            <a:pPr algn="l">
-              <a:lnSpc>
-                <a:spcPct val="125000"/>
-              </a:lnSpc>
-            </a:pPr>
-            <a:r>
-              <a:rPr sz="1300" b="0" i="0">
-                <a:solidFill>
-                  <a:srgbClr val="21295C"/>
-                </a:solidFill>
-                <a:latin typeface="Arial"/>
-              </a:rPr>
-              <a:t>AI в нефтегазе —</a:t>
-            </a:r>
-          </a:p>
-          <a:p>
-            <a:pPr algn="l">
-              <a:lnSpc>
-                <a:spcPct val="125000"/>
-              </a:lnSpc>
-            </a:pPr>
-            <a:r>
-              <a:rPr sz="1300" b="1" i="0">
-                <a:solidFill>
-                  <a:srgbClr val="21295C"/>
-                </a:solidFill>
-                <a:latin typeface="Arial"/>
-              </a:rPr>
-              <a:t>это измеримый успех</a:t>
-            </a:r>
-          </a:p>
-          <a:p>
-            <a:pPr algn="l">
-              <a:lnSpc>
-                <a:spcPct val="125000"/>
-              </a:lnSpc>
-            </a:pPr>
-            <a:r>
-              <a:rPr sz="1300" b="1" i="0">
-                <a:solidFill>
-                  <a:srgbClr val="F0AB00"/>
-                </a:solidFill>
-                <a:latin typeface="Arial"/>
-              </a:rPr>
-              <a:t>+ структурная уязвимость</a:t>
-            </a:r>
-          </a:p>
-          <a:p>
-            <a:pPr algn="l">
-              <a:lnSpc>
-                <a:spcPct val="125000"/>
-              </a:lnSpc>
-            </a:pPr>
-            <a:r>
-              <a:rPr sz="1300" b="0" i="0">
-                <a:solidFill>
-                  <a:srgbClr val="21295C"/>
-                </a:solidFill>
-                <a:latin typeface="Arial"/>
-              </a:rPr>
-              <a:t>в одном кадре.</a:t>
-            </a:r>
-          </a:p>
-          <a:p>
-            <a:pPr algn="l">
-              <a:lnSpc>
-                <a:spcPct val="125000"/>
-              </a:lnSpc>
-            </a:pPr>
-            <a:r>
-              <a:rPr sz="600" b="0" i="0">
-                <a:solidFill>
-                  <a:srgbClr val="21295C"/>
-                </a:solidFill>
-                <a:latin typeface="Arial"/>
-              </a:rPr>
-              <a:t/>
-            </a:r>
-          </a:p>
-          <a:p>
-            <a:pPr algn="l">
-              <a:lnSpc>
-                <a:spcPct val="125000"/>
-              </a:lnSpc>
-            </a:pPr>
-            <a:r>
-              <a:rPr sz="1100" b="0" i="1">
-                <a:solidFill>
-                  <a:srgbClr val="21295C"/>
-                </a:solidFill>
-                <a:latin typeface="Arial"/>
-              </a:rPr>
-              <a:t>Хороший инженер строит portfolio reading, не single-quadrant reading.</a:t>
+                <a:spcPct val="120000"/>
+              </a:lnSpc>
+            </a:pPr>
+            <a:r>
+              <a:rPr sz="1000" b="0" i="1">
+                <a:solidFill>
+                  <a:srgbClr val="21295C"/>
+                </a:solidFill>
+                <a:latin typeface="Arial"/>
+              </a:rPr>
+              <a:t>Хороший инженер строит portfolio reading, не single-quadrant.</a:t>
             </a:r>
           </a:p>
         </p:txBody>
@@ -37998,7 +37882,7 @@
         </p:nvSpPr>
         <p:spPr>
           <a:xfrm>
-            <a:off x="457200" y="5897880"/>
+            <a:off x="457200" y="5852160"/>
             <a:ext cx="11274552" cy="640080"/>
           </a:xfrm>
           <a:prstGeom prst="roundRect">
@@ -38046,7 +37930,7 @@
         </p:nvSpPr>
         <p:spPr>
           <a:xfrm>
-            <a:off x="640080" y="5971032"/>
+            <a:off x="640080" y="5925312"/>
             <a:ext cx="10908792" cy="502919"/>
           </a:xfrm>
           <a:prstGeom prst="rect">
@@ -38189,8 +38073,8 @@
         </p:nvSpPr>
         <p:spPr>
           <a:xfrm>
-            <a:off x="274320" y="2743200"/>
-            <a:ext cx="1188720" cy="365760"/>
+            <a:off x="91440" y="1554480"/>
+            <a:ext cx="1371600" cy="365760"/>
           </a:xfrm>
           <a:prstGeom prst="rect">
             <a:avLst/>
@@ -38209,13 +38093,13 @@
               </a:lnSpc>
             </a:pPr>
             <a:r>
-              <a:rPr sz="1200" b="1" i="0">
+              <a:rPr sz="1100" b="1" i="0">
                 <a:solidFill>
                   <a:srgbClr val="065A82"/>
                 </a:solidFill>
                 <a:latin typeface="Arial"/>
               </a:rPr>
-              <a:t>Данные →</a:t>
+              <a:t>Высокая ↑</a:t>
             </a:r>
           </a:p>
         </p:txBody>
@@ -38228,8 +38112,8 @@
         </p:nvSpPr>
         <p:spPr>
           <a:xfrm>
-            <a:off x="274320" y="1645920"/>
-            <a:ext cx="1188720" cy="365760"/>
+            <a:off x="91440" y="3383280"/>
+            <a:ext cx="1371600" cy="457200"/>
           </a:xfrm>
           <a:prstGeom prst="rect">
             <a:avLst/>
@@ -38248,13 +38132,13 @@
               </a:lnSpc>
             </a:pPr>
             <a:r>
-              <a:rPr sz="1000" b="0" i="0">
-                <a:solidFill>
-                  <a:srgbClr val="6B7685"/>
-                </a:solidFill>
-                <a:latin typeface="Arial"/>
-              </a:rPr>
-              <a:t>↑ Высокая</a:t>
+              <a:rPr sz="1400" b="1" i="0">
+                <a:solidFill>
+                  <a:srgbClr val="065A82"/>
+                </a:solidFill>
+                <a:latin typeface="Arial"/>
+              </a:rPr>
+              <a:t>Данные</a:t>
             </a:r>
           </a:p>
         </p:txBody>
@@ -38267,8 +38151,8 @@
         </p:nvSpPr>
         <p:spPr>
           <a:xfrm>
-            <a:off x="274320" y="5120640"/>
-            <a:ext cx="1188720" cy="365760"/>
+            <a:off x="91440" y="5074920"/>
+            <a:ext cx="1371600" cy="365760"/>
           </a:xfrm>
           <a:prstGeom prst="rect">
             <a:avLst/>
@@ -38287,9 +38171,9 @@
               </a:lnSpc>
             </a:pPr>
             <a:r>
-              <a:rPr sz="1000" b="0" i="0">
-                <a:solidFill>
-                  <a:srgbClr val="6B7685"/>
+              <a:rPr sz="1100" b="1" i="0">
+                <a:solidFill>
+                  <a:srgbClr val="065A82"/>
                 </a:solidFill>
                 <a:latin typeface="Arial"/>
               </a:rPr>
@@ -38306,8 +38190,8 @@
         </p:nvSpPr>
         <p:spPr>
           <a:xfrm>
-            <a:off x="2560320" y="5852160"/>
-            <a:ext cx="3200400" cy="365760"/>
+            <a:off x="1828800" y="5852160"/>
+            <a:ext cx="3657600" cy="365760"/>
           </a:xfrm>
           <a:prstGeom prst="rect">
             <a:avLst/>
@@ -38326,9 +38210,9 @@
               </a:lnSpc>
             </a:pPr>
             <a:r>
-              <a:rPr sz="1000" b="0" i="0">
-                <a:solidFill>
-                  <a:srgbClr val="6B7685"/>
+              <a:rPr sz="1100" b="1" i="0">
+                <a:solidFill>
+                  <a:srgbClr val="065A82"/>
                 </a:solidFill>
                 <a:latin typeface="Arial"/>
               </a:rPr>
@@ -38345,8 +38229,8 @@
         </p:nvSpPr>
         <p:spPr>
           <a:xfrm>
-            <a:off x="7498079" y="5852160"/>
-            <a:ext cx="3200400" cy="365760"/>
+            <a:off x="5029200" y="5852160"/>
+            <a:ext cx="2286000" cy="457200"/>
           </a:xfrm>
           <a:prstGeom prst="rect">
             <a:avLst/>
@@ -38365,13 +38249,13 @@
               </a:lnSpc>
             </a:pPr>
             <a:r>
-              <a:rPr sz="1000" b="0" i="0">
-                <a:solidFill>
-                  <a:srgbClr val="6B7685"/>
-                </a:solidFill>
-                <a:latin typeface="Arial"/>
-              </a:rPr>
-              <a:t>Высокая →</a:t>
+              <a:rPr sz="1400" b="1" i="0">
+                <a:solidFill>
+                  <a:srgbClr val="065A82"/>
+                </a:solidFill>
+                <a:latin typeface="Arial"/>
+              </a:rPr>
+              <a:t>Физика</a:t>
             </a:r>
           </a:p>
         </p:txBody>
@@ -38384,8 +38268,8 @@
         </p:nvSpPr>
         <p:spPr>
           <a:xfrm>
-            <a:off x="4114800" y="6126480"/>
-            <a:ext cx="4114800" cy="365760"/>
+            <a:off x="6858000" y="5852160"/>
+            <a:ext cx="3657600" cy="365760"/>
           </a:xfrm>
           <a:prstGeom prst="rect">
             <a:avLst/>
@@ -38404,13 +38288,13 @@
               </a:lnSpc>
             </a:pPr>
             <a:r>
-              <a:rPr sz="1200" b="1" i="0">
+              <a:rPr sz="1100" b="1" i="0">
                 <a:solidFill>
                   <a:srgbClr val="065A82"/>
                 </a:solidFill>
                 <a:latin typeface="Arial"/>
               </a:rPr>
-              <a:t>Физика →</a:t>
+              <a:t>Высокая →</a:t>
             </a:r>
           </a:p>
         </p:txBody>
@@ -38423,7 +38307,7 @@
         </p:nvSpPr>
         <p:spPr>
           <a:xfrm>
-            <a:off x="1554480" y="1463040"/>
+            <a:off x="1554480" y="1417320"/>
             <a:ext cx="4572000" cy="2057400"/>
           </a:xfrm>
           <a:prstGeom prst="roundRect">
@@ -38471,7 +38355,7 @@
         </p:nvSpPr>
         <p:spPr>
           <a:xfrm>
-            <a:off x="1737360" y="1554480"/>
+            <a:off x="1737360" y="1508760"/>
             <a:ext cx="4206240" cy="457200"/>
           </a:xfrm>
           <a:prstGeom prst="rect">
@@ -38497,7 +38381,7 @@
                 </a:solidFill>
                 <a:latin typeface="Arial"/>
               </a:rPr>
-              <a:t>Q2 — Methane MRV</a:t>
+              <a:t>Q2 — Метановая MRV</a:t>
             </a:r>
           </a:p>
         </p:txBody>
@@ -38510,7 +38394,7 @@
         </p:nvSpPr>
         <p:spPr>
           <a:xfrm>
-            <a:off x="1737360" y="2103120"/>
+            <a:off x="1737360" y="2057400"/>
             <a:ext cx="4206240" cy="1280160"/>
           </a:xfrm>
           <a:prstGeom prst="rect">
@@ -38536,7 +38420,7 @@
                 </a:solidFill>
                 <a:latin typeface="Arial"/>
               </a:rPr>
-              <a:t>AI essential
+              <a:t>AI необходим
 MethaneSAT / Carbon Mapper / GHGSat</a:t>
             </a:r>
           </a:p>
@@ -38550,7 +38434,7 @@
         </p:nvSpPr>
         <p:spPr>
           <a:xfrm>
-            <a:off x="6309360" y="1463040"/>
+            <a:off x="6309360" y="1417320"/>
             <a:ext cx="4572000" cy="2057400"/>
           </a:xfrm>
           <a:prstGeom prst="roundRect">
@@ -38598,7 +38482,7 @@
         </p:nvSpPr>
         <p:spPr>
           <a:xfrm>
-            <a:off x="6492240" y="1554480"/>
+            <a:off x="6492240" y="1508760"/>
             <a:ext cx="4206240" cy="457200"/>
           </a:xfrm>
           <a:prstGeom prst="rect">
@@ -38624,7 +38508,7 @@
                 </a:solidFill>
                 <a:latin typeface="Arial"/>
               </a:rPr>
-              <a:t>Q1 — Mature production</a:t>
+              <a:t>Q1 — Зрелое производство</a:t>
             </a:r>
           </a:p>
         </p:txBody>
@@ -38637,7 +38521,7 @@
         </p:nvSpPr>
         <p:spPr>
           <a:xfrm>
-            <a:off x="6492240" y="2103120"/>
+            <a:off x="6492240" y="2057400"/>
             <a:ext cx="4206240" cy="1280160"/>
           </a:xfrm>
           <a:prstGeom prst="rect">
@@ -38663,8 +38547,8 @@
                 </a:solidFill>
                 <a:latin typeface="Arial"/>
               </a:rPr>
-              <a:t>AI мультипликатор
-Ambyint +15% на 200 wells</a:t>
+              <a:t>AI как мультипликатор
+Ambyint +15% на 200 скважинах</a:t>
             </a:r>
           </a:p>
         </p:txBody>
@@ -38677,7 +38561,7 @@
         </p:nvSpPr>
         <p:spPr>
           <a:xfrm>
-            <a:off x="1554480" y="3657600"/>
+            <a:off x="1554480" y="3611880"/>
             <a:ext cx="4572000" cy="2057400"/>
           </a:xfrm>
           <a:prstGeom prst="roundRect">
@@ -38725,7 +38609,7 @@
         </p:nvSpPr>
         <p:spPr>
           <a:xfrm>
-            <a:off x="1737360" y="3749039"/>
+            <a:off x="1737360" y="3703320"/>
             <a:ext cx="4206240" cy="457200"/>
           </a:xfrm>
           <a:prstGeom prst="rect">
@@ -38751,7 +38635,7 @@
                 </a:solidFill>
                 <a:latin typeface="Arial"/>
               </a:rPr>
-              <a:t>Q4 — Energy transition</a:t>
+              <a:t>Q4 — Энергопереход</a:t>
             </a:r>
           </a:p>
         </p:txBody>
@@ -38764,7 +38648,7 @@
         </p:nvSpPr>
         <p:spPr>
           <a:xfrm>
-            <a:off x="1737360" y="4297680"/>
+            <a:off x="1737360" y="4251960"/>
             <a:ext cx="4206240" cy="1280160"/>
           </a:xfrm>
           <a:prstGeom prst="rect">
@@ -38790,7 +38674,7 @@
                 </a:solidFill>
                 <a:latin typeface="Arial"/>
               </a:rPr>
-              <a:t>AI и физика struggle вместе
+              <a:t>AI и физика буксуют вместе
 Northern Lights / Fervo</a:t>
             </a:r>
           </a:p>
@@ -38804,7 +38688,7 @@
         </p:nvSpPr>
         <p:spPr>
           <a:xfrm>
-            <a:off x="6309360" y="3657600"/>
+            <a:off x="6309360" y="3611880"/>
             <a:ext cx="4572000" cy="2057400"/>
           </a:xfrm>
           <a:prstGeom prst="roundRect">
@@ -38852,7 +38736,7 @@
         </p:nvSpPr>
         <p:spPr>
           <a:xfrm>
-            <a:off x="6492240" y="3749039"/>
+            <a:off x="6492240" y="3703320"/>
             <a:ext cx="4206240" cy="457200"/>
           </a:xfrm>
           <a:prstGeom prst="rect">
@@ -38878,7 +38762,7 @@
                 </a:solidFill>
                 <a:latin typeface="Arial"/>
               </a:rPr>
-              <a:t>Q3 — Frontier exploration</a:t>
+              <a:t>Q3 — Разведка фронтиров</a:t>
             </a:r>
           </a:p>
         </p:txBody>
@@ -38891,7 +38775,7 @@
         </p:nvSpPr>
         <p:spPr>
           <a:xfrm>
-            <a:off x="6492240" y="4297680"/>
+            <a:off x="6492240" y="4251960"/>
             <a:ext cx="4206240" cy="1280160"/>
           </a:xfrm>
           <a:prstGeom prst="rect">
@@ -38917,7 +38801,7 @@
                 </a:solidFill>
                 <a:latin typeface="Arial"/>
               </a:rPr>
-              <a:t>Physics-first, AI augmentation
+              <a:t>Physics-first, AI как дополнение
 Aramco METABRAIN / Eni HPC6</a:t>
             </a:r>
           </a:p>
@@ -38931,7 +38815,7 @@
         </p:nvSpPr>
         <p:spPr>
           <a:xfrm>
-            <a:off x="457200" y="6355080"/>
+            <a:off x="457200" y="6400800"/>
             <a:ext cx="11274552" cy="411480"/>
           </a:xfrm>
           <a:prstGeom prst="roundRect">
@@ -38979,7 +38863,7 @@
         </p:nvSpPr>
         <p:spPr>
           <a:xfrm>
-            <a:off x="640080" y="6428232"/>
+            <a:off x="640080" y="6473952"/>
             <a:ext cx="10908792" cy="274320"/>
           </a:xfrm>
           <a:prstGeom prst="rect">
@@ -39612,7 +39496,7 @@
                 </a:solidFill>
                 <a:latin typeface="Arial"/>
               </a:rPr>
-              <a:t>7. Cross-cutting</a:t>
+              <a:t>7. Сквозные</a:t>
             </a:r>
           </a:p>
         </p:txBody>
@@ -39626,7 +39510,7 @@
         <p:spPr>
           <a:xfrm>
             <a:off x="457200" y="914400"/>
-            <a:ext cx="5029200" cy="4114800"/>
+            <a:ext cx="5029200" cy="3291840"/>
           </a:xfrm>
           <a:prstGeom prst="rect">
             <a:avLst/>
@@ -39664,8 +39548,8 @@
         </p:nvSpPr>
         <p:spPr>
           <a:xfrm>
-            <a:off x="457200" y="4389120"/>
-            <a:ext cx="5029200" cy="548640"/>
+            <a:off x="457200" y="4434840"/>
+            <a:ext cx="5029200" cy="502920"/>
           </a:xfrm>
           <a:prstGeom prst="rect">
             <a:avLst/>
@@ -39684,13 +39568,13 @@
               </a:lnSpc>
             </a:pPr>
             <a:r>
-              <a:rPr sz="2400" b="1" i="0">
-                <a:solidFill>
-                  <a:srgbClr val="21295C"/>
-                </a:solidFill>
-                <a:latin typeface="Arial"/>
-              </a:rPr>
-              <a:t>Mature production</a:t>
+              <a:rPr sz="2200" b="1" i="0">
+                <a:solidFill>
+                  <a:srgbClr val="21295C"/>
+                </a:solidFill>
+                <a:latin typeface="Arial"/>
+              </a:rPr>
+              <a:t>Зрелое производство</a:t>
             </a:r>
           </a:p>
         </p:txBody>
@@ -39816,7 +39700,7 @@
                 </a:solidFill>
                 <a:latin typeface="Arial"/>
               </a:rPr>
-              <a:t>3 working cases · 2 структурных провала · 86% pilot stuck — статистическая норма</a:t>
+              <a:t>3 рабочих кейса · 2 структурных провала · 86% пилотов застряло — статистическая норма</a:t>
             </a:r>
           </a:p>
         </p:txBody>
@@ -40365,7 +40249,7 @@
         </p:nvSpPr>
         <p:spPr>
           <a:xfrm>
-            <a:off x="457200" y="365760"/>
+            <a:off x="457200" y="320040"/>
             <a:ext cx="11274552" cy="777240"/>
           </a:xfrm>
           <a:prstGeom prst="rect">
@@ -40385,7 +40269,7 @@
               </a:lnSpc>
             </a:pPr>
             <a:r>
-              <a:rPr sz="2400" b="1" i="0">
+              <a:rPr sz="2200" b="1" i="0">
                 <a:solidFill>
                   <a:srgbClr val="21295C"/>
                 </a:solidFill>
@@ -40404,7 +40288,7 @@
         </p:nvSpPr>
         <p:spPr>
           <a:xfrm>
-            <a:off x="457200" y="1143000"/>
+            <a:off x="457200" y="1097280"/>
             <a:ext cx="11274552" cy="365760"/>
           </a:xfrm>
           <a:prstGeom prst="rect">
@@ -40443,8 +40327,8 @@
         </p:nvSpPr>
         <p:spPr>
           <a:xfrm>
-            <a:off x="457200" y="1691640"/>
-            <a:ext cx="5029200" cy="4023360"/>
+            <a:off x="457200" y="1554480"/>
+            <a:ext cx="5029200" cy="4114800"/>
           </a:xfrm>
           <a:prstGeom prst="roundRect">
             <a:avLst>
@@ -40499,7 +40383,7 @@
         </p:blipFill>
         <p:spPr>
           <a:xfrm>
-            <a:off x="640080" y="3050381"/>
+            <a:off x="640080" y="2913221"/>
             <a:ext cx="4663440" cy="1214437"/>
           </a:xfrm>
           <a:prstGeom prst="rect">
@@ -40515,7 +40399,7 @@
         </p:nvSpPr>
         <p:spPr>
           <a:xfrm>
-            <a:off x="640080" y="5486400"/>
+            <a:off x="640080" y="5349240"/>
             <a:ext cx="4572000" cy="274320"/>
           </a:xfrm>
           <a:prstGeom prst="rect">
@@ -40554,8 +40438,8 @@
         </p:nvSpPr>
         <p:spPr>
           <a:xfrm>
-            <a:off x="5669280" y="1691640"/>
-            <a:ext cx="6062472" cy="4023360"/>
+            <a:off x="5669280" y="1554480"/>
+            <a:ext cx="6062472" cy="4114800"/>
           </a:xfrm>
           <a:prstGeom prst="roundRect">
             <a:avLst>
@@ -40602,8 +40486,8 @@
         </p:nvSpPr>
         <p:spPr>
           <a:xfrm>
-            <a:off x="5852160" y="1783080"/>
-            <a:ext cx="5760720" cy="3840480"/>
+            <a:off x="5852160" y="1645920"/>
+            <a:ext cx="5760720" cy="4023360"/>
           </a:xfrm>
           <a:prstGeom prst="rect">
             <a:avLst/>
@@ -40817,7 +40701,7 @@
         </p:nvSpPr>
         <p:spPr>
           <a:xfrm>
-            <a:off x="457200" y="5943600"/>
+            <a:off x="457200" y="5806440"/>
             <a:ext cx="11274552" cy="502920"/>
           </a:xfrm>
           <a:prstGeom prst="roundRect">
@@ -40865,7 +40749,7 @@
         </p:nvSpPr>
         <p:spPr>
           <a:xfrm>
-            <a:off x="640080" y="6016752"/>
+            <a:off x="640080" y="5879592"/>
             <a:ext cx="10908792" cy="365760"/>
           </a:xfrm>
           <a:prstGeom prst="rect">

--- a/library/lectures/lec-16/rendered/lec-16.pptx
+++ b/library/lectures/lec-16/rendered/lec-16.pptx
@@ -644,7 +644,7 @@
             <a:br/>
             <a:br/>
             <a:r>
-              <a:t>Двадцать три продукта, десять коммерциализованных — лидирующий в индустрии показатель для NOC. Российский паттерн — ближе к китайской модели (Sinopec, CNOOC внутренние разработки), не к американской vendor-based модели.</a:t>
+              <a:t>Двадцать три продукта, десять коммерциализованных — лидирующий в индустрии показатель для нацкомпания. Российский паттерн — ближе к китайской модели (Sinopec, CNOOC внутренние разработки), не к американской поставщик-based модели.</a:t>
             </a:r>
             <a:br/>
             <a:br/>
@@ -724,27 +724,27 @@
           <a:lstStyle/>
           <a:p>
             <a:r>
-              <a:t>Возвращаемся к структурному провалу Q1, теперь с другого ракурса. В предыдущем слайде мы посмотрели на статистику пилотов; здесь — на конкретные компании, которые шли по сценарию «independent industrial AI vendor для нефтегаза».</a:t>
+              <a:t>Это структурный провал Q1 с другого ракурса. Ранее мы посмотрели на статистику пилотов; здесь — на конкретные компании, которые шли по сценарию «независимый промышленный AI-вендор для нефтегаза».</a:t>
             </a:r>
             <a:br/>
             <a:br/>
             <a:r>
-              <a:t>Cognite — норвежский стартап, выделившийся из Aker BP в 2017 году. Якорный клиент — Aker BP. Финансовая история: 2018 — оценка триста миллионов; 2021-2022 — план IPO на два-три миллиарда долларов в 2023 году; 2023 — IPO отменён из-за рыночных условий и сжигания капитала; 2024 — ARR девяносто четыре миллиона при темпе сорок процентов YoY; 2025-2026 — время IPO неопределённо.</a:t>
+              <a:t>Cognite — норвежский стартап, выделившийся из Aker BP в 2017 году. Якорный клиент — Aker BP. Финансовая история: 2018 — оценка триста миллионов; 2021-2022 — план IPO на два-три миллиарда долларов в 2023 году; 2023 — IPO отменён из-за рыночных условий и сжигания капитала; 2024 — ARR (годовая повторяющаяся выручка) девяносто четыре миллиона при темпе сорок процентов г/г; 2025-2026 — время IPO неопределённо.</a:t>
             </a:r>
             <a:br/>
             <a:br/>
             <a:r>
-              <a:t>ARR девяносто четыре миллиона при темпе сорок процентов — это здоровый SaaS-бизнес. Но для оценки два-три миллиарда нужен темп шестьдесят-восемьдесят процентов или сильная маржа. Aker BP остаётся якорным клиентом; независимая монетизация на другие индустрии идёт медленнее.</a:t>
+              <a:t>ARR (годовая повторяющаяся выручка) девяносто четыре миллиона при темпе сорок процентов — это здоровый SaaS-бизнес. Но для оценки два-три миллиарда нужен темп шестьдесят-восемьдесят процентов или сильная маржа. Aker BP остаётся якорным клиентом; независимая монетизация на другие индустрии идёт медленнее.</a:t>
             </a:r>
             <a:br/>
             <a:br/>
             <a:r>
-              <a:t>C3.ai — публичная американская AI-компания, основанная Tom Siebel в 2009 году. Совместное предприятие BHC3 с Baker Hughes для нефтегазовой вертикали — структурно реструктурировано к 2023. Финансовый год 2024: нефтегазовая вертикаль — пять и девять десятых процента от общей выручки, то есть около восемнадцати миллионов из трёхсот десяти. Финансовый год 2025: «не-нефтегазовая выручка плюс сорок восемь процентов YoY» — формулировка означает, что нефтегазовая вертикаль уменьшается в абсолюте.</a:t>
+              <a:t>C3.ai — публичная американская AI-компания, основанная Tom Siebel в 2009 году. Совместное предприятие BHC3 с Baker Hughes для нефтегазовой вертикали — структурно реструктурировано к 2023. Финансовый год 2024: нефтегазовая вертикаль — пять и девять десятых процента от общей выручки, то есть около восемнадцати миллионов из трёхсот десяти. Финансовый год 2025: «не-нефтегазовая выручка плюс сорок восемь процентов г/г» — формулировка означает, что нефтегазовая вертикаль уменьшается в абсолюте.</a:t>
             </a:r>
             <a:br/>
             <a:br/>
             <a:r>
-              <a:t>Общий паттерн. Узкоспециализированные AI-компании для нефтегаза не достигли масштаба в эпоху больших универсальных моделей. SLB Lumi и Aramco METABRAIN — мы их увидим в Разделе 2 — поедают рынок узкоспециализированных через два механизма. Первое: большая модель плюс LoRA-дообучение обычно лучше специализированной маленькой. Второе: у крупных NOC есть мотив разрабатывать собственные большие модели внутри.</a:t>
+              <a:t>Общий паттерн. Узкоспециализированные AI-компании для нефтегаза не достигли масштаба в эпоху больших универсальных моделей. SLB Lumi и Aramco METABRAIN — мы их увидим в Разделе 2 — поедают рынок узкоспециализированных через два механизма. Первое: большая модель плюс LoRA (лёгкое дообучение) обычно лучше специализированной маленькой. Второе: у крупных нацкомпаний есть мотив разрабатывать собственные большие модели внутри.</a:t>
             </a:r>
           </a:p>
         </p:txBody>
@@ -814,7 +814,7 @@
           <a:lstStyle/>
           <a:p>
             <a:r>
-              <a:t>Это центральный пункт раздела по миссии LO2 — когда отказаться. В Q1, то есть в высоко-data плюс высоко-physics квадранте, AI по умолчанию претендует на применение, и инженер должен уметь сказать «нет» там, где AI не нужен.</a:t>
+              <a:t>Это центральный пункт раздела по миссии когда отказаться. В Q1, то есть в высоко-data плюс высоко-physics квадранте, AI по умолчанию претендует на применение, и инженер должен уметь сказать «нет» там, где AI не нужен.</a:t>
             </a:r>
             <a:br/>
             <a:br/>
@@ -849,7 +849,7 @@
             <a:br/>
             <a:br/>
             <a:r>
-              <a:t>Главный навык LO2 — уметь сказать «нет». Разница между четырнадцатью процентами успешных и восьмьюдесятью шестью застрявших — часто именно здесь.</a:t>
+              <a:t>Главный навык уметь сказать «нет». Разница между четырнадцатью процентами успешных и восьмьюдесятью шестью застрявших — часто именно здесь.</a:t>
             </a:r>
           </a:p>
         </p:txBody>
@@ -919,7 +919,7 @@
           <a:lstStyle/>
           <a:p>
             <a:r>
-              <a:t>HPC-гонка Q3 — это разные стратегии у каждой крупной компании.</a:t>
+              <a:t>HPC (высокопроизводительные вычисления)-гонка Q3 — это разные стратегии у каждой крупной компании.</a:t>
             </a:r>
             <a:br/>
             <a:br/>
@@ -929,7 +929,7 @@
             <a:br/>
             <a:br/>
             <a:r>
-              <a:t>Aramco METABRAIN. В 2024 году Saudi Aramco разработала METABRAIN — большую универсальную модель внутреннего использования. Объявленные параметры на 2024 год — примерно двести пятьдесят миллиардов; цифры volatile, требуют проверки. Обучение на семи триллионах токенов, представляющих девяносто лет operational data Aramco. Шесть тысяч сотрудников обучены работать с инструментарием на основе METABRAIN. Четыреста тридцать use cases идентифицированы.</a:t>
+              <a:t>Aramco METABRAIN. В 2024 году Saudi Aramco разработала METABRAIN — большую универсальную модель внутреннего использования. Объявленные параметры на 2024 год — примерно двести пятьдесят миллиардов; цифры volatile, требуют проверки. Обучение на семи триллионах токенов, представляющих девяносто лет operational data Aramco. Шесть тысяч сотрудников обучены работать с инструментарием на основе METABRAIN. Четыреста тридцать сценарий примененияs идентифицированы.</a:t>
             </a:r>
             <a:br/>
             <a:br/>
@@ -939,7 +939,7 @@
             <a:br/>
             <a:br/>
             <a:r>
-              <a:t>Два урока. Первое — один и восемь десятых миллиарда долларов — self-reported, не аудированное число. Второе — METABRAIN внутренний продукт, не продаётся наружу. Это competitive moat и одновременно структурное отличие от BP + Beyond Limits и IBM + Repsol, которые мы разберём через два слайда.</a:t>
+              <a:t>Два урока. Первое — один и восемь десятых миллиарда долларов — самоотчётный, не аудированное число. Второе — METABRAIN внутренний продукт, не продаётся наружу. Это competitive moat и одновременно структурное отличие от BP + Beyond Limits и IBM + Repsol, которые мы разберём через два слайда.</a:t>
             </a:r>
           </a:p>
         </p:txBody>
@@ -1009,27 +1009,27 @@
           <a:lstStyle/>
           <a:p>
             <a:r>
-              <a:t>В сентябре 2024 года SLB — бывшая Schlumberger, переименована в 2022 году — запустила Lumi. Это отраслевая foundation model поверх своей облачной платформы Delfi. Delfi — это E&amp;P-платформа, оперирующая на AWS, Azure, GCP с 2018-го. Lumi обучена на NVIDIA Grace Hopper Superchip; anchor customers — Aker BP, Shell, Azule Energy (это BP + Eni Angolan joint venture).</a:t>
+              <a:t>В сентябре 2024 года SLB — бывшая Schlumberger, переименована в 2022 году — запустила Lumi. Это отраслевая базовая модель поверх своей облачной платформы Delfi. Delfi — это E&amp;P-платформа, оперирующая на AWS, Azure, GCP с 2018-го. Lumi обучена на NVIDIA Grace Hopper Superchip; якорный заказчикs — Aker BP, Shell, Azule Energy (это BP + Eni Angolan совместное предприятие).</a:t>
             </a:r>
             <a:br/>
             <a:br/>
             <a:r>
-              <a:t>Что Lumi делает. Foundation model для специфических задач разведки. Первое — petrophysics interpretation, интерпретация каротажа; ML заменяет первичную обработку, senior petrophysicist делает финальный QC. Второе — seismic auto-tracking, автоматическая трассировка горизонтов в 3D-сейсмике; ускоряет работу геофизика, не заменяет в frontier basin. Третье — drilling automation queries, natural language interface к историческим данным.</a:t>
+              <a:t>Что Lumi делает. Foundation model для специфических задач разведки. Первое — петрофизика interpretation, интерпретация каротажа; ML заменяет первичную обработку, senior petrophysicist делает финальный QC. Второе — seismic auto-tracking, автоматическая трассировка горизонтов в 3D-сейсмике; ускоряет работу геофизика, не заменяет в фронтирный бассейн. Третье — drilling automation queries, natural language interface к историческим данным.</a:t>
             </a:r>
             <a:br/>
             <a:br/>
             <a:r>
-              <a:t>Финансовая контекстуализация. SLB digital revenue в 2024 году превысил два миллиарда долларов на полный год. Это около пяти и семи десятых процентов от total SLB revenue в тридцать пять миллиардов. Направление: дальнейшее adoption Delfi technology. Lumi — следующий этап монетизации после Delfi.</a:t>
+              <a:t>Финансовая контекстуализация. SLB цифровая выручка в 2024 году превысил два миллиарда долларов на полный год. Это около пяти и семи десятых процентов от total SLB revenue в тридцать пять миллиардов. Направление: дальнейшее adoption Delfi technology. Lumi — следующий этап монетизации после Delfi.</a:t>
             </a:r>
             <a:br/>
             <a:br/>
             <a:r>
-              <a:t>Главная точка про mode versus brand. Когда инженер слышит «отраслевая foundation model для нефтегаза», он должен помнить: это режим применения AI, не уникальный продукт SLB. Тот же режим реализуют Aramco METABRAIN — но внутренний, не продаётся. OpenAI или Anthropic — общие foundation models, fine-tuned под нефтегаз. Microsoft Azure ML плюс Google Cloud Vertex AI — стек гиперскейлера с доменной донастройкой. Internal models Газпром нефти.</a:t>
+              <a:t>Главная точка про режим versus бренд. Когда инженер слышит «отраслевая базовая модель для нефтегаза», он должен помнить: это режим применения AI, не уникальный продукт SLB. Тот же режим реализуют Aramco METABRAIN — но внутренний, не продаётся. OpenAI или Anthropic — общие базовая модельs, fine-tuned под нефтегаз. Microsoft Azure ML плюс Google Cloud Vertex AI — стек гиперскейлера с доменной донастройкой. Internal models Газпром нефти.</a:t>
             </a:r>
             <a:br/>
             <a:br/>
             <a:r>
-              <a:t>Выбор между Lumi и альтернативой — это выбор не «между AI и не-AI», а между вертикально-интегрированным стеком и дезагрегированным стеком. Для крупного NOC второй вариант часто предпочтительнее.</a:t>
+              <a:t>Выбор между Lumi и альтернативой — это выбор не «между AI и не-AI», а между вертикально-интегрированным стеком и дезагрегированным стеком. Для крупного нацкомпания второй вариант часто предпочтительнее.</a:t>
             </a:r>
           </a:p>
         </p:txBody>
@@ -1099,7 +1099,7 @@
           <a:lstStyle/>
           <a:p>
             <a:r>
-              <a:t>В первой половине 2025 года ExxonMobil развернула Discovery 6 — суперкомпьютер на базе HPE Cray EX4000 с четырьмя тысячами тридцатью двумя NVIDIA Grace Hopper Superchip. Это четырёхкратное увеличение compute мощности относительно Discovery 5. Капитальные затраты публично не раскрыты, но по аналогии с Eni HPC6 — оценочно двести-четыреста миллионов долларов; требует уточнения.</a:t>
+              <a:t>В первой половине 2025 года ExxonMobil развернула Discovery 6 — суперкомпьютер на базе HPE Cray EX4000 с четырьмя тысячами тридцатью двумя NVIDIA Grace Hopper Superchip. Это четырёхкратное увеличение вычисления мощности относительно Discovery 5. Капитальные затраты публично не раскрыты, но по аналогии с Eni HPC6 — оценочно двести-четыреста миллионов долларов; требует уточнения.</a:t>
             </a:r>
             <a:br/>
             <a:br/>
@@ -1109,17 +1109,17 @@
             <a:br/>
             <a:br/>
             <a:r>
-              <a:t>Stabroek Block в Гайане. ExxonMobil — оператор Stabroek, одного из крупнейших offshore нефтяных открытий двадцать первого века. Stabroek estimate — девять-одиннадцать миллиардов BOE recoverable. Для контраста: Permian-Pioneer ExxonMobil после слияния 2024 — шестнадцать миллиардов BOE. Discovery 6 unlock — один миллиард плюс долларов value на первых шести FPSO; FPSO — это плавучая платформа добычи, хранения, выгрузки нефти. Первые шесть FPSO — это около тридцати-сорока процентов от планируемой capacity Stabroek.</a:t>
+              <a:t>Stabroek Block в Гайане. ExxonMobil — оператор Stabroek, одного из крупнейших offshore нефтяных открытий двадцать первого века. Stabroek estimate — девять-одиннадцать миллиардов BOE recoverable. Для контраста: Permian-Pioneer ExxonMobil после слияния 2024 — шестнадцать миллиардов BOE. Discovery 6 unlock — один миллиард плюс долларов value на первых шести плавучая платформа (FPSO); плавучая платформа (FPSO) — это плавучая платформа добычи, хранения, выгрузки нефти. Первые шесть плавучая платформа (FPSO) — это около тридцати-сорока процентов от планируемой кап.acity Stabroek.</a:t>
             </a:r>
             <a:br/>
             <a:br/>
             <a:r>
-              <a:t>Сравнение HPC-стратегий. Eni выбрал AMD как cost-effective per FLOP. ExxonMobil выбрал NVIDIA Grace Hopper как доминирующий в ML workloads. Aramco — комбинация HPC плюс foundation model. Все три — проприетарные. Это значит, что рынок HPC для нефтегаза не «коммодизируется», как hyperscaler cloud — каждый major имеет свой стек.</a:t>
+              <a:t>Сравнение HPC (высокопроизводительные вычисления)-стратегий. Eni выбрал AMD как эффективный по затратам per FLOP. ExxonMobil выбрал NVIDIA Grace Hopper как доминирующий в ML workloads. Aramco — комбинация HPC (высокопроизводительные вычисления) плюс базовая модель. Все три — проприетарные. Это значит, что рынок HPC (высокопроизводительные вычисления) для нефтегаза не «коммодизируется», как hyperscaler cloud — каждый major имеет свой стек.</a:t>
             </a:r>
             <a:br/>
             <a:br/>
             <a:r>
-              <a:t>Anti-hype в HPC-гонке. Цифры compute мощности впечатляют, но не равны business value. «Четыре икс» означает только compute throughput, не business value.</a:t>
+              <a:t>Anti-hype в HPC (высокопроизводительные вычисления)-гонке. Цифры вычисления мощности впечатляют, но не равны business value. «Четыре икс» означает только вычисления throughput, не business value.</a:t>
             </a:r>
           </a:p>
         </p:txBody>
@@ -1189,7 +1189,7 @@
           <a:lstStyle/>
           <a:p>
             <a:r>
-              <a:t>В июне 2017 года BP Ventures возглавила раунд Series B на двадцать миллионов долларов в Beyond Limits — стартапе из Глендейла, Калифорния, выделившемся из NASA Jet Propulsion Laboratory с claim'ом, что технология «cognitive AI» для исследовательских миссий deep space теперь применима в нефтегазе. Активный rollout партнёрства — 2018-2022 годы; vendor pivot 2022-2023; полная wind-down O&amp;G focus 2023.</a:t>
+              <a:t>В июне 2017 года BP Ventures возглавила раунд раунд Series B на двадцать миллионов долларов в Beyond Limits — стартапе из Глендейла, Калифорния, выделившемся из NASA Jet Propulsion Laboratory с claim'ом, что технология «когнитивный AI» для исследовательских миссий deep space теперь применима в нефтегазе. Активный rollout партнёрства — 2018-2022 годы; разворот поставщика 2022-2023; полная wind-down O&amp;G фокус 2023.</a:t>
             </a:r>
             <a:br/>
             <a:br/>
@@ -1199,12 +1199,12 @@
             <a:br/>
             <a:br/>
             <a:r>
-              <a:t>Что вышло за 2018-2025. Публичных результатов roll-out нет за семь лет. Beyond Limits сменил отраслевой focus с oil&amp;gas на general industrial AI, потом в healthcare и manufacturing в 2023 году. BP не обновил кейс на своём сайте после 2019 года. 2020 oil crash плюс BP «Beyond Petroleum» rebrand — digital teams реструктурированы. К 2024 году ни BP, ни Beyond Limits не отвечают на запросы о статусе партнёрства.</a:t>
+              <a:t>Что вышло за 2018-2025. Публичных результатов roll-out нет за семь лет. Beyond Limits сменил отраслевой фокус с oil&amp;gas на general промышленный AI, потом в healthcare и manufacturing в 2023 году. BP не обновил кейс на своём сайте после 2019 года. 2020 oil crash плюс BP «Beyond Petroleum» rebrand — digital teams реструктурированы. К 2024 году ни BP, ни Beyond Limits не отвечают на запросы о статусе партнёрства.</a:t>
             </a:r>
             <a:br/>
             <a:br/>
             <a:r>
-              <a:t>Три фундаментальных урока. Первый — «cognitive AI» с приставкой «обещанная generalizable autonomy» не материализовалась. Это был ML-marketing эпохи 2018 года: компании присваивали маркетинговое название «cognitive» обычному ML. Реальная архитектура Beyond Limits — комбинация classical rule-based reasoning плюс ML — не имела фундаментального преимущества над чистым ML.</a:t>
+              <a:t>Три фундаментальных урока. Первый — «когнитивный AI» с приставкой «обещанная generalizable autonomy» не материализовалась. Это был ML-marketing эпохи 2018 года: компании присваивали маркетинговое название «cognitive» обычному ML. Реальная архитектура Beyond Limits — комбинация классический rule-based reasoning плюс ML — не имела фундаментального преимущества над чистым ML.</a:t>
             </a:r>
             <a:br/>
             <a:br/>
@@ -1214,7 +1214,7 @@
             <a:br/>
             <a:br/>
             <a:r>
-              <a:t>Третий — «имитировать decision-making геолога» — это anthropomorphic overpromise. Реальные геологи делают решение на основе implicit knowledge, которое тяжело кодифицировать: pattern recognition после двадцати лет работы с одной геологической провинцией. AI 2018 года не мог имитировать эту работу — сама задача неправильно поставлена. Правильная задача — augmentation, ускорять рутинные задачи геолога, оставляя ему judgment calls.</a:t>
+              <a:t>Третий — «имитировать decision-making геолога» — это антропоморфное переобещание. Реальные геологи делают решение на основе implicit knowledge, которое тяжело кодифицировать: pattern recognition после двадцати лет работы с одной геологической провинцией. AI 2018 года не мог имитировать эту работу — сама задача неправильно поставлена. Правильная задача — дополнение, ускорять рутинные задачи геолога, оставляя ему суждение calls.</a:t>
             </a:r>
           </a:p>
         </p:txBody>
@@ -1284,7 +1284,7 @@
           <a:lstStyle/>
           <a:p>
             <a:r>
-              <a:t>В 2014 году IBM и испанская Repsol объявили партнёрство Kalimba project с целью применить IBM Watson cognitive computing к тридцати годам exploration data Repsol. Проект запустили в IBM Cognitive Environments Laboratory в Нью-Йорке и Repsol Technology Centre в Мадриде. Объявлены результаты в первой половине 2016 года.</a:t>
+              <a:t>В 2014 году IBM и испанская Repsol объявили партнёрство Kalimba project с целью применить IBM Watson когнитивные вычисления к тридцати годам exploration data Repsol. Проект запустили в IBM Cognitive Environments Laboratory в Нью-Йорке и Repsol Technology Centre в Мадриде. Объявлены результаты в первой половине 2016 года.</a:t>
             </a:r>
             <a:br/>
             <a:br/>
@@ -1299,7 +1299,7 @@
             <a:br/>
             <a:br/>
             <a:r>
-              <a:t>Три фундаментальных урока. Первый — general-purpose «cognitive computing» platforms не scaled в narrow domain как O&amp;G exploration. Watson в 2014 году был оптимизирован под general-purpose Q&amp;A и medical literature analysis. Применение тех же архитектур в нефтегазовой разведке требовало specialized training data, specialized model architectures — то, что Watson 2014 года не давал. IBM не инвестировал в vertical specialization.</a:t>
+              <a:t>Три фундаментальных урока. Первый — универсальный «когнитивные вычисления» platforms не scaled в узкая область как O&amp;G exploration. Watson в 2014 году был оптимизирован под универсальный Q&amp;A и medical literature analysis. Применение тех же архитектур в нефтегазовой разведке требовало specialized training data, specialized model architectures — то, что Watson 2014 года не давал. IBM не инвестировал в вертикаль specialization.</a:t>
             </a:r>
             <a:br/>
             <a:br/>
@@ -1309,12 +1309,12 @@
             <a:br/>
             <a:br/>
             <a:r>
-              <a:t>Третий — hype cycle 2014-2016 → реальное commercial use в 2018+ меньше десяти процентов от ожиданий. Это типичный паттерн hype-to-disappointment. Параллельный паттерн сейчас разворачивается с LLM agents в 2024-2025 — это сюжет Раздела 4.</a:t>
+              <a:t>Третий — цикл хайпа 2014-2016 → реальное коммерческое применение в 2018+ меньше десяти процентов от ожиданий. Это типичный паттерн hype-to-disappointment. Параллельный паттерн сейчас разворачивается с LLM agents в 2024-2025 — это сюжет Раздела 4.</a:t>
             </a:r>
             <a:br/>
             <a:br/>
             <a:r>
-              <a:t>Параллель Watson Health критична. Тот же IBM, та же эпоха, та же «cognitive computing» упаковка, та же неспособность scale. Это два manifestation одной структурной ошибки.</a:t>
+              <a:t>Параллель Watson Health критична. Тот же IBM, та же эпоха, та же «когнитивные вычисления» упаковка, та же неспособность scale. Это два manifestation одной структурной ошибки.</a:t>
             </a:r>
           </a:p>
         </p:txBody>
@@ -1384,12 +1384,12 @@
           <a:lstStyle/>
           <a:p>
             <a:r>
-              <a:t>Это ключевой раздел LO3 для Q3. Когда AI в frontier exploration буксует — что используют операторы вместо? Ответ — physics-based simulators, разработанные за десятилетия и хорошо валидированные.</a:t>
+              <a:t>Это ключевой раздел для Q3. Когда AI в разведка фронтиров буксует — что используют операторы вместо? Ответ — физически обоснованный simulators, разработанные за десятилетия и хорошо валидированные.</a:t>
             </a:r>
             <a:br/>
             <a:br/>
             <a:r>
-              <a:t>Eclipse — industry-standard reservoir simulator от SLB. Используется с восьмидесятых; сегодня — flagship для большинства мейджоров. Решает coupled fluid плюс heat плюс chemistry equations на 3D-сетке пласта. Параметризируется через свойства породы, fluid PVT, kinetics. Скорость — десятки часов до дней на крупной модели; точность — well-characterized.</a:t>
+              <a:t>Eclipse — отраслевой стандарт симулятор пласта от SLB. Используется с восьмидесятых; сегодня — ключевой для большинства мейджоров. Решает coupled fluid плюс heat плюс уравнения химии на 3D-сетке пласта. Параметризируется через свойства породы, fluid PVT, kinetics. Скорость — десятки часов до дней на крупной модели; точность — well-characterized.</a:t>
             </a:r>
             <a:br/>
             <a:br/>
@@ -1399,27 +1399,27 @@
             <a:br/>
             <a:br/>
             <a:r>
-              <a:t>CMG — Computer Modelling Group, Калгари. Три продукта. IMEX — black-oil reservoir simulator. STARS — thermal и advanced processes, для теплового EOR, паровых методов в тяжёлой нефти. GEM — compositional simulator для газоконденсатных систем. Niche, но stable.</a:t>
+              <a:t>CMG — Computer Modelling Group, Калгари. Три продукта. IMEX — чёрная нефть симулятор пласта. STARS — thermal и advanced processes, для теплового методы увеличения нефтеотдачи (МУН), паровых методов в тяжёлой нефти. GEM — compositional simulator для газоконденсатных систем. Niche, но stable.</a:t>
             </a:r>
             <a:br/>
             <a:br/>
             <a:r>
-              <a:t>OpenFOAM — open-source CFD пакет. Не reservoir simulator per se, но используется для CFD-моделирования в CCS, в multi-phase flow, в gas plume modelling.</a:t>
+              <a:t>OpenFOAM — open-source CFD пакет. Не симулятор пласта per se, но используется для CFD-моделирования в CCS, в многофазный поток, в gas plume modelling.</a:t>
             </a:r>
             <a:br/>
             <a:br/>
             <a:r>
-              <a:t>Когда использовать physics-based вместо ML. Mature reservoir плюс regulatory submission: регулятор требует physics-traceable submission. Complex EOR scenarios. Hydraulic fracturing modelling. CCS plume migration на 100-летнем горизонте. Frontier basin без analog — ML не на чем обучать.</a:t>
+              <a:t>Когда использовать физически обоснованный вместо ML. Mature коллектор плюс регуляторный отчёт: регулятор требует физически прослеживаемый submission. Complex методы увеличения нефтеотдачи (МУН) scenarios. Hydraulic fracturing modelling. CCS миграция шлейфа на 100-летнем горизонте. Frontier basin без analog — ML не на чем обучать.</a:t>
             </a:r>
             <a:br/>
             <a:br/>
             <a:r>
-              <a:t>PINN — physics-informed neural networks — попытка построить мост: speed of ML плюс consistency of physics. Активно изучается academia с 2019 года. К 2026 году PINN — не mainstream commercial product. Это потенциальный мост в будущее, но не сейчас.</a:t>
+              <a:t>PINN (нейросеть с встроенной физикой) — physics-informed neural networks — попытка построить мост: speed of ML плюс consistency of physics. Активно изучается academia с 2019 года. К 2026 году PINN (нейросеть с встроенной физикой) — не mainstream commercial product. Это потенциальный мост в будущее, но не сейчас.</a:t>
             </a:r>
             <a:br/>
             <a:br/>
             <a:r>
-              <a:t>Экономика. Senior геолог с двадцатью пятью годами опыта стоит компании двести-пятьсот тысяч долларов в год. Foundation model с обучением плюс интеграцией — пять-двадцать миллионов в год. Арифметика простая: пять-двадцать пять старших геологов за стоимость одной инсталляции foundation model. Foundation model окупается только если воспроизводит работу пяти-двадцати пяти геологов — что в 2026 году не доказано ни одним публичным бенчмарком.</a:t>
+              <a:t>Экономика. Senior геолог с двадцатью пятью годами опыта стоит компании двести-пятьсот тысяч долларов в год. Foundation model с обучением плюс интеграцией — пять-двадцать миллионов в год. Арифметика простая: пять-двадцать пять старших геологов за стоимость одной инсталляции базовая модель. Foundation model окупается только если воспроизводит работу пяти-двадцати пяти геологов — что в 2026 году не доказано ни одним публичным бенчмарком.</a:t>
             </a:r>
           </a:p>
         </p:txBody>
@@ -1489,27 +1489,27 @@
           <a:lstStyle/>
           <a:p>
             <a:r>
-              <a:t>Перед тем как идти в Раздел 3, зафиксируем шесть терминов, которые встретятся в каждом слайде. Brand names — Aramco, SLB, MethaneSAT и т.д. — мы не глоссируем, это собственные имена. Технические аббревиатуры — обязательно.</a:t>
+              <a:t>Перед тем как идти в Раздел 3, зафиксируем шесть терминов, которые встретятся в каждом слайде. Бренд names — Aramco, SLB, MethaneSAT и т.д. — мы не глоссируем, это собственные имена. Технические аббревиатуры — обязательно.</a:t>
             </a:r>
             <a:br/>
             <a:br/>
             <a:r>
-              <a:t>MRV — monitoring, reporting, verification — выявление, учёт, проверка. Совокупность процессов по обнаружению, измерению и аудиту выбросов метана. Под EU Methane Regulation 2024/1787 — обязательная процедура для импортёров СПГ в ЕС.</a:t>
+              <a:t>MRV — мониторинг, reporting, верификация — выявление, учёт, проверка. Совокупность процессов по обнаружению, измерению и аудиту выбросов метана. Под EU Methane Regulation 2024/1787 — обязательная процедура для импортёров СПГ в ЕС.</a:t>
             </a:r>
             <a:br/>
             <a:br/>
             <a:r>
-              <a:t>OGI — optical gas imaging — оптическая газовая визуализация. IR-камера, видящая углеводородные газы как «облако». Hand-held — Teledyne FLIR GFx320, Opgal EyeCGas. Fixed — Rebellion Photonics. Mainstream стандарт для compliance под EPA Method 21 и EU LDAR.</a:t>
+              <a:t>OGI — optical gas imaging — оптическая газовая визуализация. ИК-камера, видящая углеводородные газы как «облако». ручной — Teledyne FLIR GFx320, Opgal EyeCGas. Fixed — Rebellion Photonics. Mainstream стандарт для соответствие под EPA Method 21 и EU LDAR (выявление и устранение утечек).</a:t>
             </a:r>
             <a:br/>
             <a:br/>
             <a:r>
-              <a:t>LDAR — leak detection and repair — программа выявления и устранения утечек. Регуляторная программа: операторы обязаны четыре раза в год обходить площадки с OGI и ремонтировать выявленные утечки за пять-пятнадцать рабочих дней.</a:t>
+              <a:t>LDAR (выявление и устранение утечек) — выявление утечек and repair — программа выявления и устранения утечек. Регуляторная программа: операторы обязаны четыре раза в год обходить площадки с OGI и ремонтировать выявленные утечки за пять-пятнадцать рабочих дней.</a:t>
             </a:r>
             <a:br/>
             <a:br/>
             <a:r>
-              <a:t>OGMP 2.0 — Oil and Gas Methane Partnership, инициатива UNEP. Глобальный рамочный подход отчётности по метану, уровни от первого до пятого. Level 1 — оценка по emission factors, низкая точность. Level 5 — прямое измерение всех источников, золотой стандарт. EU Methane Reg ориентирована на Level 4/5.</a:t>
+              <a:t>OGMP 2.0 — Oil and Gas Methane Partnership, инициатива UNEP. Глобальный рамочный подход отчётности по метану, уровни от первого до пятого. Level 1 — оценка по коэффициенты эмиссии, низкая точность. Level 5 — прямое измерение всех источников, золотой стандарт. EU Methane Reg ориентирована на Level 4/5.</a:t>
             </a:r>
             <a:br/>
             <a:br/>
@@ -1594,12 +1594,12 @@
             <a:br/>
             <a:br/>
             <a:r>
-              <a:t>Главный вопрос лекции: в каком квадранте матрицы данные × физика AI становится мультипликатором классических методов, а где он либо essential, либо опасен. Мы будем разбирать конкретно — на материале десяти документированных провалов индустрии за период 2014–2026.</a:t>
+              <a:t>Главный вопрос лекции: в каком квадранте матрицы данные × физика AI становится мультипликатором классических методов, а где он либо необходим, либо опасен. Мы будем разбирать конкретно — на материале десяти документированных провалов индустрии за период 2014–2026.</a:t>
             </a:r>
             <a:br/>
             <a:br/>
             <a:r>
-              <a:t>Структура лекции: сначала вводим несущую ось — двумерную матрицу. Потом четыре раздела по квадрантам. Потом российский фрагмент. Потом сквозные риски — кибер и цикличность отрасли. И в конце — синтез и три cornerstone концепта, которые перейдут в Лекцию 17.</a:t>
+              <a:t>Структура лекции: сначала вводим несущую ось — двумерную матрицу. Потом четыре раздела по квадрантам. Потом российский фрагмент. Потом сквозные риски — кибер и цикличность отрасли. И в конце — синтез и три опорный концепт концепта, которые перейдут в Лекцию 17.</a:t>
             </a:r>
             <a:br/>
             <a:br/>
@@ -1679,22 +1679,22 @@
             <a:br/>
             <a:br/>
             <a:r>
-              <a:t>Что MethaneSAT отличало от других спутников. Wide-area coverage — поле зрения примерно двести на двести километров, что покрывает крупные нефтегазовые бассейны за один проход. Высокая точность — порог детекции порядка пятисот килограммов в час при идеализированных условиях. Open data policy — все данные публиковались open access через Google Earth Engine. Mission design — explicit фокус на нефтегазовом метане, девяносто процентов emissions, не на широком GHG-мониторинге.</a:t>
+              <a:t>Что MethaneSAT отличало от других спутников. широкий охват — поле зрения примерно двести на двести километров, что покрывает крупные нефтегазовые бассейны за один проход. Высокая точность — порог детекции порядка пятисот килограммов в час при идеализированных условиях. Open data policy — все данные публиковались open access через Google Earth Engine. Mission design — explicit фокус на нефтегазовом метане, девяносто процентов emissions, не на широком GHG-мониторинге.</a:t>
             </a:r>
             <a:br/>
             <a:br/>
             <a:r>
-              <a:t>Первый flagship результат — Пермский бассейн. В 2024 году MethaneSAT измерил эмиссии метана в Пермском бассейне и опубликовал результат: примерно четыреста десять тонн метана в час, что соответствует трём целым шести десятым миллионам тонн в год; на пятьдесят процентов выше официальной оценки EPA для этого региона. Дополнительные результаты — методановая интенсивность Нью-Мексико один и две десятых процента vs Техас три и одна десятая процента: пятикратный разрыв между двумя соседними штатами одного бассейна.</a:t>
+              <a:t>Первый ключевой результат — Пермский бассейн. В 2024 году MethaneSAT измерил эмиссии метана в Пермском бассейне и опубликовал результат: примерно четыреста десять тонн метана в час, что соответствует трём целым шести десятым миллионам тонн в год; на пятьдесят процентов выше официальной оценки EPA для этого региона. Дополнительные результаты — методановая интенсивность Нью-Мексико один и две десятых процента vs Техас три и одна десятая процента: пятикратный разрыв между двумя соседними штатами одного бассейна.</a:t>
             </a:r>
             <a:br/>
             <a:br/>
             <a:r>
-              <a:t>Контекст. Нью-Мексико ввёл регуляцию метана в 2021 году — требование девяноста восьми процентов gas capture к концу 2026 года. Техас — нет. Регуляция работает, и MethaneSAT её количественно зафиксировал.</a:t>
+              <a:t>Контекст. Нью-Мексико ввёл регуляцию метана в 2021 году — требование девяноста восьми процентов gas кап.ture к концу 2026 года. Техас — нет. Регуляция работает, и MethaneSAT её количественно зафиксировал.</a:t>
             </a:r>
             <a:br/>
             <a:br/>
             <a:r>
-              <a:t>К моменту потери MethaneSAT опубликовал около двух тысяч data files, сто восемьдесят с лишним сцен и десять научных публикаций. EU 2024/1787 и EPA Subpart W разрешили satellite quantification как primary data source. MethaneSAT становился regulatory infrastructure.</a:t>
+              <a:t>К моменту потери MethaneSAT опубликовал около двух тысяч data files, сто восемьдесят с лишним сцен и десять научных публикаций. EU 2024/1787 и EPA Subpart W разрешили satellite quantification как primary data source. MethaneSAT становился регуляторная инфраструктура.</a:t>
             </a:r>
           </a:p>
         </p:txBody>
@@ -1774,22 +1774,22 @@
             <a:br/>
             <a:br/>
             <a:r>
-              <a:t>Первый — single-satellite mission равно catastrophic single point of failure для regulatory MRV infrastructure. Когда EU Methane Regulation 2024/1787 предусматривает использование satellite measurements как accepted data source — и primary global satellite NGO-owned data source потерян — что делать с этой data infrastructure? Ответ к концу 2025 года: scramble к alternative data sources. Но resilience matters from day one.</a:t>
+              <a:t>Первый — один спутник mission равно catastrophic single point of failure для regulatory MRV infrastructure. Когда EU Methane Regulation 2024/1787 предусматривает использование satellite measurements как accepted data source — и primary global satellite NGO-owned data source потерян — что делать с этой data infrastructure? Ответ к концу 2025 года: scramble к alternative data sources. Но resilience matters from day one.</a:t>
             </a:r>
             <a:br/>
             <a:br/>
             <a:r>
-              <a:t>Второй — даже с успешным запуском и хорошими данными первого года hardware reliability остаётся fundamental constraint. MethaneSAT работал отлично пятнадцать с половиной месяцев. Это не «технология провалилась»; это «спутник в космосе — это hardware с конечной reliability». Для critical infrastructure нужно constellation model, не single mission.</a:t>
+              <a:t>Второй — даже с успешным запуском и хорошими данными первого года надёжность аппаратуры остаётся fundamental constraint. MethaneSAT работал отлично пятнадцать с половиной месяцев. Это не «технология провалилась»; это «спутник в космосе — это аппаратура с конечной reliability». Для главный infrastructure нужно группировка model, не single mission.</a:t>
             </a:r>
             <a:br/>
             <a:br/>
             <a:r>
-              <a:t>Третий — regulatory enforcement не может опираться на один спутник. EU regulator после MethaneSAT loss принимает GHGSat данные с осторожностью и приоритизирует ground OGI campaigns для compliance. Это усиливает позицию ground OGI как альтернативного инструмента и снижает зависимость от satellite AI MRV.</a:t>
+              <a:t>Третий — regulatory enforcement не может опираться на один спутник. EU regulator после MethaneSAT loss принимает GHGSat данные с осторожностью и приоритизирует ground OGI campaigns для соответствие. Это усиливает позицию ground OGI как альтернативного инструмента и снижает зависимость от satellite AI MRV.</a:t>
             </a:r>
             <a:br/>
             <a:br/>
             <a:r>
-              <a:t>Четвёртый — AI без stable upstream data source не работает. Это самый глубокий урок. MethaneSAT использовал AI для downstream processing — atmospheric retrieval, plume detection, emission quantification. Когда upstream sensor stream исчезает — все downstream ML-модели становятся бесполезны на новых данных. То же самое случилось бы при потере любой ключевой сенсорной модальности. AI — это слой над данными, не источник данных.</a:t>
+              <a:t>Четвёртый — AI без stable верхний слой данных source не работает. Это самый глубокий урок. MethaneSAT использовал AI для downstream processing — atmospheric retrieval, plume detection, emission quantification. Когда upstream sensor stream исчезает — все downstream ML-модели становятся бесполезны на новых данных. То же самое случилось бы при потере любой ключевой сенсорной модальности. AI — это слой над данными, не источник данных.</a:t>
             </a:r>
             <a:br/>
             <a:br/>
@@ -1869,7 +1869,7 @@
             <a:br/>
             <a:br/>
             <a:r>
-              <a:t>Carbon Mapper Tanager-1. Карбоновый mapping satellite от коалиции Planet Labs плюс NASA Jet Propulsion Laboratory плюс Carbon Mapper Inc. Запущен шестнадцатого августа 2024 года, full operations summer 2025. Facility-level detection — то есть способный идентифицировать утечки на уровне отдельной установки. Tanager-1 — первый из планируемой constellation Tanager.</a:t>
+              <a:t>Carbon Mapper Tanager-1. Карбоновый mapping satellite от коалиции Planet Labs плюс NASA Jet Propulsion Laboratory плюс Carbon Mapper Inc. Запущен шестнадцатого августа 2024 года, full operations summer 2025. Facility-level detection — то есть способный идентифицировать утечки на уровне отдельной установки. Tanager-1 — первый из планируемой группировка Tanager.</a:t>
             </a:r>
             <a:br/>
             <a:br/>
@@ -1879,17 +1879,17 @@
             <a:br/>
             <a:br/>
             <a:r>
-              <a:t>Bridger Photonics — американская компания из Бозмана, Монтана. Aircraft-based Gas Mapping LiDAR. Самолёт пролетает над нефтепромыслом на низкой высоте; LiDAR-сенсор измеряет концентрацию метана. Согласно валидационной кампании British Columbia LDAR, aerial measurements в четыре раза более точные, чем ground OGI на тех же сайтах. Customers — ExxonMobil, ConocoPhillips, EOG Resources, Pioneer.</a:t>
+              <a:t>Bridger Photonics — американская компания из Бозмана, Монтана. Aircraft-based Gas Mapping LiDAR. Самолёт пролетает над нефтепромыслом на низкой высоте; LiDAR-сенсор измеряет концентрацию метана. Согласно валидационной кампании British Columbia LDAR (выявление и устранение утечек), aerial measurements в четыре раза более точные, чем ground OGI на тех же сайтах. Customers — ExxonMobil, ConocoPhillips, EOG Resources, Pioneer.</a:t>
             </a:r>
             <a:br/>
             <a:br/>
             <a:r>
-              <a:t>SeekOps — drone-based methane detection. Используется в midstream applications — компрессорные станции, газораспределительные сети — и для gas utilities. Customers — TC Energy, ENGIE.</a:t>
+              <a:t>SeekOps — drone-based метан detection. Используется в midstream applications — компрессорные станции, газораспределительные сети — и для gas utilities. Customers — TC Energy, ENGIE.</a:t>
             </a:r>
             <a:br/>
             <a:br/>
             <a:r>
-              <a:t>Project Canary — methane analytics плюс ESG-рейтинги. Не сенсорный поставщик; агрегирует данные от других источников плюс добавляет сертификационный подход.</a:t>
+              <a:t>Project Canary — метан analytics плюс ESG-рейтинги. Не сенсорный поставщик; агрегирует данные от других источников плюс добавляет сертификационный подход.</a:t>
             </a:r>
             <a:br/>
             <a:br/>
@@ -1969,7 +1969,7 @@
             <a:br/>
             <a:br/>
             <a:r>
-              <a:t>MethaneSAT измерения US oil&amp;gas methane эмиссии — примерно пятнадцать миллионов тонн в год. EPA Inventory официальная оценка — примерно четыре миллиона тонн в год. Фактор разрыва — примерно четыре.</a:t>
+              <a:t>MethaneSAT измерения US oil&amp;gas метан эмиссии — примерно пятнадцать миллионов тонн в год. EPA Inventory официальная оценка — примерно четыре миллиона тонн в год. Фактор разрыва — примерно четыре.</a:t>
             </a:r>
             <a:br/>
             <a:br/>
@@ -1979,22 +1979,22 @@
             <a:br/>
             <a:br/>
             <a:r>
-              <a:t>Aerial vs OGI на одних и тех же sites. Aerial measurements от Bridger Photonics в четыре раза выше, чем ground OGI на тех же sites — British Columbia LDAR validation study. Ground OGI системно underestimates утечки, потому что OGI inspector проходит сайт за десять-двадцать минут и физически не видит intermittent emissions.</a:t>
+              <a:t>Aerial vs OGI на одних и тех же sites. Aerial measurements от Bridger Photonics в четыре раза выше, чем ground OGI на тех же sites — British Columbia LDAR (выявление и устранение утечек) validation study. Ground OGI системно underestimates утечки, потому что OGI inspector проходит сайт за десять-двадцать минут и физически не видит intermittent emissions.</a:t>
             </a:r>
             <a:br/>
             <a:br/>
             <a:r>
-              <a:t>Девятисателлитный single-blind тест 2024 года в Atmospheric Measurement Techniques. Ноль false positives — хорошо. Но только пятьдесят восемь процентов correctly identified; сорок один false negative — пропущенных реальных утечек. Даже когда AI MRV хорошо настроена, она пропускает почти половину реальных эмиссий.</a:t>
+              <a:t>Девятисателлитный single-blind тест 2024 года в Atmospheric Measurement Techniques. Ноль ложные срабатывания — хорошо. Но только пятьдесят восемь процентов correctly identified; сорок один false negative — пропущенных реальных утечек. Даже когда AI MRV хорошо настроена, она пропускает почти половину реальных эмиссий.</a:t>
             </a:r>
             <a:br/>
             <a:br/>
             <a:r>
-              <a:t>Что этот конфликт означает. EPA emission factors были откалиброваны десять-двадцать лет назад и не отражают реальный operational mix современного нефтегазового производства. MethaneSAT и aerial campaigns показывают, что real-world эмиссии выше — потому что они захватывают intermittent superemitters. Satellite плюс aerial AI detection methods inconsistent друг с другом. Это не «один прав, другой нет» — это methodological calibration difference.</a:t>
+              <a:t>Что этот конфликт означает. EPA коэффициенты эмиссии были откалиброваны десять-двадцать лет назад и не отражают реальный operational mix современного нефтегазового производства. MethaneSAT и aerial campaigns показывают, что real-world эмиссии выше — потому что они захватывают intermittent superemitters. Satellite плюс aerial AI detection methods inconsistent друг с другом. Это не «один прав, другой нет» — это methodological calibration difference.</a:t>
             </a:r>
             <a:br/>
             <a:br/>
             <a:r>
-              <a:t>Главное. No agreed ground truth. У industry, регулятора, NGO, академии — нет согласованного методологического стандарта. Урок для LO7: AI MRV — promising, но не ready для contract enforcement без cross-validation protocols. EU 2024/1787 требует Level 4/5 = триангуляция. Это engineering necessity, не избыток bureaucracy.</a:t>
+              <a:t>Главное. No agreed эталон. У отрасль, регулятора, NGO, академии — нет согласованного методологического стандарта. Урок: AI MRV — promising, но не ready для контрактное принуждение без протоколы перекрёстной валидации. EU 2024/1787 требует Level 4/5 = триангуляция. Это инженерная необходимость, не избыток bureaucracy.</a:t>
             </a:r>
           </a:p>
         </p:txBody>
@@ -2069,7 +2069,7 @@
             <a:br/>
             <a:br/>
             <a:r>
-              <a:t>EU Methane Regulation 2024/1787, adopted четвёртого августа 2024 года. Это первый comprehensive EU методан-закон для нефтегазовой индустрии. Применяется к production внутри ЕС плюс imports — СПГ, ископаемый газ, нефть, уголь. Ключевые требования. OGMP 2.0 Level 4/5 alignment: operators обязаны отчитываться по Level 4 — квантификация по компонентам — или Level 5 — прямое измерение. LDAR programme deadline — пятое мая 2025 года. Annual emissions reports — пятое августа 2025 года. Penalty — до двадцати процентов годового оборота. Для major majors с EU оборотом — это multi-billion EUR exposure. Operators обязаны четыре раза в год survey плюс repair leaks в течение пяти-пятнадцати рабочих дней. К 2027 году все imports газа в ЕС должны соответствовать EU methane intensity standards — менее или равно ноль и две десятых процента по природному газу.</a:t>
+              <a:t>EU Methane Regulation 2024/1787, adopted четвёртого августа 2024 года. Это первый comprehensive EU методан-закон для нефтегазовой индустрии. Применяется к production внутри ЕС плюс imports — СПГ, ископаемый газ, нефть, уголь. Ключевые требования. OGMP 2.0 Level 4/5 alignment: operators обязаны отчитываться по Level 4 — квантификация по компонентам — или Level 5 — прямое измерение. LDAR (выявление и устранение утечек) programme срок — пятое мая 2025 года. Annual emissions reports — пятое августа 2025 года. Penalty — до двадцати процентов годового оборота. Для major majors с EU оборотом — это multi-billion EUR exposure. Operators обязаны четыре раза в год survey плюс repair leaks в течение пяти-пятнадцати рабочих дней. К 2027 году все imports газа в ЕС должны соответствовать EU метан intensity standards — менее или равно ноль и две десятых процента по природному газу.</a:t>
             </a:r>
             <a:br/>
             <a:br/>
@@ -2084,7 +2084,7 @@
             <a:br/>
             <a:br/>
             <a:r>
-              <a:t>Структурный сдвиг. EU regulation жёсткая, mandatory, с короткими deadlines — создаёт спрос на AI MRV solutions, которые работают сейчас. Толкает рынок AI MRV в Европе. US regulation мягче, политически неопределённа, с возможными delays — создаёт wait-and-see среду. Тормозит рынок AI MRV в США. Эта асимметрия — структурный сдвиг.</a:t>
+              <a:t>Структурный сдвиг. EU regulation жёсткая, обязательно, с короткими сроки — создаёт спрос на AI MRV solutions, которые работают сейчас. Толкает рынок AI MRV в Европе. US regulation мягче, политически неопределённа, с возможными delays — создаёт wait-and-see среду. Тормозит рынок AI MRV в США. Эта асимметрия — структурный сдвиг.</a:t>
             </a:r>
           </a:p>
         </p:txBody>
@@ -2154,22 +2154,22 @@
           <a:lstStyle/>
           <a:p>
             <a:r>
-              <a:t>Это критический раздел для LO3 в Q2. Альтернатива AI MRV — это ground-based direct measurement campaigns.</a:t>
+              <a:t>Это критический раздел в Q2. Альтернатива AI MRV — это ground-based прямое измерение campaigns.</a:t>
             </a:r>
             <a:br/>
             <a:br/>
             <a:r>
-              <a:t>Hand-held OGI cameras. Teledyne FLIR GFx320 — flagship industry standard. Видит углеводородные газы как «облако» через IR-фильтр; цифровая запись для аудита. Используется EPA Method 21, EU LDAR programmes. Opgal EyeCGas — конкурент FLIR; добавляет quantitative OGI capability — не только видит утечку, но и приближённо измеряет её расход. Rebellion Photonics, теперь Honeywell — fixed hyperspectral imaging system, постоянный мониторинг.</a:t>
+              <a:t>ручные OGI-камеры. Teledyne FLIR GFx320 — ключевой отрасль standard. Видит углеводородные газы как «облако» через IR-фильтр; цифровая запись для аудита. Используется EPA Method 21, EU LDAR (выявление и устранение утечек) programmes. Opgal EyeCGas — конкурент FLIR; добавляет quantitative OGI кап.ability — не только видит утечку, но и приближённо измеряет её расход. Rebellion Photonics, теперь Honeywell — fixed hyperspectral imaging system, постоянный мониторинг.</a:t>
             </a:r>
             <a:br/>
             <a:br/>
             <a:r>
-              <a:t>Portable laser analyzers. Picarro G2210-i — cavity ring-down spectroscopy, спектроскопия с резонатором; измеряет концентрации метана с лабораторной точностью на месте измерения. Часто используется как ground truth для калибровки OGI и aerial measurements. LI-COR LI-7810 — конкурент Picarro.</a:t>
+              <a:t>переносной laser analyzers. Picarro G2210-i — спектроскопия затухания в полости, спектроскопия с резонатором; измеряет концентрации метана с лабораторной точностью на месте измерения. Часто используется как эталон для калибровки OGI и aerial measurements. LI-COR LI-7810 — конкурент Picarro.</a:t>
             </a:r>
             <a:br/>
             <a:br/>
             <a:r>
-              <a:t>Когда AI не нужен в Q2 — два критерия. Первый — OGMP 2.0 Level 5 verification. Level 5 требует прямого измерения всех источников эмиссии на operational asset. ML estimate не приемлем как primary methodology. Поэтому Level 5 operators обязаны иметь Picarro или LI-COR плюс OGI campaigns; AI здесь — дополнение для prioritization, не замена.</a:t>
+              <a:t>Когда AI не нужен в Q2 — два критерия. Первый — OGMP 2.0 Level 5 верификация. Level 5 требует прямого измерения всех источников эмиссии на operational asset. ML estimate не приемлем как primary methodology. Поэтому Level 5 operators обязаны иметь Picarro или LI-COR плюс OGI campaigns; AI здесь — дополнение для prioritization, не замена.</a:t>
             </a:r>
             <a:br/>
             <a:br/>
@@ -2179,7 +2179,7 @@
             <a:br/>
             <a:br/>
             <a:r>
-              <a:t>Структурный взгляд на LDAR programmes. EU LDAR требует операторов проводить survey четыре раза в год плюс ремонт утечек в течение пяти-пятнадцати рабочих дней. Расходы для крупного European operator — порядка пяти-пятнадцати миллионов долларов в год на один production cluster. AI MRV может снизить эти расходы на двадцать-сорок процентов через aerial campaigns раз в два месяца плюс targeted ground OGI на flagged sites. Это substantial value, который не эффектен в маркетинговой картине, но practical для compliance budgets.</a:t>
+              <a:t>Структурный взгляд на LDAR (выявление и устранение утечек) programmes. EU LDAR (выявление и устранение утечек) требует операторов проводить survey четыре раза в год плюс ремонт утечек в течение пяти-пятнадцати рабочих дней. Расходы для крупного European operator — порядка пяти-пятнадцати миллионов долларов в год на один production cluster. AI MRV может снизить эти расходы на двадцать-сорок процентов через aerial campaigns раз в два месяца плюс targeted ground OGI на flagged sites. Это substantial value, который не эффектен в маркетинговой картине, но practical для соответствие budgets.</a:t>
             </a:r>
           </a:p>
         </p:txBody>
@@ -2249,22 +2249,22 @@
           <a:lstStyle/>
           <a:p>
             <a:r>
-              <a:t>Northern Lights — joint venture между Equinor, Shell, TotalEnergies; commercial launch в 2024 году. CCS-инфраструктура для приёма CO₂ от европейских emitters — преимущественно cement plants, нефтехимия — и захоронения в северо-морских offshore-формациях около Эугарден в Норвегии. Capacity Phase 1 — полтора миллиона тонн CO₂ в год.</a:t>
+              <a:t>Northern Lights — совместное предприятие между Equinor, Shell, TotalEnergies; commercial launch в 2024 году. CCS-инфраструктура для приёма CO₂ от европейских emitters — преимущественно cement plants, нефтехимия — и захоронения в северо-морских offshore-формациях около Эугарден в Норвегии. кап.acity Phase 1 — полтора миллиона тонн CO₂ в год.</a:t>
             </a:r>
             <a:br/>
             <a:br/>
             <a:r>
-              <a:t>Применение AI. Site selection — где буровать injection wells, как оценить geological storage capacity. ML augments classical geomechanics; типичный claim — десять-пятнадцать процентов improved monitoring accuracy. Plume migration monitoring — 4D-сейсмика плюс ML для tracking облака CO₂ после injection. AI на этапе capture, апстрим от инжекции — оптимизация absorber-процесса; десять-двадцать процентов снижение затрат на проектах Mongstad в Норвегии и Boundary Dam в Канаде. Отраслевой исходный уровень затрат — восемьдесят-сто двадцать долларов за тонну captured CO₂; AI снижает до шестидесяти пяти — ста.</a:t>
+              <a:t>Применение AI. Site selection — где буровать закачка wells, как оценить geological storage кап.acity. ML augments классический геомеханика; типичный claim — десять-пятнадцать процентов improved мониторинг accuracy. Миграция шлейфа мониторинг — 4D-сейсмика плюс ML для tracking облака CO₂ после закачка. AI на этапе кап.ture, апстрим от инжекции — оптимизация absorber-процесса; десять-двадцать процентов снижение затрат на проектах Mongstad в Норвегии и Boundary Dam в Канаде. Отраслевой исходный уровень затрат — восемьдесят-сто двадцать долларов за тонну кап.tured CO₂; AI снижает до шестидесяти пяти — ста.</a:t>
             </a:r>
             <a:br/>
             <a:br/>
             <a:r>
-              <a:t>Базовая контекстуализация — 190× scale-up gap. IEA «World Energy Outlook» 2024 года: CCUS должна вырасти до семи и шести десятых гигатонн CO₂ в год к 2050 году для net-zero targets. Current global CCS capacity — около сорока миллионов тонн в год: Northern Lights полтора плюс примерно тридцать других проектов мира. Required scale-up — примерно сто девяносто икс. Northern Lights полтора Mt из IEA target семь и шесть десятых Gt равно ноль и две сотых процента needed scale.</a:t>
+              <a:t>Базовая контекстуализация — 190× scale-up gap. IEA «World Energy Outlook» 2024 года: CCUS должна вырасти до семи и шести десятых гигатонн CO₂ в год к 2050 году для net-zero targets. Current global CCS кап.acity — около сорока миллионов тонн в год: Northern Lights полтора плюс примерно тридцать других проектов мира. Required scale-up — примерно сто девяносто икс. Northern Lights полтора Mt из IEA target семь и шесть десятых Gt равно ноль и две сотых процента needed scale.</a:t>
             </a:r>
             <a:br/>
             <a:br/>
             <a:r>
-              <a:t>Что эта цифра означает. Northern Lights — flagship проект CCS в Европе. Если сто девяносто икс scale-up должен произойти к 2050 году — это строить около ста девяноста проектов того же класса в течение двадцати пяти лет. Физически и финансово возможно, но требует триллионов долларов капитальных инвестиций, государственной поддержки, регуляторного согласования. AI не решает ни одну из этих структурных задач. AI улучшает per-project cost effectiveness на десять-двадцать процентов, но не масштабирует индустрию. AI — catalyst, не silver bullet для climate transition.</a:t>
+              <a:t>Что эта цифра означает. Northern Lights — ключевой проект CCS в Европе. Если сто девяносто икс scale-up должен произойти к 2050 году — это строить около ста девяноста проектов того же класса в течение двадцати пяти лет. Физически и финансово возможно, но требует триллионов долларов капитальных инвестиций, государственной поддержки, регуляторного согласования. AI не решает ни одну из этих структурных задач. AI улучшает per-project cost effectiveness на десять-двадцать процентов, но не масштабирует индустрию. AI — catalyst, не silver bullet для climate transition.</a:t>
             </a:r>
           </a:p>
         </p:txBody>
@@ -2339,22 +2339,22 @@
             <a:br/>
             <a:br/>
             <a:r>
-              <a:t>Cape Station Utah project — двести шесть миллионов долларов финансирования в июне 2025 года, flagship EGS plant. Driver спроса — AI data centers тянут спрос на двадцать четыре на семь clean power. Renewable solar и wind — intermittent, нужны batteries для двадцать четыре на семь. Nuclear — slow build. Geothermal — единственный renewable baseload, доступный при сегодняшних технологиях.</a:t>
+              <a:t>кап.e Station Utah project — двести шесть миллионов долларов финансирования в июне 2025 года, ключевой EGS plant. Driver спроса — AI ЦОДы тянут спрос на двадцать четыре на семь clean power. Renewable solar и wind — intermittent, нужны batteries для двадцать четыре на семь. Nuclear — slow build. Geothermal — единственный возобновляемая базовая мощность, доступный при сегодняшних технологиях.</a:t>
             </a:r>
             <a:br/>
             <a:br/>
             <a:r>
-              <a:t>Fervo IPO двенадцатого мая 2026 года — цена размещения двадцать семь долларов за акцию, привлечено один и восемьдесят девять сотых миллиарда, оценка семь и семь десятых миллиарда при IPO. Стек финансирования. Fervo Series D в феврале 2024 закрыла двести сорок четыре миллиона. Series E в 2025 — четыреста шестьдесят два миллиона для ускорения разработки. Суммарно более семисот миллионов частного капитала перед IPO плюс один и восемьдесят девять сотых миллиарда при выходе на биржу. В первый день торгов акции открылись около тридцати пяти долларов — около тридцати процентов first-day pop. Это flagship moment для геотермальной индустрии.</a:t>
+              <a:t>Fervo IPO двенадцатого мая 2026 года — цена размещения двадцать семь долларов за акцию, привлечено один и восемьдесят девять сотых миллиарда, оценка семь и семь десятых миллиарда при IPO. Стек финансирования. Fervo Series D в феврале 2024 закрыла двести сорок четыре миллиона. Series E в 2025 — четыреста шестьдесят два миллиона для ускорения разработки. Суммарно более семисот миллионов частного капитала перед IPO плюс один и восемьдесят девять сотых миллиарда при выходе на биржу. В первый день торгов акции открылись около тридцати пяти долларов — около тридцати процентов first-day pop. Это ключевой moment для геотермальной индустрии.</a:t>
             </a:r>
             <a:br/>
             <a:br/>
             <a:r>
-              <a:t>Scale gap. Fervo в pipeline на 2026 имеет ~400 MWe. IEA 2050 geothermal target — двести с лишним GWe для achieve net-zero pathway. Это значит ноль и две десятых процента от needed scale — даже успешный IPO не закрывает structural gap.</a:t>
+              <a:t>масштаб gap. Fervo в pipeline на 2026 имеет ~400 MWe. IEA 2050 geothermal target — двести с лишним GWe для achieve net-zero pathway. Это значит ноль и две десятых процента от needed scale — даже успешный IPO не закрывает структурный разрыв.</a:t>
             </a:r>
             <a:br/>
             <a:br/>
             <a:r>
-              <a:t>Базовая контекстуализация — 40× growth ceiling. US EGS potential от DOE и MIT studies — сто пятьдесят GW. Current US geothermal installed — три и семь десятых GW. Growth ceiling — около сорока икс. Это engineering reality.</a:t>
+              <a:t>Базовая контекстуализация — 40× growth ceiling. потенциал EGS в США от DOE и MIT studies — сто пятьдесят GW. Current US geothermal installed — три и семь десятых GW. Growth ceiling — около сорока икс. Это инженерная реальность.</a:t>
             </a:r>
             <a:br/>
             <a:br/>
@@ -2429,27 +2429,27 @@
           <a:lstStyle/>
           <a:p>
             <a:r>
-              <a:t>Возвращаемся к центральному провалу Q4. Сто девяносто икс scale-up gap для CCS — engineering reality vs policy targets. Это structural gap, не «AI плохо работает».</a:t>
+              <a:t>Это центральный провал Q4. Разрыв масштабирования CCS в 190 раз — инженерная реальность против политических целей. Это структурный разрыв, не «AI плохо работает».</a:t>
             </a:r>
             <a:br/>
             <a:br/>
             <a:r>
-              <a:t>Что AI обещает. Improved monitoring accuracy десять-пятнадцать процентов. Capture cost reduction десять-двадцать процентов. Faster site selection. Что доставляет — да, эти цифры в пилотах реальные. Что не доставляет — scale. AI не масштабирует индустрию с сорока Mt в год к семи и шести десятым Gt в год; даже со ста процентами improvement per-unit cost эта цель остаётся в девяносто пять икс за пределами достижения.</a:t>
+              <a:t>Что AI обещает: улучшение точности мониторинга десять-пятнадцать процентов. снижение стоимости улавливания десять-двадцать процентов. быстрее выбор площадки. Что доставляет — да, эти цифры в пилотах реальные. Что не доставляет — масштаб. AI не масштабирует индустрию с сорока млн т в год к семи и шести десятым млрд т в год; даже со ста процентами улучшение удельной стоимости эта цель остаётся в девяносто пять икс за пределами достижения.</a:t>
             </a:r>
             <a:br/>
             <a:br/>
             <a:r>
-              <a:t>Долгосрочная hallucination AI для plume migration на сто лет. CCS injection хранит CO₂ под землёй на сотни и тысячи лет. Mandatory regulatory requirement — monitoring плюс verification на десятилетия. Critical question: где будет CO₂ облако через пятьдесят, сто, пятьсот лет?</a:t>
+              <a:t>Долгосрочная галлюцинация AI для миграция шлейфа на сто лет. закачка CCS хранит CO₂ под землёй на сотни и тысячи лет. Обязательно регуляторное требование — мониторинг плюс верификация на десятилетия. Главный вопрос: где будет облако CO₂ через пятьдесят, сто, пятьсот лет?</a:t>
             </a:r>
             <a:br/>
             <a:br/>
             <a:r>
-              <a:t>Classical physics-based modelling — Eclipse плюс geomechanics — имеет large uncertainty bands на сто-летнем горизонте. Geomechanics на длинных временных шкалах слабо валидирована.</a:t>
+              <a:t>Классический физически обоснованный modelling — Eclipse плюс геомеханика — имеет большие интервалы неопределённости на сто-летнем горизонте. Геомеханика на длинных временных шкалах слабо валидирована.</a:t>
             </a:r>
             <a:br/>
             <a:br/>
             <a:r>
-              <a:t>AI-based prediction миграции облака CO₂ — наложение на классическую физику. Может ускорить предварительный сценарный отбор. Но на out-of-distribution сценариях — например, землетрясение разрушает caprock в год сорок седьмой — галлюцинирует.</a:t>
+              <a:t>AI-прогноз миграции облака CO₂ — наложение на классическую физику. Может ускорить предварительный сценарный отбор. Но на вне распределения обучения сценариях — например, землетрясение разрушает кап.rock в год сорок седьмой — галлюцинирует.</a:t>
             </a:r>
             <a:br/>
             <a:br/>
@@ -2459,7 +2459,7 @@
             <a:br/>
             <a:br/>
             <a:r>
-              <a:t>Mitigation — три направления. Первое — hybrid AI плюс physics через PINN или physics-constrained ML — встраивает physical conservation laws в loss function. Снижает hallucination, но дороже compute. К 2026 году — research-grade. Второе — human-in-the-loop mandatory для long-horizon predictions. Senior reservoir engineer плюс geomechanics expert делает финальный judgment. Третье — multi-method triangulation. Никогда не полагаться на одну ML-модель; всегда verify через independent physics simulator плюс analog basin плюс multiple time-step monitoring data.</a:t>
+              <a:t>Mitigation — три направления. Первое — гибридный AI + физика через PINN (нейросеть с встроенной физикой) или ML с физическими ограничениями — встраивает физические законы сохранения в функция потерь. снижает галлюцинации, но дороже вычисления. К 2026 году — исследовательский уровень. Второе — человек в контуре обязательно для длинный горизонт прогнозы. Senior инженер по разработке плюс геомеханика expert делает финальный суждение. Третье — триангуляция несколькими методами. Никогда не полагаться на одну ML-модель; всегда verify через independent физический симулятор плюс аналоговый бассейн плюс данные мониторинга на нескольких временных шагах.</a:t>
             </a:r>
           </a:p>
         </p:txBody>
@@ -2529,27 +2529,27 @@
           <a:lstStyle/>
           <a:p>
             <a:r>
-              <a:t>Этот провал мы видели в седьмом-би слайде в Q1 frame — Aspen Mtell alert fatigue plus plant-wide stagnation. Здесь мы переформулируем его в Q4 frame, как multi-physics constraint, который AI не закрывает на длинных временных горизонтах.</a:t>
+              <a:t>Этот провал мы видели в седьмом-би слайде в Q1 frame — Aspen Mtell усталость от ложных тревог plus общезаводская стагнация. Здесь мы переформулируем его в Q4 frame, как многослойная физика constraint, который AI не закрывает на длинных временных горизонтах.</a:t>
             </a:r>
             <a:br/>
             <a:br/>
             <a:r>
-              <a:t>Что refinery process control share с Q4. Первое — multi-physics constraints: mass plus energy plus reaction kinetics plus corrosion. То же, что в CCS. Второе — long horizons: НПЗ работает сорок-пятьдесят лет; ML model decay один-два года. Тот же gap, что в CCS plume migration. Третье — edge cases: при изменении feedstock, equipment wear, regulatory changes — ML surrogates lose consistency.</a:t>
+              <a:t>Что refinery process control share с Q4. Первое — многослойная физика constraints: mass plus energy plus reaction kinetics plus corrosion. То же, что в CCS. Второе — длинные горизонты: НПЗ работает сорок-пятьдесят лет; ML model decay один-два года. Тот же gap, что в CCS миграция шлейфа. Третье — нестандартные режимы: при изменении feedstock, equipment wear, regulatory changes — ML surrogates lose consistency.</a:t>
             </a:r>
             <a:br/>
             <a:br/>
             <a:r>
-              <a:t>Cross-link к Yokogawa Idemitsu. Yokogawa в 2018 году объявила пилот plant-wide AI process control на одном из НПЗ Idemitsu в Японии. Пилот plant-wide тихо закрыт после 2018 года; в публичных материалах остались только single-column success stories. Это типичный паттерн: AI хорошо берёт локальную оптимизацию — один column, один heater. Плохо берёт многоюнитную координацию, где multi-physics constraints ломают ML-суррогаты на edge cases.</a:t>
+              <a:t>Cross-link к Yokogawa Idemitsu. Yokogawa в 2018 году объявила пилот общезаводской AI process control на одном из НПЗ Idemitsu в Японии. Пилот общезаводской тихо закрыт после 2018 года; в публичных материалах остались только single-column success stories. Это типичный паттерн: AI хорошо берёт локальную оптимизацию — один column, один heater. Плохо берёт многоюнитную координацию, где многослойная физика constraints ломают ML-суррогаты на нестандартные режимы.</a:t>
             </a:r>
             <a:br/>
             <a:br/>
             <a:r>
-              <a:t>Применимость к Q4. CCS injection plant — это многоюнитная инсталляция: capture unit плюс transport pipeline плюс injection wells плюс monitoring wells. Координация этих компонентов на тридцать-пятидесятилетнем горизонте требует multi-physics coupling. AI может делать узкую оптимизацию — один injection well rate, один capture absorber. AI не может делать координированное plant-wide управление с multi-decade outlook. То же касается Fervo EGS.</a:t>
+              <a:t>Применимость к Q4. закачка CCS plant — это многоюнитная инсталляция: кап.ture unit плюс transport pipeline плюс закачка wells плюс мониторинг wells. Координация этих компонентов на тридцать-пятидесятилетнем горизонте требует многослойное сопряжение физики. AI может делать узкую оптимизацию — один закачка well rate, один кап.ture absorber. AI не может делать координированное общезаводской управление с multi-decade outlook. То же касается Fervo EGS.</a:t>
             </a:r>
             <a:br/>
             <a:br/>
             <a:r>
-              <a:t>Фундаментальный урок для LO2. Когда задача требует multi-physics coupling плюс long horizons плюс краевых случаев — развёртывание AI затрудняется фундаментально, не из-за нехватки обучающих данных. Это не «больше данных решит проблему»; это ограничение самой ML-методологии. Обобщение нейронных сетей хорошо работает в режиме интерполяции, плохо — в режиме экстраполяции, очень плохо — в режиме multi-physics экстраполяции.</a:t>
+              <a:t>Фундаментальный урок. Когда задача требует многослойное сопряжение физики плюс длинные горизонты плюс краевых случаев — развёртывание AI затрудняется фундаментально, не из-за нехватки обучающих данных. Это не «больше данных решит проблему»; это ограничение самой ML-методологии. Обобщение нейронных сетей хорошо работает в режиме интерполяции, плохо — в режиме экстраполяции, очень плохо — в режиме многослойная физика экстраполяции.</a:t>
             </a:r>
           </a:p>
         </p:txBody>
@@ -2619,12 +2619,12 @@
           <a:lstStyle/>
           <a:p>
             <a:r>
-              <a:t>Сегодня вы узнаете четыре структурных места AI в нефтегазовой отрасли — мы их называем квадрантами матрицы. Дальше мы пройдём по десяти documented failures отрасли с уроками для каждого; это половина лекции. Потом — шесть структурных критериев, когда AI просто не нужен, и шесть alternative инструментов.</a:t>
+              <a:t>Сегодня вы узнаете четыре структурных места AI в нефтегазовой отрасли — мы их называем квадрантами матрицы. Дальше мы пройдём по десяти разобранный провалs отрасли с уроками для каждого; это половина лекции. Потом — шесть структурных критериев, когда AI просто не нужен, и шесть alternative инструментов.</a:t>
             </a:r>
             <a:br/>
             <a:br/>
             <a:r>
-              <a:t>Формат — стандартная семидесятипятиминутная лекция. Q&amp;A в конце с exit ticket. Курс не предполагает, что вы — отраслевой специалист по нефтегазу. Все домен-термины я буду объяснять inline, при первом появлении.</a:t>
+              <a:t>Формат — стандартная семидесятипятиминутная лекция. Q&amp;A в конце с выходной билет. Курс не предполагает, что вы — отраслевой специалист по нефтегазу. Все домен-термины я буду объяснять inline, при первом появлении.</a:t>
             </a:r>
             <a:br/>
             <a:br/>
@@ -2704,17 +2704,17 @@
           <a:lstStyle/>
           <a:p>
             <a:r>
-              <a:t>Это критический раздел для LO3 в Q4. Альтернатива AI в long-horizon CCS, refinery, EGS — это classical physics-based engineering плюс deterministic safety systems.</a:t>
+              <a:t>Это критический раздел в Q4. Альтернатива AI в длинный горизонт CCS, refinery, EGS — это классический физически обоснованный engineering плюс deterministic safety systems.</a:t>
             </a:r>
             <a:br/>
             <a:br/>
             <a:r>
-              <a:t>Physics-based simulators для CCS. Eclipse и INTERSECT с CCS modules — reservoir-scale CO₂ migration. OpenFOAM — CFD around injection wells, multi-phase flow. Geomechanics packages — Visage от SLB, Abaqus от Dassault, Plaxis — для stress analysis в caprock. CMG GEM — compositional simulator для CO₂-impurities scenarios. Эти tools используются для regulatory submissions под EU CCS Directive 2009/31/EC. Регулятор требует physics-traceable modeling; AI surrogate не accept.</a:t>
+              <a:t>Physics-based simulators для CCS. Eclipse и INTERSECT с CCS modules — коллектор-scale CO₂ migration. OpenFOAM — CFD around закачка wells, многофазный поток. Геомеханика packages — Visage от SLB, Abaqus от Dassault, Plaxis — для stress analysis в кап.rock. CMG GEM — compositional simulator для CO₂-impurities scenarios. Эти tools используются для регуляторные отчёты под EU CCS Directive 2009/31/EC. Регулятор требует физически прослеживаемый modeling; AI surrogate не accept.</a:t>
             </a:r>
             <a:br/>
             <a:br/>
             <a:r>
-              <a:t>Classical APC для refinery. Honeywell Profit Controller — modelling APC standard для US refineries. AspenTech aspenONE — APC integrated в process simulation. Emerson DeltaV PredictPro — embedded APC в DCS. APC — это model-based predictive control, детерминированное и certifiable. ML controller для plant-wide refinery operation requires safety case, что ML не приведёт к exceedance процессных пределов. Safety case для ML структурно сложнее, чем для APC.</a:t>
+              <a:t>Классический APC (передовое управление процессом) для refinery. Honeywell Profit Controller — modelling APC (передовое управление процессом) standard для US refineries. AspenTech aspenONE — APC (передовое управление процессом) integrated в process simulation. Emerson DeltaV PredictPro — embedded APC (передовое управление процессом) в DCS. APC (передовое управление процессом) — это model-based predictive control, детерминированное и certifiable. ML controller для общезаводская переработка operation requires safety case, что ML не приведёт к exceedance процессных пределов. Safety case для ML структурно сложнее, чем для APC (передовое управление процессом).</a:t>
             </a:r>
             <a:br/>
             <a:br/>
@@ -2724,12 +2724,12 @@
             <a:br/>
             <a:br/>
             <a:r>
-              <a:t>ML не сертифицируется под IEC 61511. Probability of failure on demand для ML не доказывается аналитически так же, как для дискретной логики; в дискретной логике мы перечисляем все возможные states; для ML это невозможно — state space слишком большой. Альтернатива — physics-based redundancy плюс 3oo2 voting — три датчика, действие при согласии двух — плюс периодические proof tests, плюс fail-safe design.</a:t>
+              <a:t>ML не сертифицируется под IEC 61511. Probability of failure on demand для ML не доказывается аналитически так же, как для дискретной логики; в дискретной логике мы перечисляем все возможные states; для ML это невозможно — state space слишком большой. Альтернатива — физически обоснованный redundancy плюс 3oo2 voting — три датчика, действие при согласии двух — плюс периодические proof tests, плюс fail-safe design.</a:t>
             </a:r>
             <a:br/>
             <a:br/>
             <a:r>
-              <a:t>Три критерия «AI не нужен» в Q4. Safety-critical SIS. Long-horizon prediction beyond десяти-двадцати лет. Plant-wide multi-physics coupling.</a:t>
+              <a:t>Три критерия «AI не нужен» в Q4. Safety-главный SIS. Long-horizon prediction beyond десяти-двадцати лет. Plant-wide многослойное сопряжение физики.</a:t>
             </a:r>
             <a:br/>
             <a:br/>
@@ -2804,7 +2804,7 @@
           <a:lstStyle/>
           <a:p>
             <a:r>
-              <a:t>В предыдущих разделах мы видели Россию фрагментарно. В этом разделе собираем картину целиком — через четырёх-квадрантную матрицу keystone-оси.</a:t>
+              <a:t>В предыдущих разделах мы видели Россию фрагментарно. В этом разделе собираем картину целиком — через четырёх-квадрантную матрицу несущая ось-оси.</a:t>
             </a:r>
             <a:br/>
             <a:br/>
@@ -2814,17 +2814,17 @@
             <a:br/>
             <a:br/>
             <a:r>
-              <a:t>Ответ — частично разработан внутри, частично заимствован из других несанкционированных юрисдикций — партнёрство с AIQ, joint venture ADNOC и G42 в ОАЭ — частично остаётся в pilot stage.</a:t>
+              <a:t>Ответ — частично разработан внутри, частично заимствован из других несанкционированных юрисдикций — партнёрство с AIQ, совместное предприятие ADNOC и G42 в ОАЭ — частично остаётся в pilot stage.</a:t>
             </a:r>
             <a:br/>
             <a:br/>
             <a:r>
-              <a:t>Mini-matrix recap. В квадранте один — Роснефть Digital Field и Газпром Cognitive system Ямал. Aspen, Honeywell, ABB ушли — insourcing. Промышленно развёрнут. В квадранте три — Газпром Cognitive Geo, начатый с IBM Research Brazil в 2019-2022 году, продолжен внутри после ухода IBM. Нет SLB Lumi, нет ExxonMobil Discovery 6 — собственный HPC. Развёрнут на Ямале в 2024 году. В квадранте два — не приоритет, EU 2024/1787 не применяется к российскому экспорту в нерегулируемые рынки. В квадранте четыре — очень ограниченная public info, pilots, требует уточнения.</a:t>
+              <a:t>Mini-matrix reкап.. В квадранте один — Роснефть Digital Field и Газпром Cognitive system Ямал. Aspen, Honeywell, ABB ушли — insourcing. Промышленно развёрнут. В квадранте три — Газпром Cognitive Geo, начатый с IBM Research Brazil в 2019-2022 году, продолжен внутри после ухода IBM. Нет SLB Lumi, нет ExxonMobil Discovery 6 — собственный HPC (высокопроизводительные вычисления). Развёрнут на Ямале в 2024 году. В квадранте два — не приоритет, EU 2024/1787 не применяется к российскому экспорту в нерегулируемые рынки. В квадранте четыре — очень ограниченная public info, pilots, требует уточнения.</a:t>
             </a:r>
             <a:br/>
             <a:br/>
             <a:r>
-              <a:t>Структурный паттерн — Россия ближе к китайскому модели вертикальной интеграции, не американскому vendor-based.</a:t>
+              <a:t>Структурный паттерн — Россия ближе к китайскому модели вертикальной интеграции, не американскому поставщик-based.</a:t>
             </a:r>
           </a:p>
         </p:txBody>
@@ -2894,7 +2894,7 @@
           <a:lstStyle/>
           <a:p>
             <a:r>
-              <a:t>Газпром нефть Cognitive Geologist — flagship российский Q3 AI-проект. Создан в партнёрстве с IBM Research Brazil в Сан-Паулу; соглашение о сотрудничестве подписано в апреле 2019 года, активная разработка 2019-2022; после ухода IBM из России в 2022 году перешёл в режим internal development.</a:t>
+              <a:t>Газпром нефть Cognitive Geologist — ключевой российский Q3 AI-проект. Создан в партнёрстве с IBM Research Brazil в Сан-Паулу; соглашение о сотрудничестве подписано в апреле 2019 года, активная разработка 2019-2022; после ухода IBM из России в 2022 году перешёл в режим внутренняя разработка.</a:t>
             </a:r>
             <a:br/>
             <a:br/>
@@ -2904,22 +2904,22 @@
             <a:br/>
             <a:br/>
             <a:r>
-              <a:t>Cognitive system for oil prospecting, развёрнутая на Ямале в 2024 году — система помогла идентифицировать новое нефтяное поле, first oil из которого получена в 2024 году. Корпоративные цели: cut twofold время до first oil на новых проектах. Плюс сорок процентов projects acceleration к 2030 году.</a:t>
+              <a:t>Cognitive system for oil prospecting, развёрнутая на Ямале в 2024 году — система помогла идентифицировать новое нефтяное поле, первая нефть из которого получена в 2024 году. Корпоративные цели: cut twofold время до первая нефть на новых проектах. Плюс сорок процентов projects acceleration к 2030 году.</a:t>
             </a:r>
             <a:br/>
             <a:br/>
             <a:r>
-              <a:t>Параллель с BP плюс Beyond Limits и IBM плюс Repsol. Cognitive Geo с IBM начался в 2019 году; BP плюс Beyond Limits — в 2018 году; IBM плюс Repsol — в 2014 году. Все три проекта запущены в эпоху «cognitive AI для exploration». Но Cognitive Geo выжил и развился, в то время как два западных партнёрства провалились. Почему?</a:t>
+              <a:t>Параллель с BP плюс Beyond Limits и IBM плюс Repsol. Cognitive Geo с IBM начался в 2019 году; BP плюс Beyond Limits — в 2018 году; IBM плюс Repsol — в 2014 году. Все три проекта запущены в эпоху «когнитивный AI для exploration». Но Cognitive Geo выжил и развился, в то время как два западных партнёрства провалились. Почему?</a:t>
             </a:r>
             <a:br/>
             <a:br/>
             <a:r>
-              <a:t>Первое — internal continuation после vendor exit. Когда IBM ушёл в 2022 году, Газпром нефть продолжила разработку внутри. У BP при vendor pivot Beyond Limits не было такой опции. Второе — якорная прикладная фокусировка: Cognitive Geo с самого начала сосредоточился на конкретных задачах разведки — корреляция, предварительное отсеивание — а не на «заменить геолога». Augmentation, не замена. Третье — vertical integration внутри NOC. Нет mismatch incentives.</a:t>
+              <a:t>Первое — internal continuation после поставщик exit. Когда IBM ушёл в 2022 году, Газпром нефть продолжила разработку внутри. У BP при разворот поставщика Beyond Limits не было такой опции. Второе — якорная прикладная фокусировка: Cognitive Geo с самого начала сосредоточился на конкретных задачах разведки — корреляция, предварительное отсеивание — а не на «заменить геолога». Augmentation, не замена. Третье — вертикальная интеграция внутри нацкомпания. Нет mismatch incentives.</a:t>
             </a:r>
             <a:br/>
             <a:br/>
             <a:r>
-              <a:t>Контекст AIQ partnership. AIQ — это ADNOC плюс G42 joint venture в ОАЭ, валюация один и четыре десятых миллиарда плюс после приобретения 51% Presight в мае 2024 года. Газпром нефть партнёрствует с AIQ для коммерциализации на нерегулируемых рынках. Middle East становится третьим AI compute hub.</a:t>
+              <a:t>Контекст AIQ partnership. AIQ — это ADNOC плюс G42 совместное предприятие в ОАЭ, валюация один и четыре десятых миллиарда плюс после приобретения 51% Presight в мае 2024 года. Газпром нефть партнёрствует с AIQ для коммерциализации на нерегулируемых рынках. Middle East становится третьим AI вычисления hub.</a:t>
             </a:r>
           </a:p>
         </p:txBody>
@@ -2989,12 +2989,12 @@
           <a:lstStyle/>
           <a:p>
             <a:r>
-              <a:t>Роснефть Digital Field мы уже разобрали в десятом слайде. Quick recap. Плюс один миллион тонн нефти в год дополнительная добыча — это плюс пять и девять десятых процентов от исходного уровня Башнефть семнадцать миллионов тонн в год. Около одного миллиарда рублей в год экономический эффект. Двадцать три программных продукта, десять коммерциализованных. Плюс шестьдесят процентов удалённо управляемых объектов.</a:t>
+              <a:t>Роснефть Digital Field мы уже разобрали в десятом слайде. Quick reкап.. Плюс один миллион тонн нефти в год дополнительная добыча — это плюс пять и девять десятых процентов от исходного уровня Башнефть семнадцать миллионов тонн в год. Около одного миллиарда рублей в год экономический эффект. Двадцать три программных продукта, десять коммерциализованных. Плюс шестьдесят процентов удалённо управляемых объектов.</a:t>
             </a:r>
             <a:br/>
             <a:br/>
             <a:r>
-              <a:t>Татнефть, ЛУКОЙЛ, Сургутнефтегаз — детали public info ограничены. Эти три NOC формируют средний эшелон российской нефтегазовой отрасли — после двух flagship Роснефть и Газпром нефть — и реализуют AI-программы, но публичная отчётность по конкретным KPI существенно скуднее.</a:t>
+              <a:t>Татнефть, ЛУКОЙЛ, Сургутнефтегаз — детали public info ограничены. Эти три нацкомпания формируют средний эшелон российской нефтегазовой отрасли — после двух ключевой Роснефть и Газпром нефть — и реализуют AI-программы, но публичная отчётность по конкретным KPI существенно скуднее.</a:t>
             </a:r>
             <a:br/>
             <a:br/>
@@ -3014,12 +3014,12 @@
             <a:br/>
             <a:br/>
             <a:r>
-              <a:t>Этот дефицит публичной информации сам по себе информативен: показывает, что российский corporate disclosure для AI deployments существенно менее прозрачен, чем у западных публичных компаний. Это структурное ограничение для студента-аналитика: основной массив independent fact — у двух flagship; остальные NOC остаются чёрным ящиком.</a:t>
+              <a:t>Этот дефицит публичной информации сам по себе информативен: показывает, что российский corporate disclosure для AI deployments существенно менее прозрачен, чем у западных публичных компаний. Это структурное ограничение для студента-аналитика: основной массив independent fact — у двух ключевой; остальные нацкомпания остаются чёрным ящиком.</a:t>
             </a:r>
             <a:br/>
             <a:br/>
             <a:r>
-              <a:t>Cognitive Pilot — Sberbank плюс Cognitive Technologies joint venture, primarily agricultural combine automation. Семьсот плюс installations в 2021 → тысяча семьсот плюс в 2024. Transferability к O&amp;G — partial: heavy mobile equipment и remote sensing — yes; ATEX-rated и SIL compliance — non-trivial.</a:t>
+              <a:t>Cognitive Pilot — Sberbank плюс Cognitive Technologies совместное предприятие, primarily agricultural combine automation. Семьсот плюс installations в 2021 → тысяча семьсот плюс в 2024. Transferability к O&amp;G — partial: heavy mobile equipment и remote sensing — yes; ATEX-rated и SIL соответствие — non-trivial.</a:t>
             </a:r>
           </a:p>
         </p:txBody>
@@ -3089,32 +3089,32 @@
           <a:lstStyle/>
           <a:p>
             <a:r>
-              <a:t>Кибербезопасность — counter-trend AI-расширения нефтегазовой автоматизации. По данным Zscaler, ransomware-атаки на нефтегаз выросли на девятьсот тридцать пять процентов между апрелем 2024 и апрелем 2025 года. База — Zscaler ThreatLabz фиксирует относительный рост числа известных ransomware-инцидентов в секторе year-over-year; абсолютные числа Zscaler не раскрывает в open report. Для контекстуализации масштаба — paradigmatic high-impact case остаётся Colonial Pipeline 2021.</a:t>
+              <a:t>Кибербезопасность — встречный тренд AI-расширения нефтегазовой автоматизации. По данным Zscaler, шифровальщик-атаки на нефтегаз выросли на девятьсот тридцать пять процентов между апрелем 2024 и апрелем 2025 года. База — Zscaler ThreatLabz фиксирует относительный рост числа известных шифровальщик-инцидентов в секторе year-over-year; абсолютные числа Zscaler не раскрывает в open report. Для контекстуализации масштаба — paradigmatic high-impact case остаётся Colonial Pipeline 2021.</a:t>
             </a:r>
             <a:br/>
             <a:br/>
             <a:r>
-              <a:t>Colonial Pipeline 2021. Атакующий получил доступ через VPN без MFA — многофакторной аутентификации. Pipeline shutdown около шести дней; четыре и четыре десятых миллиона долларов ransom paid — семьдесят пять биткоинов; примерно два и три десятых миллиона recovered Министерством юстиции в июне 2021 года. Операционные потери — десятки миллионов. Recovery cost оценочно двести миллионов плюс. Lesson: flat OT/IT network плюс no MFA на VPN равно unacceptable risk для critical infrastructure.</a:t>
+              <a:t>Colonial Pipeline 2021. Атакующий получил доступ через VPN без MFA (многофакторная аутентификация) — многофакторной аутентификации. Pipeline shutdown около шести дней; четыре и четыре десятых миллиона долларов выкупа уплачено — семьдесят пять биткоинов; примерно два и три десятых миллиона возвращена Министерством юстиции в июне 2021 года. Операционные потери — десятки миллионов. Recovery cost оценочно двести миллионов плюс. Lesson: flat OT/IT network плюс no MFA (многофакторная аутентификация) на VPN равно unacceptable risk для главный infrastructure.</a:t>
             </a:r>
             <a:br/>
             <a:br/>
             <a:r>
-              <a:t>Shell MOVEit 2022 плюс 2024 vendor compromise. Shell был impacted Clop ransomware через MOVEit file transfer vendor — third-party software, used by multiple companies. Customer data leaked.</a:t>
+              <a:t>Shell MOVEit 2022 плюс 2024 поставщик compromise. Shell был impacted Clop шифровальщик через MOVEit file transfer поставщик — third-party software, used by multiple companies. Customer data leaked.</a:t>
             </a:r>
             <a:br/>
             <a:br/>
             <a:r>
-              <a:t>Этот рост — не «random fluctuation»; это структурный эффект. OT/IT convergence увеличивает attack surface. Развёртывание AI и цифровых сервисов добавляет новые ML-сервисы, новые конвейеры данных, новые API-эндпоинты — каждый из них потенциальная точка входа. Threat actor capability растёт через offensive AI.</a:t>
+              <a:t>Этот рост — не «random fluctuation»; это структурный эффект. слияние операционных (OT) и IT сетей увеличивает поверхность атаки. Развёртывание AI и цифровых сервисов добавляет новые ML-сервисы, новые конвейеры данных, новые API-эндпоинты — каждый из них потенциальная точка входа. Threat actor кап.ability растёт через offensive AI.</a:t>
             </a:r>
             <a:br/>
             <a:br/>
             <a:r>
-              <a:t>Defensive vs offensive AI — структурный gap. Defensive AI — anomaly detection в OT-сетях, ML-based intrusion detection — Dragos, Claroty, Nozomi Networks. Растёт post-Colonial. Offensive AI — атакующие используют LLM-агенты для automated phishing, social engineering, automated reconnaissance. Растёт быстрее, чем defensive AI.</a:t>
+              <a:t>Defensive vs offensive AI — структурный gap. защитный AI — выявление аномалий в OT-сетях, ML-based intrusion detection — Dragos, Claroty, Nozomi Networks. Растёт post-Colonial. Offensive AI — атакующие используют LLM-агенты для automated phishing, social engineering, automated reconnaissance. Растёт быстрее, чем защитный AI.</a:t>
             </a:r>
             <a:br/>
             <a:br/>
             <a:r>
-              <a:t>Три фундаментальных урока для LO7. Первое — AI добавляет сложность, поверхность атаки растёт. Второе — безопасность это phase 1, не phase 4. Embed cybersecurity в design phase. Третье — AI security не равно traditional IT security. Adversarial ML, model poisoning, prompt injection — новые классы атак.</a:t>
+              <a:t>Три фундаментальных урока. Первое — AI добавляет сложность, поверхность атаки растёт. Второе — безопасность это фаза 1, не фаза 4. Embed cybersecurity в фаза проектирования. Третье — безопасность AI не равно традиционная IT-безопасность. состязательный ML, отравление модели, инъекция в промпт — новые классы атак.</a:t>
             </a:r>
           </a:p>
         </p:txBody>
@@ -3184,22 +3184,22 @@
           <a:lstStyle/>
           <a:p>
             <a:r>
-              <a:t>Два cross-cutting якоря раздела шесть. Первый — 2020 oil crash. Второй — Deepwater Horizon 2010.</a:t>
+              <a:t>Два сквозной якоря раздела шесть. Первый — 2020 oil crash. Второй — Deepwater Horizon 2010.</a:t>
             </a:r>
             <a:br/>
             <a:br/>
             <a:r>
-              <a:t>2020 oil crash. В марте-октябре 2020 года, после пандемийного collapse нефтяного спроса — нефтяные фьючерсы West Texas Intermediate уходили в отрицательную зону двадцатого апреля 2020 года впервые в истории — нефтегазовая индустрия пережила структурную shake-out. Сто семь тысяч рабочих мест потеряно в US O&amp;G и нефтехимии — fastest layoffs in industry history. Знаменатель — из total US O&amp;G workforce около одного и одной десятой миллиона — это девять и семь десятых процента индустрии за шесть месяцев. Для контекста: financial crisis 2008-2009 oil&amp;gas потерял семь процентов за двенадцать месяцев; 2020 crash — почти десять процентов за половину времени. BP — десять тысяч уволенных, пятнадцать процентов workforce. Shell — девять тысяч.</a:t>
+              <a:t>2020 oil crash. В марте-октябре 2020 года, после пандемийного collapse нефтяного спроса — нефтяные фьючерсы West Texas Intermediate уходили в отрицательную зону двадцатого апреля 2020 года впервые в истории — нефтегазовая индустрия пережила структурную shake-out. Сто семь тысяч рабочих мест потеряно в US O&amp;G и нефтехимии — fastest layoffs in отрасль history. Знаменатель — из total US O&amp;G workforce около одного и одной десятой миллиона — это девять и семь десятых процента индустрии за шесть месяцев. Для контекста: financial crisis 2008-2009 oil&amp;gas потерял семь процентов за двенадцать месяцев; 2020 crash — почти десять процентов за половину времени. BP — десять тысяч уволенных, пятнадцать процентов workforce. Shell — девять тысяч.</a:t>
             </a:r>
             <a:br/>
             <a:br/>
             <a:r>
-              <a:t>Что это означает для AI roadmap. Industry cyclicality больше, чем AI hype cycle. Когда нефть ниже тридцати долларов за баррель — digital teams cuts first как non-essential. AI projects заморожены восемнадцать-двадцать четыре месяца. AI ROI horizon пять-семь лет; commodity cycle каждые семь-десять лет. Эти горизонты несовместимы.</a:t>
+              <a:t>Что это означает для дорожная карта AI. Industry цикличность больше, чем цикл AI-хайпа. Когда нефть ниже тридцати долларов за баррель — digital teams cuts first как non-необходим. AI projects заморожены восемнадцать-двадцать четыре месяца. окупаемость AI horizon пять-семь лет; commodity цикл каждые семь-десять лет. Эти горизонты несовместимы.</a:t>
             </a:r>
             <a:br/>
             <a:br/>
             <a:r>
-              <a:t>Deepwater Horizon двадцатого апреля 2010 года — исторический якорь. Не AI failure напрямую, но automation плюс human factors lessons релевантные для AI today. Macondo well, BP-operated, Transocean rig в Gulf of Mexico. Negative pressure test misinterpreted под влиянием cognitive bias к minimization. Gas kick — blowout — explosion. Одиннадцать смертей. Четыре и девять десятых миллиона баррелей spilled за восемьдесят семь дней. Шестьдесят с лишним миллиардов долларов total cost для BP — это двадцать процентов годового revenue 2010 года.</a:t>
+              <a:t>Deepwater Horizon двадцатого апреля 2010 года — исторический якорь. Не AI failure напрямую, но automation плюс human factors lessons релевантные для AI today. Macondo well, BP-operated, Transocean rig в Мексиканский залив. Negative pressure test misinterpreted под влиянием cognitive bias к minimization. Gas kick — blowout — explosion. Одиннадцать смертей. Четыре и девять десятых миллиона баррелей spilled за восемьдесят семь дней. Шестьдесят с лишним миллиардов долларов total cost для BP — это двадцать процентов годового revenue 2010 года.</a:t>
             </a:r>
             <a:br/>
             <a:br/>
@@ -3274,37 +3274,37 @@
           <a:lstStyle/>
           <a:p>
             <a:r>
-              <a:t>Возврат к keystone-матрице. Через все шесть разделов мы видели: AI в нефтегазе — не одна история, а четыре разных истории.</a:t>
+              <a:t>Возврат к несущая ось-матрице. Через все шесть разделов мы видели: AI в нефтегазе — не одна история, а четыре разных истории.</a:t>
             </a:r>
             <a:br/>
             <a:br/>
             <a:r>
-              <a:t>Квадрант один. Mature production. AI как мультипликатор. Working cases: Ambyint InfinityRL плюс пятнадцать процентов на двухстах скважинах, Honeywell UOP Connect триста десять плюс юнитов, Роснефть Digital Field плюс один миллион тонн в год. Failures: восемьдесят шесть процентов pilot stuck по McKinsey; Aspen Mtell alert fatigue плюс refinery plant-wide stagnation; Cognite IPO postpone; C3.ai O&amp;G declining.</a:t>
+              <a:t>Квадрант один. Mature production. AI как мультипликатор. Working cases: Ambyint InfinityRL плюс пятнадцать процентов на двухстах скважинах, Honeywell UOP Connect триста десять плюс юнитов, Роснефть Digital Field плюс один миллион тонн в год. Failures: восемьдесят шесть процентов застревание пилота по McKinsey; Aspen Mtell усталость от ложных тревог плюс refinery общезаводская стагнация; Cognite IPO postpone; C3.ai O&amp;G declining.</a:t>
             </a:r>
             <a:br/>
             <a:br/>
             <a:r>
-              <a:t>Квадрант три. Frontier exploration. AI как augmentation поверх physics simulators. Working cases: Eni HPC6 шестьсот шесть PFLOPS Top500 пятое место, Aramco METABRAIN двести пятьдесят миллиардов параметров и один и восемь десятых миллиарда realized 2024, SLB Lumi сентябрь 2024, ExxonMobil Discovery 6 — 4D-сейсмика месяцы в недели, Stabroek Guyana. Failures: BP плюс Beyond Limits — двадцать миллионов vendor pivot 2023; IBM Watson плюс Repsol Kalimba — 2014-2022 wind-down.</a:t>
+              <a:t>Квадрант три. Frontier exploration. AI как дополнение поверх физический симуляторs. Working cases: Eni HPC6 шестьсот шесть PFLOPS Top500 пятое место, Aramco METABRAIN двести пятьдесят миллиардов параметров и один и восемь десятых миллиарда realized 2024, SLB Lumi сентябрь 2024, ExxonMobil Discovery 6 — 4D-сейсмика месяцы в недели, Stabroek Guyana. Failures: BP плюс Beyond Limits — двадцать миллионов разворот поставщика 2023; IBM Watson плюс Repsol Kalimba — 2014-2022 wind-down.</a:t>
             </a:r>
             <a:br/>
             <a:br/>
             <a:r>
-              <a:t>Квадрант два. Methane MRV. AI как essential для cross-modality fusion. Working cases: Carbon Mapper Tanager-1 август 2024, GHGSat тринадцать-satellite constellation середина 2025, Bridger Photonics aerial LiDAR. Failures: MethaneSAT loss июнь 2025 — пятнадцать с половиной месяцев из пяти плюс лет; четыре икс discrepancy MethaneSAT vs EPA — пятнадцать Mt vs четыре Mt.</a:t>
+              <a:t>Квадрант два. Methane MRV. AI как необходим для cross-modality fusion. Working cases: Carbon Mapper Tanager-1 август 2024, GHGSat тринадцать-satellite группировка середина 2025, Bridger Photonics aerial LiDAR. Failures: MethaneSAT loss июнь 2025 — пятнадцать с половиной месяцев из пяти плюс лет; четыре икс discrepancy MethaneSAT vs EPA — пятнадцать Mt vs четыре Mt.</a:t>
             </a:r>
             <a:br/>
             <a:br/>
             <a:r>
-              <a:t>Квадрант четыре. Energy transition. AI и физика struggle вместе. Working pilots: Northern Lights CCS полтора Mt в год Норвегия; Fervo Energy EGS IPO май 2026 — один и восемьдесят девять сотых миллиарда привлечено. Failures: сто девяносто икс scale-up gap CCS — Northern Lights ноль и две сотых процента от needed scale; refinery plant-wide stagnation в multi-physics frame.</a:t>
+              <a:t>Квадрант четыре. Energy transition. AI и физика struggle вместе. Working pilots: Northern Lights CCS полтора Mt в год Норвегия; Fervo Energy EGS IPO май 2026 — один и восемьдесят девять сотых миллиарда привлечено. Failures: сто девяносто икс scale-up gap CCS — Northern Lights ноль и две сотых процента от needed scale; refinery общезаводская стагнация в многослойная физика frame.</a:t>
             </a:r>
             <a:br/>
             <a:br/>
             <a:r>
-              <a:t>Раздел Россия — все четыре квадранта в санкционном режиме. Раздел шесть cross-cutting: cyber +935 процентов, 2020 crash 107 000 jobs, Deepwater Horizon 2010 alarm bypass.</a:t>
+              <a:t>Раздел Россия — все четыре квадранта в санкционном режиме. Раздел шесть сквозной: cyber +935 процентов, 2020 crash 107 000 jobs, Deepwater Horizon 2010 alarm bypass.</a:t>
             </a:r>
             <a:br/>
             <a:br/>
             <a:r>
-              <a:t>Когда AI работает. Q1 multiplier плюс Q2 essential с triangulation. Когда осторожно. Q3 augmentation only — не пытаться replace senior geologist. Когда опасно. Q4 long-horizon plus safety-critical SIS.</a:t>
+              <a:t>Когда AI работает. Q1 мультипликатор плюс Q2 необходим с triangulation. Когда осторожно. Q3 дополнение only — не пытаться replace senior geologist. Когда опасно. Q4 длинный горизонт plus safety-главный SIS.</a:t>
             </a:r>
           </a:p>
         </p:txBody>
@@ -3379,22 +3379,22 @@
             <a:br/>
             <a:br/>
             <a:r>
-              <a:t>Три cornerstone концепта, которые читатель должен унести — каждый портативен на любую следующую отрасль.</a:t>
+              <a:t>Три опорный концепт концепта, которые читатель должен унести — каждый портативен на любую следующую отрасль.</a:t>
             </a:r>
             <a:br/>
             <a:br/>
             <a:r>
-              <a:t>Первый. AI judgment как структурная задача — где применим, где нет. Главный инференциальный навык курса — не «как запустить AI», а «как определить, применим ли AI в данной задаче». В Лекции шестнадцать keystone-матрица «данные на физика» формализует этот вопрос для нефтегаза. Сам подход — структурный fit assessment — переносимый. В Лекции семнадцать обобщим: для любой отрасли существует две-три-мерная таксономия. Без этой диагностики AI-внедрение — азартная ставка, не инженерное решение.</a:t>
+              <a:t>Первый. AI-суждение как структурная задача — где применим, где нет. Главный инференциальный навык курса — не «как запустить AI», а «как определить, применим ли AI в данной задаче». В Лекции шестнадцать несущая ось-матрица «данные на физика» формализует этот вопрос для нефтегаза. Сам подход — структурный fit assessment — переносимый. В Лекции семнадцать обобщим: для любой отрасли существует две-три-мерная таксономия. Без этой диагностики AI-внедрение — азартная ставка, не инженерное решение.</a:t>
             </a:r>
             <a:br/>
             <a:br/>
             <a:r>
-              <a:t>Второй. Альтернатива-как-исходный уровень. Уметь сформулировать альтернативный инструмент для каждой задачи, в которой обсуждается AI. В нефтегазе мы видели шесть alternative категорий: пластовые симуляторы, переносные анализаторы, классический APC, SIS, senior expert, federated learning. Каждая — зрелый инженерный инструмент, который работает сейчас, без AI. AI добавляется только если измеримо улучшает исходный уровень с приемлемым риском. Без этого правила AI становится навязанным решением.</a:t>
+              <a:t>Второй. Альтернатива-как-исходный уровень. Уметь сформулировать альтернативный инструмент для каждой задачи, в которой обсуждается AI. В нефтегазе мы видели шесть alternative категорий: пластовые симуляторы, переносные анализаторы, классический APC (передовое управление процессом), SIS, старший эксперт, federated learning. Каждая — зрелый инженерный инструмент, который работает сейчас, без AI. AI добавляется только если измеримо улучшает исходный уровень с приемлемым риском. Без этого правила AI становится навязанным решением.</a:t>
             </a:r>
             <a:br/>
             <a:br/>
             <a:r>
-              <a:t>Третий. Industry cyclicality больше AI hype cycle. 2020 crash как парадигматический случай: сто семь тысяч jobs lost за шесть месяцев, AI заморожены восемнадцать-двадцать четыре месяца. Каждая отрасль имеет свой цикл. AI-roadmap должен иметь stress-tested устойчивость против отраслевого цикла. AI не защищает от цикла — он эффект усиления.</a:t>
+              <a:t>Третий. Industry цикличность больше цикл AI-хайпа. 2020 crash как парадигматический случай: сто семь тысяч jobs lost за шесть месяцев, AI заморожены восемнадцать-двадцать четыре месяца. Каждая отрасль имеет свой цикл. дорожная карта AI должен иметь тестированный на устойчивость устойчивость против отраслевого цикла. AI не защищает от цикла — он эффект усиления.</a:t>
             </a:r>
           </a:p>
         </p:txBody>
@@ -3464,22 +3464,22 @@
           <a:lstStyle/>
           <a:p>
             <a:r>
-              <a:t>Q&amp;A. Три ключевых вопроса для exit ticket. Обсудим в малых группах по два-три, потом общий разбор.</a:t>
+              <a:t>Q&amp;A. Три ключевых вопроса для выходного билета. Обсудим в малых группах по два-три, потом общий разбор.</a:t>
             </a:r>
             <a:br/>
             <a:br/>
             <a:r>
-              <a:t>Первый вопрос — на LO1. Для какого квадранта матрицы данные на физика AI является essential, а не augmentation? Expected answer — Q2, methane MRV, high data плюс low physics. Конкретный case — MethaneSAT, Carbon Mapper или GHGSat. Почему классической физики недостаточно — cross-source data fusion от четырёх sensor modality плюс small-leak attribution не имеет классического physics-based решения.</a:t>
+              <a:t>Первый вопрос. Для какого квадранта матрицы данные × физика AI является необходимым, а не дополнением? Ожидаемый ответ — Q2, метановая MRV, высокие данные плюс низкая определённость физики. Конкретный кейс — MethaneSAT, Carbon Mapper или GHGSat. Почему классической физики недостаточно — слияние данных из четырёх типов сенсоров плюс атрибуция малой утечки не имеет классического физического решения.</a:t>
             </a:r>
             <a:br/>
             <a:br/>
             <a:r>
-              <a:t>Второй вопрос — на LO2 плюс cross-cutting. Приведите два documented failure из лекции плюс выученные уроки. Expected — любые два из десяти. Я перечисляю: BP плюс Beyond Limits — концентрированная ставка и anthropomorphic overpromise. IBM плюс Repsol — general-purpose не scaled в narrow domain. MethaneSAT loss — single-satellite catastrophic SPOF. Восемьдесят шесть процентов pilot stuck — структурная норма. Aspen Mtell alert fatigue — «устранили то, чего нельзя устранить». Четыре икс discrepancy — methodological gap. CCS сто девяносто икс scale-up gap — AI catalyst, не scale solution. Refinery plant-wide stagnation — multi-physics surrogate gap. 2020 crash сто семь тысяч jobs — industry cyclicality. Cyber девятьсот тридцать пять процентов — AI добавляет attack surface.</a:t>
+              <a:t>Второй вопрос. Приведите два разобранных провала из лекции плюс выученные уроки. Ожидается — любые два из десяти. Я перечисляю: BP + Beyond Limits — концентрированная ставка и антропоморфное переобещание. IBM + Repsol — универсальный не масштабируется в узкую область. Потеря MethaneSAT — катастрофическая единая точка отказа спутника. 86% застрявших пилотов — структурная норма. Aspen Mtell — «устранили то, чего нельзя устранить». 4× разрыв — методологический разрыв. CCS 190× разрыв масштабирования — AI как катализатор, не как решение масштаба. Общезаводская стагнация НПЗ — разрыв в многослойном суррогате. Кризис 2020, 107 тыс. рабочих мест — цикличность отрасли. Кибер +935% — AI расширяет поверхность атаки.</a:t>
             </a:r>
             <a:br/>
             <a:br/>
             <a:r>
-              <a:t>Третий вопрос — на LO2 плюс LO3. Когда в нефтегазе не применять AI? Expected — три критерия из шести. Safety-critical SIS — SIL3/SIL4 deterministic mandatory. Frontier без analog data — senior геофизик плюс классическая интерпретация. OGMP Level 5 plus custody transfer — regulator требует direct measurement.</a:t>
+              <a:t>Третий вопрос. Когда в нефтегазе не применять AI? Ожидается — три критерия из шести. Критичная безопасность SIS — SIL3/SIL4 детерминированное обязательно. Разведка фронтиров без аналогов — старший геофизик плюс классическая интерпретация. OGMP уровень 5 плюс коммерческий учёт нефти — регулятор требует прямое измерение.</a:t>
             </a:r>
           </a:p>
         </p:txBody>
@@ -3554,7 +3554,7 @@
             <a:br/>
             <a:br/>
             <a:r>
-              <a:t>Карта — bittersweet payoff. Спутник потерян. Но карта осталась. Около двух тысяч data files собраны за пятнадцать с половиной месяцев работы — это retrospective inventory, по которому академия, операторы, регуляторы могут делать анализ годами вперёд.</a:t>
+              <a:t>Карта — bittersweet payoff. Спутник потерян. Но карта осталась. Около двух тысяч data files собраны за пятнадцать с половиной месяцев работы — это retrospective реестр, по которому академия, операторы, регуляторы могут делать анализ годами вперёд.</a:t>
             </a:r>
             <a:br/>
             <a:br/>
@@ -3564,7 +3564,7 @@
             <a:br/>
             <a:br/>
             <a:r>
-              <a:t>Final framing для студента, окончивший лекцию шестнадцать и применяющий keystone-матрицу в первой реальной работе. Матрица — это диагностический инструмент, а не классификация. Реальная производственная операция часто смешана: один и тот же оператор может иметь Q1 mature production на одном бассейне, Q3 frontier exploration в другом регионе, Q2 methane MRV compliance в третьем сегменте регуляторных требований. Это не «оператор находится в одном квадранте». Это оператор управляет portfolio AI projects, каждый из которых в своём квадранте.</a:t>
+              <a:t>Final framing для студента, окончивший лекцию шестнадцать и применяющий несущая ось-матрицу в первой реальной работе. Матрица — это диагностический инструмент, а не классификация. Реальная производственная операция часто смешана: один и тот же оператор может иметь Q1 зрелое производство на одном бассейне, Q3 разведка фронтиров в другом регионе, Q2 метановая MRV соответствие в третьем сегменте регуляторных требований. Это не «оператор находится в одном квадранте». Это оператор управляет portfolio AI projects, каждый из которых в своём квадранте.</a:t>
             </a:r>
             <a:br/>
             <a:br/>
@@ -3574,7 +3574,7 @@
             <a:br/>
             <a:br/>
             <a:r>
-              <a:t>В следующей Лекции семнадцать мы соберём cornerstone концепты с одиннадцатой по шестнадцатую в системы universal patterns. До встречи. Спасибо.</a:t>
+              <a:t>В следующей Лекции семнадцать мы соберём опорный концепт концепты с одиннадцатой по шестнадцатую в системы универсальные шаблоны. До встречи. Спасибо.</a:t>
             </a:r>
           </a:p>
         </p:txBody>
@@ -3644,17 +3644,17 @@
           <a:lstStyle/>
           <a:p>
             <a:r>
-              <a:t>Сегодня семь разделов. Я их выкладываю не по value chain — не «разведка, бурение, добыча, транспорт, переработка», как принято в отраслевых справочниках. Я выкладываю по структуре AI-задачи: какие данные доступны и насколько определена физика. Это даёт четыре разных профиля AI, и для каждого — своя стратегия применения, свои working cases, свои провалы.</a:t>
+              <a:t>Сегодня семь разделов. Я их выкладываю не по value chain — не «разведка, бурение, добыча, транспорт, переработка», как принято в отраслевых справочниках. Я выкладываю по структуре AI-задачи: какие данные доступны и насколько определена физика. Это даёт четыре разных профиля AI, и для каждого — своя стратегия применения, свои рабочие кейсы, свои провалы.</a:t>
             </a:r>
             <a:br/>
             <a:br/>
             <a:r>
-              <a:t>Сначала мы вводим саму матрицу — это keystone-слайд. Потом проходим по четырём квадрантам в логическом порядке. Q1 — зрелое производство, самый освоенный квадрант. Q3 — разведка фронтиров, самый data-беднейший. Q2 — метановая MRV, где AI essential. Q4 — энергетический переход, самый честный квадрант. Потом российский фрагмент. Потом сквозные риски — кибер и нефтяной кризис 2020 года. И в конце — синтез плюс три cornerstone концепта.</a:t>
+              <a:t>Сначала мы вводим саму матрицу — это несущая ось-слайд. Потом проходим по четырём квадрантам в логическом порядке. Q1 — зрелое производство, самый освоенный квадрант. Q3 — разведка фронтиров, самый data-беднейший. Q2 — метановая MRV, где AI необходим. Q4 — энергетический переход, самый честный квадрант. Потом российский фрагмент. Потом сквозные риски — кибер и нефтяной кризис 2020 года. И в конце — синтез плюс три опорный концепт концепта.</a:t>
             </a:r>
             <a:br/>
             <a:br/>
             <a:r>
-              <a:t>Пять терминов вы будете слышать каждые несколько минут. MRV — это monitoring, reporting, verification: выявление, учёт, проверка эмиссий, в нашем случае метана. OGI — оптическая газовая визуализация, IR-камера, видящая углеводородные газы. CCS — улавливание и подземное захоронение углекислого газа. EGS — улучшенные геотермальные системы. SIS — приборная система безопасности, сертифицированная по IEC 61511. Я буду напоминать.</a:t>
+              <a:t>Пять терминов вы будете слышать каждые несколько минут. MRV — это мониторинг, reporting, верификация: выявление, учёт, проверка эмиссий, в нашем случае метана. OGI — оптическая газовая визуализация, ИК-камера, видящая углеводородные газы. CCS — улавливание и подземное захоронение углекислого газа. EGS — улучшенные геотермальные системы. SIS — приборная система безопасности, сертифицированная по IEC 61511. Я буду напоминать.</a:t>
             </a:r>
           </a:p>
         </p:txBody>
@@ -3724,7 +3724,7 @@
           <a:lstStyle/>
           <a:p>
             <a:r>
-              <a:t>Раздел один. Q1 — зрелое производство. Это самый освоенный квадрант нефтегазового AI. Зрелое месторождение Пермского бассейна имеет историю добычи тридцать с лишним лет, тысячу пробуренных скважин, хорошо изученную геологию. Пластовая симуляция на Eclipse даёт надёжные прогнозы. Senior reservoir engineer с двадцатью с лишним лет опыта добавляет implicit knowledge.</a:t>
+              <a:t>Раздел один. Q1 — зрелое производство. Это самый освоенный квадрант нефтегазового AI. Зрелое месторождение Пермского бассейна имеет историю добычи тридцать с лишним лет, тысячу пробуренных скважин, хорошо изученную геологию. Пластовая симуляция на Eclipse даёт надёжные прогнозы. Senior инженер по разработке с двадцатью с лишним лет опыта добавляет implicit knowledge.</a:t>
             </a:r>
             <a:br/>
             <a:br/>
@@ -3734,7 +3734,7 @@
             <a:br/>
             <a:br/>
             <a:r>
-              <a:t>И всё равно — восемьдесят шесть процентов AI-проектов в энергетике застряли в пилотной фазе. Это парадокс, который определяет тон всего раздела. Мы будем разбирать конкретные working cases — Ambyint, Aspen Mtell, Honeywell UOP, Роснефть Digital Field — и параллельно почему массовая статистика говорит, что большинство таких deployments не масштабируются.</a:t>
+              <a:t>И всё равно — восемьдесят шесть процентов AI-проектов в энергетике застряли в пилотной фазе. Это парадокс, который определяет тон всего раздела. Мы будем разбирать конкретные рабочие кейсы — Ambyint, Aspen Mtell, Honeywell UOP, Роснефть Digital Field — и параллельно почему массовая статистика говорит, что большинство таких deployments не масштабируются.</a:t>
             </a:r>
           </a:p>
         </p:txBody>
@@ -3809,7 +3809,7 @@
             <a:br/>
             <a:br/>
             <a:r>
-              <a:t>Размер выборки. Каждая разведочная скважина в новом районе — wildcat well, на сленге «дикая кошка», поскольку результат непредсказуем как охота на дикого зверя — стоит пятьдесят-сто миллионов долларов на офшорном глубоководном бурении. Существенно меньше — пять-двадцать миллионов — в наземной разведке. Невозможно «собрать ещё данных» без коммерчески-несостоятельных расходов. Размер обучающей выборки для нового бассейна — одна-пять скважин. Это структурно мало для любого современного ML-метода, включая foundation models.</a:t>
+              <a:t>Размер выборки. Каждая разведочная скважина в новом районе — wildcat well, на сленге «дикая кошка», поскольку результат непредсказуем как охота на дикого зверя — стоит пятьдесят-сто миллионов долларов на офшорном глубоководном бурении. Существенно меньше — пять-двадцать миллионов — в наземной разведке. Невозможно «собрать ещё данных» без коммерчески-несостоятельных расходов. Размер обучающей выборки для нового бассейна — одна-пять скважин. Это структурно мало для любого современного ML-метода, включая базовая модельs.</a:t>
             </a:r>
             <a:br/>
             <a:br/>
@@ -3884,7 +3884,7 @@
           <a:lstStyle/>
           <a:p>
             <a:r>
-              <a:t>Раздел три. Q2 — методановая MRV. Это самый необычный квадрант на keystone-матрице.</a:t>
+              <a:t>Раздел три. Q2 — методановая MRV. Это самый необычный квадрант на несущая ось-матрице.</a:t>
             </a:r>
             <a:br/>
             <a:br/>
@@ -3899,7 +3899,7 @@
             <a:br/>
             <a:br/>
             <a:r>
-              <a:t>Почему AI essential. Классической physics-based методики, которая бы взяла наблюдения четырёх типов и слила их в одну согласованную оценку утечки на конкретном устье скважины — не существует. Альтернативы только классическая физика — нет.</a:t>
+              <a:t>Почему AI необходим. Классической физически обоснованный методики, которая бы взяла наблюдения четырёх типов и слила их в одну согласованную оценку утечки на конкретном устье скважины — не существует. Альтернативы только классическая физика — нет.</a:t>
             </a:r>
             <a:br/>
             <a:br/>
@@ -3974,22 +3974,22 @@
           <a:lstStyle/>
           <a:p>
             <a:r>
-              <a:t>Раздел четыре. Q4 — это самый честный квадрант keystone-матрицы. Не «AI revolution», не «AI essential», не «AI augmentation» — а AI и физика struggle вместе. И данных мало — единицы CCS-проектов в мире, единицы EGS-проектов. И физика на длинных горизонтах не закрыта — миграция облака CO₂ через подземные формации на сто лет, geomechanics нагрева в EGS на тридцать с лишним лет.</a:t>
+              <a:t>Раздел четыре. Q4 — это самый честный квадрант несущая ось-матрицы. Не «AI revolution», не «AI необходим», не «AI как дополнение» — а AI и физика struggle вместе. И данных мало — единицы CCS-проектов в мире, единицы EGS-проектов. И физика на длинных горизонтах не закрыта — миграция облака CO₂ через подземные формации на сто лет, геомеханика нагрева в EGS на тридцать с лишним лет.</a:t>
             </a:r>
             <a:br/>
             <a:br/>
             <a:r>
-              <a:t>Эта структура заставляет читателя смотреть на Q4 без иллюзий. Технологии обещают много. Достижения единичны. Scale gap огромен.</a:t>
+              <a:t>Эта структура заставляет читателя смотреть на Q4 без иллюзий. Технологии обещают много. Достижения единичны. масштаб gap огромен.</a:t>
             </a:r>
             <a:br/>
             <a:br/>
             <a:r>
-              <a:t>В Q1 у нас были данные и физика — AI работал как мультипликатор. В Q3 — физика была, данных не было — AI работал как augmentation. В Q2 — данные были, физики не было — AI работал как essential. В Q4 — обе стороны слабые. И AI не может компенсировать обе слабости одновременно.</a:t>
+              <a:t>В Q1 у нас были данные и физика — AI работал как мультипликатор. В Q3 — физика была, данных не было — AI работал как дополнение. В Q2 — данные были, физики не было — AI работал как необходим. В Q4 — обе стороны слабые. И AI не может компенсировать обе слабости одновременно.</a:t>
             </a:r>
             <a:br/>
             <a:br/>
             <a:r>
-              <a:t>Что это значит для развёртывания. Hybrid AI плюс physics — единственный workable путь. Long-horizon prediction структурно уязвимо к hallucination. Scale gap огромен — он не закрывается AI.</a:t>
+              <a:t>Что это значит для развёртывания. Гибридный AI плюс physics — единственный workable путь. Long-horizon prediction структурно уязвимо к галлюцинация. масштаб gap огромен — он не закрывается AI.</a:t>
             </a:r>
           </a:p>
         </p:txBody>
@@ -4059,7 +4059,7 @@
           <a:lstStyle/>
           <a:p>
             <a:r>
-              <a:t>Это keystone-слайд. Сюда мы будем возвращаться каждый раз, когда говорим про конкретный кейс. Две оси, четыре квадранта.</a:t>
+              <a:t>Это несущая ось-слайд. Сюда мы будем возвращаться каждый раз, когда говорим про конкретный кейс. Две оси, четыре квадранта.</a:t>
             </a:r>
             <a:br/>
             <a:br/>
@@ -4074,7 +4074,7 @@
             <a:br/>
             <a:br/>
             <a:r>
-              <a:t>Перекрестив две оси, получаем четыре квадранта. Q1 — зрелое производство, высокие данные плюс высокая физика — AI работает как мультипликатор классических методов; пример Ambyint InfinityRL даёт плюс пятнадцать процентов на двухстах скважинах. Q2 — методановая MRV, высокие данные но низкая физика — AI essential, потому что классической альтернативы нет; MethaneSAT, Carbon Mapper, GHGSat. Q3 — разведка фронтиров, данных мало но физика хорошо описана — physics-first, AI augmentation; Aramco METABRAIN, Eni HPC6. Q4 — энергетический переход, и данных мало, и физика на длинных горизонтах не закрыта — AI и физика struggle вместе; Northern Lights CCS, Fervo EGS.</a:t>
+              <a:t>Перекрестив две оси, получаем четыре квадранта. Q1 — зрелое производство, высокие данные плюс высокая физика — AI работает как мультипликатор классических методов; пример Ambyint InfinityRL даёт плюс пятнадцать процентов на двухстах скважинах. Q2 — методановая MRV, высокие данные но низкая физика — AI необходим, потому что классической альтернативы нет; MethaneSAT, Carbon Mapper, GHGSat. Q3 — разведка фронтиров, данных мало но физика хорошо описана — сначала физика, AI как дополнение; Aramco METABRAIN, Eni HPC6. Q4 — энергетический переход, и данных мало, и физика на длинных горизонтах не закрыта — AI и физика struggle вместе; Northern Lights CCS, Fervo EGS.</a:t>
             </a:r>
             <a:br/>
             <a:br/>
@@ -4164,7 +4164,7 @@
             <a:br/>
             <a:br/>
             <a:r>
-              <a:t>Пять структурных причин. Первое — данные: шестьдесят-восемьдесят процентов времени AI-проекта в нефтегазе уходит на очистку данных, не на моделирование. Второе — legacy IT: стоимость интеграции с SCADA, MES, ERP обычно в три-пять раз превышает начальную стоимость самого AI-софта. Третье — дефицит кадров. Четвёртое — культура безопасности: бессмысленный AI — непринятый AI. Пятое — горизонт окупаемости: AI-вендоры предлагают окупаемость за двенадцать-восемнадцать месяцев, нефтегаз планирует на двадцать-тридцать лет; эти горизонты несовместимы.</a:t>
+              <a:t>Пять структурных причин. Первое — данные: шестьдесят-восемьдесят процентов времени AI-проекта в нефтегазе уходит на очистку данных, не на моделирование. Второе — старая IT: стоимость интеграции с SCADA, MES, ERP обычно в три-пять раз превышает начальную стоимость самого AI-софта. Третье — дефицит кадров. Четвёртое — культура безопасности: бессмысленный AI — непринятый AI. Пятое — горизонт окупаемости: AI-вендоры предлагают окупаемость за двенадцать-восемнадцать месяцев, нефтегаз планирует на двадцать-тридцать лет; эти горизонты несовместимы.</a:t>
             </a:r>
             <a:br/>
             <a:br/>
@@ -4254,12 +4254,12 @@
             <a:br/>
             <a:br/>
             <a:r>
-              <a:t>Plant-wide stagnation. Узкие применения Aspen Mtell — одна колонна, один компрессор — работают, документировано. Plant-wide развёртывание буксует. Yokogawa объявила пилот plant-wide AI-управления на одном из НПЗ Idemitsu в Японии в 2018 году. Plant-wide пилот тихо закрыт после 2018 года; в публичных материалах остались только узкие истории успеха.</a:t>
+              <a:t>Plant-wide stagnation. Узкие применения Aspen Mtell — одна колонна, один компрессор — работают, документировано. Plant-wide развёртывание буксует. Yokogawa объявила пилот общезаводской AI-управления на одном из НПЗ Idemitsu в Японии в 2018 году. общезаводской пилот тихо закрыт после 2018 года; в публичных материалах остались только узкие истории успеха.</a:t>
             </a:r>
             <a:br/>
             <a:br/>
             <a:r>
-              <a:t>Главный урок: «устранили alert fatigue» — это маркетинг, не инженерное утверждение. Задача проектировщика — управлять иерархией тревог по стандарту ISA 18.2, не пытаться обмануть законы мониторинга.</a:t>
+              <a:t>Главный урок: «устранили усталость от ложных тревог» — это маркетинг, не инженерное утверждение. Задача проектировщика — управлять иерархией тревог по стандарту ISA 18.2, не пытаться обмануть законы мониторинга.</a:t>
             </a:r>
           </a:p>
         </p:txBody>
@@ -4414,7 +4414,7 @@
           <a:lstStyle/>
           <a:p>
             <a:r>
-              <a:t>Шесть вендоров Q1 в трёх группах. Понимание ландшафта — необходимое условие LO3.</a:t>
+              <a:t>Шесть вендоров Q1 в трёх группах. Понимание ландшафта — необходимое условие задачи.</a:t>
             </a:r>
             <a:br/>
             <a:br/>
@@ -4424,7 +4424,7 @@
             <a:br/>
             <a:br/>
             <a:r>
-              <a:t>Группа вторая — корпоративный уровень для крупных операторов. SLB Avocet — программное обеспечение для управления добычей с интегрированным ML с 2020-го года. Клиенты — NOC и super-majors. Конкретные KPI обычно не раскрываются. Halliburton DecisionSpace Production — аналог.</a:t>
+              <a:t>Группа вторая — корпоративный уровень для крупных операторов. SLB Avocet — программное обеспечение для управления добычей с интегрированным ML с 2020-го года. Клиенты — нацкомпания и супермэйджоры. Конкретные KPI обычно не раскрываются. Halliburton DecisionSpace Production — аналог.</a:t>
             </a:r>
             <a:br/>
             <a:br/>
@@ -4439,7 +4439,7 @@
             <a:br/>
             <a:br/>
             <a:r>
-              <a:t>Главная точка для LO3 — mode не равно brand. Когда вендор продаёт «прогностическое обслуживание» — это режим применения AI, не уникальный продукт. Тот же режим реализуют Aspen Mtell, Honeywell Forge, ABB Genix, GE Digital, IBM Maximo, Siemens MindSphere. Выбор поставщика — это выбор стека интеграции, цены и поддержки, не «между технологиями».</a:t>
+              <a:t>Главная точка — режим не равно бренд. Когда вендор продаёт «прогностическое обслуживание» — это режим применения AI, не уникальный продукт. Тот же режим реализуют Aspen Mtell, Honeywell Forge, ABB Genix, GE Digital, IBM Maximo, Siemens MindSphere. Выбор поставщика — это выбор стека интеграции, цены и поддержки, не «между технологиями».</a:t>
             </a:r>
           </a:p>
         </p:txBody>
@@ -7624,13 +7624,13 @@
               </a:lnSpc>
             </a:pPr>
             <a:r>
-              <a:rPr sz="1200" b="0" i="0">
+              <a:rPr sz="1100" b="0" i="1">
                 <a:solidFill>
                   <a:srgbClr val="6B7685"/>
                 </a:solidFill>
                 <a:latin typeface="Arial"/>
               </a:rPr>
-              <a:t>для всего бассейна</a:t>
+              <a:t>из ~80 000 скважин (~3,2% факелуют)</a:t>
             </a:r>
           </a:p>
           <a:p>
@@ -7678,7 +7678,7 @@
                 </a:solidFill>
                 <a:latin typeface="Arial"/>
               </a:rPr>
-              <a:t>operational режим.</a:t>
+              <a:t>эксплуатационный режим.</a:t>
             </a:r>
           </a:p>
           <a:p>
@@ -7694,7 +7694,7 @@
                 </a:solidFill>
                 <a:latin typeface="Arial"/>
               </a:rPr>
-              <a:t>Добыча идёт быстрее,</a:t>
+              <a:t>Сжигать избыточный газ</a:t>
             </a:r>
           </a:p>
           <a:p>
@@ -7710,7 +7710,7 @@
                 </a:solidFill>
                 <a:latin typeface="Arial"/>
               </a:rPr>
-              <a:t>чем строится газовая</a:t>
+              <a:t>быстрее и дешевле, чем</a:t>
             </a:r>
           </a:p>
           <a:p>
@@ -7726,7 +7726,7 @@
                 </a:solidFill>
                 <a:latin typeface="Arial"/>
               </a:rPr>
-              <a:t>инфраструктура.</a:t>
+              <a:t>строить газовую инфраструктуру.</a:t>
             </a:r>
           </a:p>
         </p:txBody>
@@ -7917,7 +7917,7 @@
                 </a:solidFill>
                 <a:latin typeface="Arial"/>
               </a:rPr>
-              <a:t>Тот же режим (прогностическое обслуживание) реализуют 10+ вендоров. Mode ≠ brand.</a:t>
+              <a:t>Тот же режим (прогностическое обслуживание) реализуют 10+ поставщиков. Режим ≠ бренд.</a:t>
             </a:r>
           </a:p>
         </p:txBody>
@@ -8049,7 +8049,7 @@
                 <a:latin typeface="Arial"/>
               </a:rPr>
               <a:t>ML-стартапы
-для производства</a:t>
+для добычи</a:t>
             </a:r>
           </a:p>
         </p:txBody>
@@ -8089,7 +8089,7 @@
                 <a:latin typeface="Arial"/>
               </a:rPr>
               <a:t>· Ambyint (Калгари) — InfinityRL для
-искусственного подъёма</a:t>
+механизированной добычи</a:t>
             </a:r>
           </a:p>
           <a:p>
@@ -8122,7 +8122,7 @@
                 <a:latin typeface="Arial"/>
               </a:rPr>
               <a:t>· OspreyData (→ Mesquite 2022) —
-expert-augmented ML для ESP, газлифта</a:t>
+ML с экспертом для ЭЦН, газлифта</a:t>
             </a:r>
           </a:p>
         </p:txBody>
@@ -8253,8 +8253,8 @@
                 </a:solidFill>
                 <a:latin typeface="Arial"/>
               </a:rPr>
-              <a:t>Enterprise
-(NOC + super-majors)</a:t>
+              <a:t>Корпоративные
+(нацкомпании + супермэйджоры)</a:t>
             </a:r>
           </a:p>
         </p:txBody>
@@ -8327,7 +8327,7 @@
                 <a:latin typeface="Arial"/>
               </a:rPr>
               <a:t>· Halliburton DecisionSpace
-Production — аналог. Industrial scale.</a:t>
+Production — аналог. Промышленный масштаб.</a:t>
             </a:r>
           </a:p>
         </p:txBody>
@@ -8458,7 +8458,7 @@
                 </a:solidFill>
                 <a:latin typeface="Arial"/>
               </a:rPr>
-              <a:t>Refinery + pipeline</a:t>
+              <a:t>НПЗ + трубопроводы</a:t>
             </a:r>
           </a:p>
         </p:txBody>
@@ -8498,7 +8498,7 @@
                 <a:latin typeface="Arial"/>
               </a:rPr>
               <a:t>· AspenTech Aspen Mtell (Emerson)
-— rising через cross-продажи</a:t>
+— растёт через перекрёстные продажи</a:t>
             </a:r>
           </a:p>
           <a:p>
@@ -8531,7 +8531,7 @@
                 <a:latin typeface="Arial"/>
               </a:rPr>
               <a:t>· Honeywell UOP Connect — 310+
-юнитов / ~700 НПЗ = ~44%</a:t>
+установок / ~700 НПЗ = ~44%</a:t>
             </a:r>
           </a:p>
           <a:p>
@@ -8651,7 +8651,7 @@
                 </a:solidFill>
                 <a:latin typeface="Arial"/>
               </a:rPr>
-              <a:t>Bonus — Drilling subset: Nabors PACE-X (4-мильный ствол Bakken) · NOV NOVOS · Precision Drilling AlphaAutomation. Mode = автоматизация бурения; brand вторичен.</a:t>
+              <a:t>Бурение (дополнительно): Nabors PACE-X (4-мильный ствол Bakken) · NOV NOVOS · Precision Drilling AlphaAutomation. Режим = автоматизация бурения; бренд вторичен.</a:t>
             </a:r>
           </a:p>
         </p:txBody>
@@ -8755,7 +8755,7 @@
                 </a:solidFill>
                 <a:latin typeface="Arial"/>
               </a:rPr>
-              <a:t>Внутренняя разработка после ухода Roxar / Schlumberger в 2022. Vertical integration default.</a:t>
+              <a:t>Внутренняя разработка после ухода Roxar / Schlumberger в 2022. Вертикальная интеграция по умолчанию.</a:t>
             </a:r>
           </a:p>
         </p:txBody>
@@ -9073,7 +9073,7 @@
                 </a:solidFill>
                 <a:latin typeface="Arial"/>
               </a:rPr>
-              <a:t>Контекст: санкции → insourcing</a:t>
+              <a:t>Контекст: санкции → внутренняя разработка</a:t>
             </a:r>
           </a:p>
           <a:p>
@@ -9137,7 +9137,7 @@
                 </a:solidFill>
                 <a:latin typeface="Arial"/>
               </a:rPr>
-              <a:t>· Vertical integration — необходимость, не выбор.</a:t>
+              <a:t>· Вертикальная интеграция — необходимость, не выбор.</a:t>
             </a:r>
           </a:p>
           <a:p>
@@ -9169,7 +9169,7 @@
                 </a:solidFill>
                 <a:latin typeface="Arial"/>
               </a:rPr>
-              <a:t>· Ближе к китайской модели (Sinopec, CNOOC), чем к американской vendor-based.</a:t>
+              <a:t>· Ближе к китайской модели (Sinopec, CNOOC), чем к американской на основе поставщиков.</a:t>
             </a:r>
           </a:p>
           <a:p>
@@ -9201,7 +9201,7 @@
                 </a:solidFill>
                 <a:latin typeface="Arial"/>
               </a:rPr>
-              <a:t>Caveat:</a:t>
+              <a:t>Оговорка:</a:t>
             </a:r>
           </a:p>
           <a:p>
@@ -9217,7 +9217,7 @@
                 </a:solidFill>
                 <a:latin typeface="Arial"/>
               </a:rPr>
-              <a:t>Российские KPI = self-reported в press release; independent audit ограничен санкциями. Тот же уровень осторожности, что для Aramco $1,8B.</a:t>
+              <a:t>Российские KPI — самоотчёт в пресс-релизе; независимый аудит ограничен санкциями. Тот же уровень осторожности, что для Aramco $1,8 млрд.</a:t>
             </a:r>
           </a:p>
         </p:txBody>
@@ -9304,7 +9304,7 @@
                 </a:solidFill>
                 <a:latin typeface="Arial"/>
               </a:rPr>
-              <a:t>Башнефть Илишевское — типичное зрелое месторождение Q1: эксплуатируется с 1980-х, ~17 Mt/год исходный уровень. Пилотировать AI на known asset, не на frontier.</a:t>
+              <a:t>Башнефть Илишевское — типичное зрелое месторождение Q1: эксплуатируется с 1980-х, ~17 млн т/год исходный уровень. Пилотировать AI на известном активе, не на фронтире.</a:t>
             </a:r>
           </a:p>
         </p:txBody>
@@ -9408,7 +9408,7 @@
                 </a:solidFill>
                 <a:latin typeface="Arial"/>
               </a:rPr>
-              <a:t>Foundation models едят vertical AI specialists. Адресуемый рынок уже, чем ожидалось.</a:t>
+              <a:t>Базовые модели поедают узких отраслевых AI-вендоров. Адресуемый рынок уже, чем ожидалось.</a:t>
             </a:r>
           </a:p>
         </p:txBody>
@@ -9578,7 +9578,7 @@
                 </a:solidFill>
                 <a:latin typeface="Arial"/>
               </a:rPr>
-              <a:t>· 2018: оценка ~$300M</a:t>
+              <a:t>· 2018: оценка ~$300 млн</a:t>
             </a:r>
           </a:p>
           <a:p>
@@ -9610,7 +9610,7 @@
                 </a:solidFill>
                 <a:latin typeface="Arial"/>
               </a:rPr>
-              <a:t>· 2021–2022: план IPO $2–3B в 2023</a:t>
+              <a:t>· 2021–2022: план IPO $2–3 млрд в 2023</a:t>
             </a:r>
           </a:p>
           <a:p>
@@ -9674,7 +9674,7 @@
                 </a:solidFill>
                 <a:latin typeface="Arial"/>
               </a:rPr>
-              <a:t>· 2024: ARR $94M (+40% YoY), 871 сотрудник после реструктуризации</a:t>
+              <a:t>· 2024: ARR (годовая повторяющаяся выручка) $94 млн (+40%), 871 сотрудник после реструктуризации</a:t>
             </a:r>
           </a:p>
           <a:p>
@@ -9706,7 +9706,7 @@
                 </a:solidFill>
                 <a:latin typeface="Arial"/>
               </a:rPr>
-              <a:t>· 2026: «время IPO неопределённо» (Aker ASA отчёт)</a:t>
+              <a:t>· 2026: «время IPO неопределённо» (отчёт Aker ASA)</a:t>
             </a:r>
           </a:p>
           <a:p>
@@ -9853,7 +9853,7 @@
                 </a:solidFill>
                 <a:latin typeface="Arial"/>
               </a:rPr>
-              <a:t>C3.ai (US, основан 2009 Tom Siebel)</a:t>
+              <a:t>C3.ai (США, основан 2009 Tom Siebel)</a:t>
             </a:r>
           </a:p>
         </p:txBody>
@@ -9924,7 +9924,7 @@
                 </a:solidFill>
                 <a:latin typeface="Arial"/>
               </a:rPr>
-              <a:t>· FY24 O&amp;G вертикаль = 5,9% выручки = ~$18M из $310M</a:t>
+              <a:t>· ФГ24 нефтегаз = 5,9% выручки = ~$18 млн из $310 млн</a:t>
             </a:r>
           </a:p>
           <a:p>
@@ -9956,7 +9956,7 @@
                 </a:solidFill>
                 <a:latin typeface="Arial"/>
               </a:rPr>
-              <a:t>· FY25: «не-нефтегазовая выручка +48% YoY» → нефтегаз уменьшается</a:t>
+              <a:t>· ФГ25: «не-нефтегазовая выручка +48%» → нефтегаз уменьшается</a:t>
             </a:r>
           </a:p>
           <a:p>
@@ -9988,7 +9988,7 @@
                 </a:solidFill>
                 <a:latin typeface="Arial"/>
               </a:rPr>
-              <a:t>· C3.ai сместил фокус на federal/defence</a:t>
+              <a:t>· C3.ai сместил фокус на федеральный/оборонный сектор</a:t>
             </a:r>
           </a:p>
           <a:p>
@@ -10020,7 +10020,7 @@
                 </a:solidFill>
                 <a:latin typeface="Arial"/>
               </a:rPr>
-              <a:t>· IPO 2020: $42 → пик ~$15B → 2026: ~$3–4B (−70–80% от пика)</a:t>
+              <a:t>· IPO 2020: $42 → пик ~$15 млрд → 2026: ~$3–4 млрд (−70–80% от пика)</a:t>
             </a:r>
           </a:p>
           <a:p>
@@ -10123,7 +10123,7 @@
                 </a:solidFill>
                 <a:latin typeface="Arial"/>
               </a:rPr>
-              <a:t>Foundation models (SLB Lumi, METABRAIN) поедают узкоспециализированных: (a) большая модель + LoRA &gt; специализированная; (b) крупные NOC разрабатывают свои foundation models.</a:t>
+              <a:t>Базовые модели (SLB Lumi, METABRAIN) поедают узкоспециализированных: (a) большая модель + лёгкое дообучение (LoRA) &gt; специализированная; (b) крупные нацкомпании разрабатывают свои базовые модели.</a:t>
             </a:r>
           </a:p>
         </p:txBody>
@@ -10227,7 +10227,7 @@
                 </a:solidFill>
                 <a:latin typeface="Arial"/>
               </a:rPr>
-              <a:t>Distilled из практики последних 5 лет. Каждый — с конкретной альтернативой.</a:t>
+              <a:t>Дистиллировано из практики последних 5 лет. Каждый — с конкретной альтернативой.</a:t>
             </a:r>
           </a:p>
         </p:txBody>
@@ -10397,7 +10397,7 @@
                 </a:solidFill>
                 <a:latin typeface="Arial"/>
               </a:rPr>
-              <a:t>Зрелый пласт + Eclipse</a:t>
+              <a:t>Зрелый пласт + классический симулятор (Eclipse)</a:t>
             </a:r>
           </a:p>
         </p:txBody>
@@ -10436,7 +10436,7 @@
                 </a:solidFill>
                 <a:latin typeface="Arial"/>
               </a:rPr>
-              <a:t>Senior engineer + классический симулятор дают надёжные ответы. ML — overhead без существенного прироста.</a:t>
+              <a:t>Опытный инженер + классический симулятор дают надёжные ответы. ML — накладные расходы без существенного прироста.</a:t>
             </a:r>
           </a:p>
         </p:txBody>
@@ -10606,7 +10606,7 @@
                 </a:solidFill>
                 <a:latin typeface="Arial"/>
               </a:rPr>
-              <a:t>Stripper wells &lt;10 bopd</a:t>
+              <a:t>Стрипперные скважины (&lt;10 барр./день)</a:t>
             </a:r>
           </a:p>
         </p:txBody>
@@ -10645,7 +10645,7 @@
                 </a:solidFill>
                 <a:latin typeface="Arial"/>
               </a:rPr>
-              <a:t>Прибавка +15% = +1,5 bopd; стоимость развёртывания &gt; извлечённой ценности. Юнит-экономика отрицательная.</a:t>
+              <a:t>Прибавка +15% = +1,5 барр./день; стоимость развёртывания &gt; извлечённой ценности. Юнит-экономика отрицательная.</a:t>
             </a:r>
           </a:p>
         </p:txBody>
@@ -10815,7 +10815,7 @@
                 </a:solidFill>
                 <a:latin typeface="Arial"/>
               </a:rPr>
-              <a:t>Custody transfer metering</a:t>
+              <a:t>Коммерческий учёт нефти (custody transfer)</a:t>
             </a:r>
           </a:p>
         </p:txBody>
@@ -10854,7 +10854,7 @@
                 </a:solidFill>
                 <a:latin typeface="Arial"/>
               </a:rPr>
-              <a:t>Передача товарной нефти. Регулятор требует mass flow meter 0,2% точности. Не black-box ML.</a:t>
+              <a:t>Передача товарной нефти. Регулятор требует расходомер 0,2% точности. Не «чёрный ящик» ML.</a:t>
             </a:r>
           </a:p>
         </p:txBody>
@@ -11024,7 +11024,7 @@
                 </a:solidFill>
                 <a:latin typeface="Arial"/>
               </a:rPr>
-              <a:t>BOP / PRV / ESD — SIS</a:t>
+              <a:t>Аварийная остановка (BOP/PRV/ESD) — SIS</a:t>
             </a:r>
           </a:p>
         </p:txBody>
@@ -11063,7 +11063,7 @@
                 </a:solidFill>
                 <a:latin typeface="Arial"/>
               </a:rPr>
-              <a:t>SIL3/SIL4 по IEC 61511 = детерминированно + сертифицируемо. ML не сертифицируется.</a:t>
+              <a:t>SIL3/SIL4 по IEC 61511 = детерминировано + сертифицируемо. ML не сертифицируется.</a:t>
             </a:r>
           </a:p>
         </p:txBody>
@@ -11233,7 +11233,7 @@
                 </a:solidFill>
                 <a:latin typeface="Arial"/>
               </a:rPr>
-              <a:t>Frontier без analog data</a:t>
+              <a:t>Разведка фронтиров без аналогов</a:t>
             </a:r>
           </a:p>
         </p:txBody>
@@ -11272,7 +11272,7 @@
                 </a:solidFill>
                 <a:latin typeface="Arial"/>
               </a:rPr>
-              <a:t>ML не на чем обучать. Senior геофизик + классическая интерпретация (preview Разд. 2).</a:t>
+              <a:t>ML не на чем обучать. Опытный геофизик + классическая интерпретация (далее в Разделе 2).</a:t>
             </a:r>
           </a:p>
         </p:txBody>
@@ -11442,7 +11442,7 @@
                 </a:solidFill>
                 <a:latin typeface="Arial"/>
               </a:rPr>
-              <a:t>EU Methane Reg reporting</a:t>
+              <a:t>Отчётность EU Methane Reg</a:t>
             </a:r>
           </a:p>
         </p:txBody>
@@ -11481,7 +11481,7 @@
                 </a:solidFill>
                 <a:latin typeface="Arial"/>
               </a:rPr>
-              <a:t>Traceability mandated — не black-box ML estimate. Регуляторный compliance.</a:t>
+              <a:t>Прослеживаемость обязательна — не оценка «чёрного ящика». Регуляторное соответствие.</a:t>
             </a:r>
           </a:p>
         </p:txBody>
@@ -11568,7 +11568,7 @@
                 </a:solidFill>
                 <a:latin typeface="Arial"/>
               </a:rPr>
-              <a:t>Главный навык курса: уметь сказать «нет» там, где AI не нужен. 14% successful vs 86% pilot stuck — разница часто именно здесь.</a:t>
+              <a:t>Главный навык курса: уметь сказать «нет» там, где AI не нужен. 14% работают vs 86% застряли — разница часто именно здесь.</a:t>
             </a:r>
           </a:p>
         </p:txBody>
@@ -11677,7 +11677,7 @@
                 </a:solidFill>
                 <a:latin typeface="Arial"/>
               </a:rPr>
-              <a:t>1. Keystone</a:t>
+              <a:t>1. Стержень</a:t>
             </a:r>
           </a:p>
         </p:txBody>
@@ -11760,7 +11760,7 @@
                 </a:solidFill>
                 <a:latin typeface="Arial"/>
               </a:rPr>
-              <a:t>2. Q1 Mature</a:t>
+              <a:t>2. Q1 Зрелое</a:t>
             </a:r>
           </a:p>
         </p:txBody>
@@ -11843,7 +11843,7 @@
                 </a:solidFill>
                 <a:latin typeface="Arial"/>
               </a:rPr>
-              <a:t>3. Q3 Frontier</a:t>
+              <a:t>3. Q3 Разведка</a:t>
             </a:r>
           </a:p>
         </p:txBody>
@@ -11926,7 +11926,7 @@
                 </a:solidFill>
                 <a:latin typeface="Arial"/>
               </a:rPr>
-              <a:t>4. Q2 Methane</a:t>
+              <a:t>4. Q2 Метан</a:t>
             </a:r>
           </a:p>
         </p:txBody>
@@ -12009,7 +12009,7 @@
                 </a:solidFill>
                 <a:latin typeface="Arial"/>
               </a:rPr>
-              <a:t>5. Q4 Transition</a:t>
+              <a:t>5. Q4 Переход</a:t>
             </a:r>
           </a:p>
         </p:txBody>
@@ -12292,7 +12292,7 @@
                 </a:solidFill>
                 <a:latin typeface="Arial"/>
               </a:rPr>
-              <a:t>Каждая wildcat-скважина = $50–100M. Размер выборки 1–5 скважин. ML не обобщается без аналогов. Physics ground truth, AI как дополнение.</a:t>
+              <a:t>Каждая поисковая скважина = $50–100 млн. Размер выборки 1–5 скважин. ML не обобщается без аналогов. Физика — эталон, AI как дополнение.</a:t>
             </a:r>
           </a:p>
         </p:txBody>
@@ -12379,7 +12379,7 @@
                 </a:solidFill>
                 <a:latin typeface="Arial"/>
               </a:rPr>
-              <a:t>3 рабочих кейса · 2 провала десятилетия · HPC-гонка $100–400M на инсталляцию</a:t>
+              <a:t>3 рабочих кейса · 2 провала десятилетия · гонка суперкомпьютеров $100–400 млн на инсталляцию</a:t>
             </a:r>
           </a:p>
         </p:txBody>
@@ -12444,7 +12444,7 @@
                 </a:solidFill>
                 <a:latin typeface="Arial"/>
               </a:rPr>
-              <a:t>HPC-гонка Q3: $100–400M на инсталляцию</a:t>
+              <a:t>Гонка суперкомпьютеров (HPC) Q3: $100–400 млн на инсталляцию</a:t>
             </a:r>
           </a:p>
         </p:txBody>
@@ -12483,7 +12483,7 @@
                 </a:solidFill>
                 <a:latin typeface="Arial"/>
               </a:rPr>
-              <a:t>Не коммодизируется как облако — стратегический CapEx. Малые операторы вытесняются capital barrier.</a:t>
+              <a:t>Не превращается в товар как облако — стратегические капитальные затраты. Малые операторы вытесняются капитальным барьером.</a:t>
             </a:r>
           </a:p>
         </p:txBody>
@@ -12677,7 +12677,7 @@
                 </a:solidFill>
                 <a:latin typeface="Arial"/>
               </a:rPr>
-              <a:t>606 PFLOPS peak · 477 sustained</a:t>
+              <a:t>606 PFLOPS пиковая · 477 устойчивая</a:t>
             </a:r>
           </a:p>
           <a:p>
@@ -12709,7 +12709,7 @@
                 </a:solidFill>
                 <a:latin typeface="Arial"/>
               </a:rPr>
-              <a:t>$104 млн capex</a:t>
+              <a:t>$104 млн капитальных затрат</a:t>
             </a:r>
           </a:p>
           <a:p>
@@ -12741,7 +12741,7 @@
                 </a:solidFill>
                 <a:latin typeface="Arial"/>
               </a:rPr>
-              <a:t>Стратегия: cost-effective per-FLOP (AMD vs NVIDIA)</a:t>
+              <a:t>Стратегия: дешевле за FLOP (AMD vs NVIDIA)</a:t>
             </a:r>
           </a:p>
         </p:txBody>
@@ -12935,7 +12935,7 @@
                 </a:solidFill>
                 <a:latin typeface="Arial"/>
               </a:rPr>
-              <a:t>~250 млрд параметров [VFY-day-of]</a:t>
+              <a:t>~250 млрд параметров</a:t>
             </a:r>
           </a:p>
           <a:p>
@@ -12967,7 +12967,7 @@
                 </a:solidFill>
                 <a:latin typeface="Arial"/>
               </a:rPr>
-              <a:t>$1,8 млрд realized 2024 (Davos янв 2025)</a:t>
+              <a:t>$1,8 млрд реализовано в 2024 (Давос янв 2025)</a:t>
             </a:r>
           </a:p>
           <a:p>
@@ -12983,7 +12983,7 @@
                 </a:solidFill>
                 <a:latin typeface="Arial"/>
               </a:rPr>
-              <a:t>6 000 сотрудников обучены, 430 use cases</a:t>
+              <a:t>6 000 сотрудников обучены, 430 сценариев применения</a:t>
             </a:r>
           </a:p>
           <a:p>
@@ -13086,7 +13086,7 @@
                 </a:solidFill>
                 <a:latin typeface="Arial"/>
               </a:rPr>
-              <a:t>Aramco выручка 2024 = $436,6 млрд → $1,8B / $436,6B = 0,41%. AI добавляет полпроцента к полностью оптимизированной операции.</a:t>
+              <a:t>Aramco выручка 2024 = $436,6 млрд → $1,8 млрд / $436,6 млрд = 0,41%. AI добавляет полпроцента к полностью оптимизированной операции.</a:t>
             </a:r>
           </a:p>
         </p:txBody>
@@ -13151,7 +13151,7 @@
                 </a:solidFill>
                 <a:latin typeface="Arial"/>
               </a:rPr>
-              <a:t>SLB Lumi (сентябрь 2024) — foundation model поверх Petrel + Delfi</a:t>
+              <a:t>SLB Lumi (сентябрь 2024) — базовая модель поверх Petrel + Delfi</a:t>
             </a:r>
           </a:p>
         </p:txBody>
@@ -13190,7 +13190,7 @@
                 </a:solidFill>
                 <a:latin typeface="Arial"/>
               </a:rPr>
-              <a:t>Anchor customers: Aker BP, Shell, Azule Energy. NVIDIA Grace Hopper backend.</a:t>
+              <a:t>Якорные заказчики: Aker BP, Shell, Azule Energy. Вычислительная база — NVIDIA Grace Hopper.</a:t>
             </a:r>
           </a:p>
         </p:txBody>
@@ -13301,7 +13301,7 @@
                 </a:solidFill>
                 <a:latin typeface="Arial"/>
               </a:rPr>
-              <a:t>SLB / Schlumberger press kit · 2024</a:t>
+              <a:t>SLB / Schlumberger пресс-кит · 2024</a:t>
             </a:r>
           </a:p>
         </p:txBody>
@@ -13404,7 +13404,7 @@
                 </a:solidFill>
                 <a:latin typeface="Arial"/>
               </a:rPr>
-              <a:t>· Petrophysics interpretation — каротаж</a:t>
+              <a:t>· Интерпретация петрофизики — каротаж</a:t>
             </a:r>
           </a:p>
           <a:p>
@@ -13420,7 +13420,7 @@
                 </a:solidFill>
                 <a:latin typeface="Arial"/>
               </a:rPr>
-              <a:t>· Seismic auto-tracking — трассировка горизонтов</a:t>
+              <a:t>· Автотрассировка сейсмических горизонтов</a:t>
             </a:r>
           </a:p>
           <a:p>
@@ -13436,7 +13436,7 @@
                 </a:solidFill>
                 <a:latin typeface="Arial"/>
               </a:rPr>
-              <a:t>· Reservoir characterization preview — фации</a:t>
+              <a:t>· Предварительная характеристика коллектора — фации</a:t>
             </a:r>
           </a:p>
           <a:p>
@@ -13452,7 +13452,7 @@
                 </a:solidFill>
                 <a:latin typeface="Arial"/>
               </a:rPr>
-              <a:t>· Drilling parameter optimization</a:t>
+              <a:t>· Оптимизация параметров бурения</a:t>
             </a:r>
           </a:p>
           <a:p>
@@ -13500,7 +13500,7 @@
                 </a:solidFill>
                 <a:latin typeface="Arial"/>
               </a:rPr>
-              <a:t>· SLB digital revenue 2024 = $2+ млрд = 5,7% от $35 млрд</a:t>
+              <a:t>· Цифровая выручка SLB 2024 = $2+ млрд = 5,7% от $35 млрд</a:t>
             </a:r>
           </a:p>
           <a:p>
@@ -13516,7 +13516,7 @@
                 </a:solidFill>
                 <a:latin typeface="Arial"/>
               </a:rPr>
-              <a:t>· Halliburton + OpenAI/Anthropic — partnership-driven</a:t>
+              <a:t>· Halliburton + OpenAI/Anthropic — через партнёрства</a:t>
             </a:r>
           </a:p>
           <a:p>
@@ -13532,7 +13532,7 @@
                 </a:solidFill>
                 <a:latin typeface="Arial"/>
               </a:rPr>
-              <a:t>· Mode «отраслевая foundation model» ≠ brand «Lumi»</a:t>
+              <a:t>· Режим «отраслевая базовая модель» ≠ бренд «Lumi»</a:t>
             </a:r>
           </a:p>
         </p:txBody>
@@ -13619,7 +13619,7 @@
                 </a:solidFill>
                 <a:latin typeface="Arial"/>
               </a:rPr>
-              <a:t>Через 2-3 года: SLB Lumi 2.0 или конкурент. Brand вторичен, mode (foundation model на 80+ лет industry data) первичен.</a:t>
+              <a:t>Через 2-3 года: SLB Lumi 2.0 или конкурент. Бренд вторичен, режим (базовая модель на 80+ лет отраслевых данных) первичен.</a:t>
             </a:r>
           </a:p>
         </p:txBody>
@@ -13723,7 +13723,7 @@
                 </a:solidFill>
                 <a:latin typeface="Arial"/>
               </a:rPr>
-              <a:t>HPE Cray EX4000, 4 032 NVIDIA Grace Hopper, 4× compute vs Discovery 5. $200–400M capex [VFY].</a:t>
+              <a:t>HPE Cray EX4000, 4 032 NVIDIA Grace Hopper, 4× вычислений vs Discovery 5. $200–400 млн капитальных затрат.</a:t>
             </a:r>
           </a:p>
         </p:txBody>
@@ -13778,7 +13778,7 @@
       </p:sp>
       <p:pic>
         <p:nvPicPr>
-          <p:cNvPr id="5" name="Picture 4" descr="s16-exxon.png"/>
+          <p:cNvPr id="5" name="Picture 4" descr="s16-stabroek.jpg"/>
           <p:cNvPicPr>
             <a:picLocks noChangeAspect="1"/>
           </p:cNvPicPr>
@@ -13834,7 +13834,7 @@
                 </a:solidFill>
                 <a:latin typeface="Arial"/>
               </a:rPr>
-              <a:t>ExxonMobil corporate press · 2024</a:t>
+              <a:t>USS Normandy у FPSO в Stabroek Block · US Navy / Wikimedia Commons (PD)</a:t>
             </a:r>
           </a:p>
         </p:txBody>
@@ -13969,7 +13969,7 @@
                 </a:solidFill>
                 <a:latin typeface="Arial"/>
               </a:rPr>
-              <a:t>· Stabroek Block Guyana — основной use case</a:t>
+              <a:t>· Stabroek Block Guyana — основной сценарий</a:t>
             </a:r>
           </a:p>
           <a:p>
@@ -14001,7 +14001,7 @@
                 </a:solidFill>
                 <a:latin typeface="Arial"/>
               </a:rPr>
-              <a:t>Stabroek case:</a:t>
+              <a:t>Кейс Stabroek:</a:t>
             </a:r>
           </a:p>
           <a:p>
@@ -14017,7 +14017,7 @@
                 </a:solidFill>
                 <a:latin typeface="Arial"/>
               </a:rPr>
-              <a:t>· 6 FPSO (плавучие платформы) к 2026</a:t>
+              <a:t>· 6 плавучих платформ (FPSO) к 2026</a:t>
             </a:r>
           </a:p>
           <a:p>
@@ -14049,7 +14049,7 @@
                 </a:solidFill>
                 <a:latin typeface="Arial"/>
               </a:rPr>
-              <a:t>unlock через быстрое repositioning скважин</a:t>
+              <a:t>высвобождено через быстрое перепозиционирование скважин</a:t>
             </a:r>
           </a:p>
           <a:p>
@@ -14081,7 +14081,7 @@
                 </a:solidFill>
                 <a:latin typeface="Arial"/>
               </a:rPr>
-              <a:t>Параллель Aramco METABRAIN: тот же mode, разные стратегии (US vs Saudi).</a:t>
+              <a:t>Параллель Aramco METABRAIN: тот же режим, разные стратегии (США vs Саудовская Аравия).</a:t>
             </a:r>
           </a:p>
         </p:txBody>
@@ -14168,7 +14168,7 @@
                 </a:solidFill>
                 <a:latin typeface="Arial"/>
               </a:rPr>
-              <a:t>Capital barrier: $200–400M для топового HPC исключает 95% операторов. NOC + super-majors only.</a:t>
+              <a:t>Капитальный барьер: $200–400 млн для топового суперкомпьютера исключает 95% операторов. Только нацкомпании + супермэйджоры.</a:t>
             </a:r>
           </a:p>
         </p:txBody>
@@ -14233,7 +14233,7 @@
                 </a:solidFill>
                 <a:latin typeface="Arial"/>
               </a:rPr>
-              <a:t>BP + Beyond Limits — $20M, vendor pivot 2023</a:t>
+              <a:t>BP + Beyond Limits — $20 млн, разворот поставщика в 2023</a:t>
             </a:r>
           </a:p>
         </p:txBody>
@@ -14272,7 +14272,7 @@
                 </a:solidFill>
                 <a:latin typeface="Arial"/>
               </a:rPr>
-              <a:t>BP Ventures Series B июнь 2017 → Beyond Limits pivot в healthcare/manufacturing 2023.</a:t>
+              <a:t>BP Ventures, раунд Series B июнь 2017 → Beyond Limits разворот в медицину/производство 2023.</a:t>
             </a:r>
           </a:p>
         </p:txBody>
@@ -14442,7 +14442,7 @@
                 </a:solidFill>
                 <a:latin typeface="Arial"/>
               </a:rPr>
-              <a:t>«AI absorb learnings of geologists</a:t>
+              <a:t>«AI впитает знания геологов</a:t>
             </a:r>
           </a:p>
           <a:p>
@@ -14458,7 +14458,7 @@
                 </a:solidFill>
                 <a:latin typeface="Arial"/>
               </a:rPr>
-              <a:t>and imitate their decision-making».</a:t>
+              <a:t>и будет имитировать их решения».</a:t>
             </a:r>
           </a:p>
           <a:p>
@@ -14490,7 +14490,7 @@
                 </a:solidFill>
                 <a:latin typeface="Arial"/>
               </a:rPr>
-              <a:t>Heritage:</a:t>
+              <a:t>Происхождение:</a:t>
             </a:r>
           </a:p>
           <a:p>
@@ -14506,7 +14506,7 @@
                 </a:solidFill>
                 <a:latin typeface="Arial"/>
               </a:rPr>
-              <a:t>· NASA JPL ($20M heritage)</a:t>
+              <a:t>· NASA JPL (наследие $20 млн)</a:t>
             </a:r>
           </a:p>
           <a:p>
@@ -14522,7 +14522,7 @@
                 </a:solidFill>
                 <a:latin typeface="Arial"/>
               </a:rPr>
-              <a:t>· Glendale, California 2014</a:t>
+              <a:t>· Glendale, Калифорния, 2014</a:t>
             </a:r>
           </a:p>
           <a:p>
@@ -14538,7 +14538,7 @@
                 </a:solidFill>
                 <a:latin typeface="Arial"/>
               </a:rPr>
-              <a:t>· «Cognitive AI» как differentiator</a:t>
+              <a:t>· «Когнитивный AI» как отличие</a:t>
             </a:r>
           </a:p>
           <a:p>
@@ -14570,7 +14570,7 @@
                 </a:solidFill>
                 <a:latin typeface="Arial"/>
               </a:rPr>
-              <a:t>BP signals 2018:</a:t>
+              <a:t>Сигналы BP 2018:</a:t>
             </a:r>
           </a:p>
           <a:p>
@@ -14586,7 +14586,7 @@
                 </a:solidFill>
                 <a:latin typeface="Arial"/>
               </a:rPr>
-              <a:t>· $20M Series B июнь 2017</a:t>
+              <a:t>· $20 млн Series B июнь 2017</a:t>
             </a:r>
           </a:p>
           <a:p>
@@ -14602,7 +14602,7 @@
                 </a:solidFill>
                 <a:latin typeface="Arial"/>
               </a:rPr>
-              <a:t>· Beyond Petroleum rebrand attempt</a:t>
+              <a:t>· Попытка ребрендинга Beyond Petroleum</a:t>
             </a:r>
           </a:p>
           <a:p>
@@ -14618,7 +14618,7 @@
                 </a:solidFill>
                 <a:latin typeface="Arial"/>
               </a:rPr>
-              <a:t>· Public commitment</a:t>
+              <a:t>· Публичное обязательство</a:t>
             </a:r>
           </a:p>
         </p:txBody>
@@ -14868,7 +14868,7 @@
                 </a:solidFill>
                 <a:latin typeface="Arial"/>
               </a:rPr>
-              <a:t>· Beyond Limits pivot в healthcare/manufacturing 2023</a:t>
+              <a:t>· Beyond Limits разворот в медицину/производство 2023</a:t>
             </a:r>
           </a:p>
           <a:p>
@@ -14916,7 +14916,7 @@
                 </a:solidFill>
                 <a:latin typeface="Arial"/>
               </a:rPr>
-              <a:t>1. Vendor concentration — single small vendor</a:t>
+              <a:t>1. Концентрация на одном малом поставщике — риск</a:t>
             </a:r>
           </a:p>
           <a:p>
@@ -14932,7 +14932,7 @@
                 </a:solidFill>
                 <a:latin typeface="Arial"/>
               </a:rPr>
-              <a:t>2. Cognitive marketing — anthropomorphic overpromise</a:t>
+              <a:t>2. Когнитивный маркетинг — антропоморфное обещание</a:t>
             </a:r>
           </a:p>
           <a:p>
@@ -14948,7 +14948,7 @@
                 </a:solidFill>
                 <a:latin typeface="Arial"/>
               </a:rPr>
-              <a:t>3. Imitation framing — AI не имитирует, он approximates</a:t>
+              <a:t>3. Рамка имитации — AI не имитирует, он аппроксимирует</a:t>
             </a:r>
           </a:p>
         </p:txBody>
@@ -15035,7 +15035,7 @@
                 </a:solidFill>
                 <a:latin typeface="Arial"/>
               </a:rPr>
-              <a:t>«Cognitive AI имитирует геолога» = anthropomorphic frame, который скрывает structural fit assessment.</a:t>
+              <a:t>«Когнитивный AI имитирует геолога» — антропоморфная рамка, скрывающая оценку структурной применимости.</a:t>
             </a:r>
           </a:p>
         </p:txBody>
@@ -15139,7 +15139,7 @@
                 </a:solidFill>
                 <a:latin typeface="Arial"/>
               </a:rPr>
-              <a:t>Hype cycle 2014–2016 → реальное commercial use ≤10% от ожиданий. Watson Industry Solutions stagnation 2018–2022.</a:t>
+              <a:t>Цикл хайпа 2014–2016 → реальное коммерческое применение ≤10% от ожиданий. Watson Industry Solutions стагнация 2018–2022.</a:t>
             </a:r>
           </a:p>
         </p:txBody>
@@ -15270,7 +15270,7 @@
                 </a:solidFill>
                 <a:latin typeface="Arial"/>
               </a:rPr>
-              <a:t>Kalimba project 2014–2022</a:t>
+              <a:t>Проект Kalimba 2014–2022</a:t>
             </a:r>
           </a:p>
         </p:txBody>
@@ -15341,7 +15341,7 @@
                 </a:solidFill>
                 <a:latin typeface="Arial"/>
               </a:rPr>
-              <a:t>· Cognitive Environments Lab (NY) + Repsol Tech Centre (Мадрид)</a:t>
+              <a:t>· Cognitive Environments Lab (Нью-Йорк) + Repsol Tech Centre (Мадрид)</a:t>
             </a:r>
           </a:p>
           <a:p>
@@ -15357,7 +15357,7 @@
                 </a:solidFill>
                 <a:latin typeface="Arial"/>
               </a:rPr>
-              <a:t>· «Cognitive computing для exploration»</a:t>
+              <a:t>· «Когнитивные вычисления для разведки»</a:t>
             </a:r>
           </a:p>
           <a:p>
@@ -15405,7 +15405,7 @@
                 </a:solidFill>
                 <a:latin typeface="Arial"/>
               </a:rPr>
-              <a:t>· 30 лет exploration data «analyzed»</a:t>
+              <a:t>· 30 лет данных разведки «проанализированы»</a:t>
             </a:r>
           </a:p>
           <a:p>
@@ -15421,7 +15421,7 @@
                 </a:solidFill>
                 <a:latin typeface="Arial"/>
               </a:rPr>
-              <a:t>· Конкретных new discoveries не объявлено</a:t>
+              <a:t>· Конкретных новых открытий не объявлено</a:t>
             </a:r>
           </a:p>
           <a:p>
@@ -15437,7 +15437,7 @@
                 </a:solidFill>
                 <a:latin typeface="Arial"/>
               </a:rPr>
-              <a:t>· Repsol exploration budget shrunk 2019+</a:t>
+              <a:t>· Бюджет разведки Repsol сократился с 2019</a:t>
             </a:r>
           </a:p>
           <a:p>
@@ -15703,7 +15703,7 @@
                 </a:solidFill>
                 <a:latin typeface="Arial"/>
               </a:rPr>
-              <a:t>→ продан Francisco Partners 2022</a:t>
+              <a:t>→ продан Francisco Partners в 2022</a:t>
             </a:r>
           </a:p>
           <a:p>
@@ -15767,7 +15767,7 @@
                 </a:solidFill>
                 <a:latin typeface="Arial"/>
               </a:rPr>
-              <a:t>1. General-purpose cognitive не scaled в narrow domain</a:t>
+              <a:t>1. Универсальный «когнитивный» AI не масштабируется в узкую область</a:t>
             </a:r>
           </a:p>
           <a:p>
@@ -15783,7 +15783,7 @@
                 </a:solidFill>
                 <a:latin typeface="Arial"/>
               </a:rPr>
-              <a:t>2. Hype cycle 2014–2016 → реальное use ≤10% от ожиданий</a:t>
+              <a:t>2. Цикл хайпа 2014–2016 → реальное применение ≤10% от ожиданий</a:t>
             </a:r>
           </a:p>
           <a:p>
@@ -15799,7 +15799,7 @@
                 </a:solidFill>
                 <a:latin typeface="Arial"/>
               </a:rPr>
-              <a:t>3. SLB Lumi и Aramco METABRAIN — domain-specific = успешнее</a:t>
+              <a:t>3. SLB Lumi и Aramco METABRAIN — отраслевые = успешнее</a:t>
             </a:r>
           </a:p>
         </p:txBody>
@@ -15886,7 +15886,7 @@
                 </a:solidFill>
                 <a:latin typeface="Arial"/>
               </a:rPr>
-              <a:t>Watson Health → ~$1B продан = $5B инвестиций vs $1B продажа = провал $4B. Indirect анчор: Kalimba не был исключением — он был частью паттерна.</a:t>
+              <a:t>Watson Health → ~$1 млрд продан = $5 млрд инвестиций vs $1 млрд продажа = провал $4 млрд. Косвенный якорь: Kalimba не был исключением — он был частью паттерна.</a:t>
             </a:r>
           </a:p>
         </p:txBody>
@@ -15995,7 +15995,7 @@
                 </a:solidFill>
                 <a:latin typeface="Arial"/>
               </a:rPr>
-              <a:t>1. Keystone</a:t>
+              <a:t>1. Стержень</a:t>
             </a:r>
           </a:p>
         </p:txBody>
@@ -16078,7 +16078,7 @@
                 </a:solidFill>
                 <a:latin typeface="Arial"/>
               </a:rPr>
-              <a:t>2. Q1 Mature</a:t>
+              <a:t>2. Q1 Зрелое</a:t>
             </a:r>
           </a:p>
         </p:txBody>
@@ -16161,7 +16161,7 @@
                 </a:solidFill>
                 <a:latin typeface="Arial"/>
               </a:rPr>
-              <a:t>3. Q3 Frontier</a:t>
+              <a:t>3. Q3 Разведка</a:t>
             </a:r>
           </a:p>
         </p:txBody>
@@ -16244,7 +16244,7 @@
                 </a:solidFill>
                 <a:latin typeface="Arial"/>
               </a:rPr>
-              <a:t>4. Q2 Methane</a:t>
+              <a:t>4. Q2 Метан</a:t>
             </a:r>
           </a:p>
         </p:txBody>
@@ -16327,7 +16327,7 @@
                 </a:solidFill>
                 <a:latin typeface="Arial"/>
               </a:rPr>
-              <a:t>5. Q4 Transition</a:t>
+              <a:t>5. Q4 Переход</a:t>
             </a:r>
           </a:p>
         </p:txBody>
@@ -16793,7 +16793,7 @@
                 </a:solidFill>
                 <a:latin typeface="Arial"/>
               </a:rPr>
-              <a:t>10 documented провалов индустрии 2014–2026?</a:t>
+              <a:t>10 разобранных провалов индустрии 2014–2026?</a:t>
             </a:r>
           </a:p>
         </p:txBody>
@@ -16897,7 +16897,7 @@
                 </a:solidFill>
                 <a:latin typeface="Arial"/>
               </a:rPr>
-              <a:t>Альтернатива Q3: physics-based simulators + senior expertise</a:t>
+              <a:t>Альтернатива Q3: физические симуляторы + старшая экспертиза</a:t>
             </a:r>
           </a:p>
         </p:txBody>
@@ -16936,7 +16936,7 @@
                 </a:solidFill>
                 <a:latin typeface="Arial"/>
               </a:rPr>
-              <a:t>AI augmentation поверх, не replacement. Через 5 лет Eclipse будет стандартом — не AI-замена.</a:t>
+              <a:t>AI как дополнение поверх, не как замена. Через 5 лет Eclipse будет стандартом — не AI-замена.</a:t>
             </a:r>
           </a:p>
         </p:txBody>
@@ -17106,9 +17106,9 @@
                 </a:solidFill>
                 <a:latin typeface="Arial"/>
               </a:rPr>
-              <a:t>Industry-standard reservoir simulator с 1983.
-Mature reservoirs + regulatory submissions.
-Coupled fluid + heat + chemistry equations.</a:t>
+              <a:t>Отраслевой стандарт симулятора пласта с 1983.
+Зрелые коллекторы + регуляторные отчёты.
+Связанные уравнения флюид + теплопередача + химия.</a:t>
             </a:r>
           </a:p>
         </p:txBody>
@@ -17278,9 +17278,9 @@
                 </a:solidFill>
                 <a:latin typeface="Arial"/>
               </a:rPr>
-              <a:t>Successor для massively parallel HPC.
-Large models, finer grids.
-Replaces Eclipse на топовых проектах.</a:t>
+              <a:t>Преемник для массивно-параллельных суперкомпьютеров.
+Крупные модели, более мелкая сетка.
+Заменяет Eclipse на топовых проектах.</a:t>
             </a:r>
           </a:p>
         </p:txBody>
@@ -17450,9 +17450,9 @@
                 </a:solidFill>
                 <a:latin typeface="Arial"/>
               </a:rPr>
-              <a:t>Computer Modelling Group (Calgary).
-IMEX black-oil, STARS thermal/EOR, GEM compositional.
-Leader в heavy oil + EOR niche.</a:t>
+              <a:t>Computer Modelling Group (Калгари).
+IMEX «чёрная нефть», STARS тепловые/МУН, GEM композиционный.
+Лидер в тяжёлой нефти + МУН (методы увеличения нефтеотдачи).</a:t>
             </a:r>
           </a:p>
         </p:txBody>
@@ -17622,9 +17622,9 @@
                 </a:solidFill>
                 <a:latin typeface="Arial"/>
               </a:rPr>
-              <a:t>Open-source CFD для NPV simulation,
-geomechanics, fracturing modeling.
-Research + reservoir characterization.</a:t>
+              <a:t>Открытый CFD для расчётов NPV,
+геомеханики, моделирования ГРП.
+Исследования + характеристика коллектора.</a:t>
             </a:r>
           </a:p>
         </p:txBody>
@@ -17711,7 +17711,7 @@
                 </a:solidFill>
                 <a:latin typeface="Arial"/>
               </a:rPr>
-              <a:t>Senior геофизик ($200–500k/год) + classical interpretation &gt; $5–20M foundation model в frontier. PINN = research-grade, не commercial. AI augmentation, не replacement.</a:t>
+              <a:t>Старший геофизик ($200–500 тыс./год) + классическая интерпретация &gt; $5–20 млн базовая модель на фронтире. PINN (нейросеть с встроенной физикой) — исследовательский уровень, не коммерческий. AI как дополнение, не замена.</a:t>
             </a:r>
           </a:p>
         </p:txBody>
@@ -17776,7 +17776,7 @@
                 </a:solidFill>
                 <a:latin typeface="Arial"/>
               </a:rPr>
-              <a:t>Methane MRV alphabet — 6 must-know терминов</a:t>
+              <a:t>Алфавит метановой MRV — 6 обязательных терминов</a:t>
             </a:r>
           </a:p>
         </p:txBody>
@@ -17815,7 +17815,7 @@
                 </a:solidFill>
                 <a:latin typeface="Arial"/>
               </a:rPr>
-              <a:t>Все встретятся в следующих 8 слайдах. Brand names — не глоссируем.</a:t>
+              <a:t>Все встретятся в следующих 8 слайдах. Названия брендов — не переводим.</a:t>
             </a:r>
           </a:p>
         </p:txBody>
@@ -17987,7 +17987,7 @@
               </a:rPr>
               <a:t>Monitoring / Reporting / Verification
 = выявление-учёт-проверка
-Mandatory под EU 2024/1787.</a:t>
+Обязательно под EU 2024/1787.</a:t>
             </a:r>
           </a:p>
         </p:txBody>
@@ -18159,7 +18159,7 @@
               </a:rPr>
               <a:t>Optical Gas Imaging
 = оптическая газовая визуализация
-IR-камера (FLIR GFx320, Opgal EyeCGas).</a:t>
+ИК-камера (FLIR GFx320, Opgal EyeCGas).</a:t>
             </a:r>
           </a:p>
         </p:txBody>
@@ -18330,7 +18330,7 @@
                 <a:latin typeface="Arial"/>
               </a:rPr>
               <a:t>Leak Detection And Repair
-= программа выявления и устранения
+= программа выявления и устранения утечек
 4×/год обходы с OGI + ремонт 5-15 дней.</a:t>
             </a:r>
           </a:p>
@@ -18501,8 +18501,8 @@
                 </a:solidFill>
                 <a:latin typeface="Arial"/>
               </a:rPr>
-              <a:t>UN Oil &amp; Gas Methane Partnership Level 2.0
-Level 5 — direct measurement.
+              <a:t>Oil &amp; Gas Methane Partnership 2.0 (UN)
+Уровень 5 — прямое измерение.
 170+ компаний подписали.</a:t>
             </a:r>
           </a:p>
@@ -18806,7 +18806,7 @@
                 </a:solidFill>
                 <a:latin typeface="Arial"/>
               </a:rPr>
-              <a:t>bopd / ESP</a:t>
+              <a:t>барр./день / ЭЦН</a:t>
             </a:r>
           </a:p>
         </p:txBody>
@@ -18845,9 +18845,9 @@
                 </a:solidFill>
                 <a:latin typeface="Arial"/>
               </a:rPr>
-              <a:t>Barrels of oil per day / Electric Submersible Pump
-= баррелей нефти/день / погружной электронасос
-Stripper wells &lt;10 bopd.</a:t>
+              <a:t>Баррелей нефти в день / Электроцентробежный насос
+(Electric Submersible Pump)
+Стрипперные скважины &lt;10 барр./день.</a:t>
             </a:r>
           </a:p>
         </p:txBody>
@@ -18934,7 +18934,7 @@
                 </a:solidFill>
                 <a:latin typeface="Arial"/>
               </a:rPr>
-              <a:t>Bonus: AI essential именно потому, что OGI + Picarro + LI-COR покрывают facility-level — atomic detection требует слияния 4 сенсоров.</a:t>
+              <a:t>Дополнительно: AI необходим именно потому, что OGI + Picarro + LI-COR покрывают уровень площадки — точечное выявление утечки требует слияния 4 сенсоров.</a:t>
             </a:r>
           </a:p>
         </p:txBody>
@@ -19043,7 +19043,7 @@
                 </a:solidFill>
                 <a:latin typeface="Arial"/>
               </a:rPr>
-              <a:t>1. Keystone</a:t>
+              <a:t>1. Стержень</a:t>
             </a:r>
           </a:p>
         </p:txBody>
@@ -19126,7 +19126,7 @@
                 </a:solidFill>
                 <a:latin typeface="Arial"/>
               </a:rPr>
-              <a:t>2. Q1 Mature</a:t>
+              <a:t>2. Q1 Зрелое</a:t>
             </a:r>
           </a:p>
         </p:txBody>
@@ -19209,7 +19209,7 @@
                 </a:solidFill>
                 <a:latin typeface="Arial"/>
               </a:rPr>
-              <a:t>3. Q3 Frontier</a:t>
+              <a:t>3. Q3 Разведка</a:t>
             </a:r>
           </a:p>
         </p:txBody>
@@ -19292,7 +19292,7 @@
                 </a:solidFill>
                 <a:latin typeface="Arial"/>
               </a:rPr>
-              <a:t>4. Q2 Methane</a:t>
+              <a:t>4. Q2 Метан</a:t>
             </a:r>
           </a:p>
         </p:txBody>
@@ -19375,7 +19375,7 @@
                 </a:solidFill>
                 <a:latin typeface="Arial"/>
               </a:rPr>
-              <a:t>5. Q4 Transition</a:t>
+              <a:t>5. Q4 Переход</a:t>
             </a:r>
           </a:p>
         </p:txBody>
@@ -19745,7 +19745,7 @@
                 </a:solidFill>
                 <a:latin typeface="Arial"/>
               </a:rPr>
-              <a:t>4 рабочих системы · 2 провала · регуляторное давление из EU 2024/1787</a:t>
+              <a:t>4 рабочих системы · 2 провала · регуляторное давление со стороны EU 2024/1787</a:t>
             </a:r>
           </a:p>
         </p:txBody>
@@ -19810,7 +19810,7 @@
                 </a:solidFill>
                 <a:latin typeface="Arial"/>
               </a:rPr>
-              <a:t>MethaneSAT (4 марта 2024) — flagship результат Permian</a:t>
+              <a:t>MethaneSAT (4 марта 2024) — ключевой результат по Permian</a:t>
             </a:r>
           </a:p>
         </p:txBody>
@@ -19849,7 +19849,7 @@
                 </a:solidFill>
                 <a:latin typeface="Arial"/>
               </a:rPr>
-              <a:t>Первый в истории спутник, владелец которого — экологическая некоммерческая организация. Бюджет $88M.</a:t>
+              <a:t>Первый в истории спутник, владелец которого — экологическая некоммерческая организация. Бюджет $88 млн.</a:t>
             </a:r>
           </a:p>
         </p:txBody>
@@ -20102,7 +20102,7 @@
                 </a:solidFill>
                 <a:latin typeface="Arial"/>
               </a:rPr>
-              <a:t>· Wide-area coverage — 200×200 км за один проход</a:t>
+              <a:t>· Широкий охват — 200×200 км за один проход</a:t>
             </a:r>
           </a:p>
           <a:p>
@@ -20166,7 +20166,7 @@
                 </a:solidFill>
                 <a:latin typeface="Arial"/>
               </a:rPr>
-              <a:t>Permian flagship результат:</a:t>
+              <a:t>Ключевой результат по Permian:</a:t>
             </a:r>
           </a:p>
           <a:p>
@@ -20198,7 +20198,7 @@
                 </a:solidFill>
                 <a:latin typeface="Arial"/>
               </a:rPr>
-              <a:t>метана = +50% над оценкой EPA</a:t>
+              <a:t>метана = +50% над оценкой EPA (~273 т/ч)</a:t>
             </a:r>
           </a:p>
           <a:p>
@@ -20230,7 +20230,7 @@
                 </a:solidFill>
                 <a:latin typeface="Arial"/>
               </a:rPr>
-              <a:t>· Нью-Мексико: 1,2% intensity</a:t>
+              <a:t>· Нью-Мексико: 1,2% интенсивности утечек</a:t>
             </a:r>
           </a:p>
           <a:p>
@@ -20246,7 +20246,7 @@
                 </a:solidFill>
                 <a:latin typeface="Arial"/>
               </a:rPr>
-              <a:t>· Техас: 3,1% intensity</a:t>
+              <a:t>· Техас: 3,1% интенсивности утечек</a:t>
             </a:r>
           </a:p>
           <a:p>
@@ -20262,7 +20262,7 @@
                 </a:solidFill>
                 <a:latin typeface="Arial"/>
               </a:rPr>
-              <a:t>· ~2 000 data files за 15,5 мес работы</a:t>
+              <a:t>· ~2 000 файлов данных за 15,5 мес работы</a:t>
             </a:r>
           </a:p>
         </p:txBody>
@@ -20349,7 +20349,7 @@
                 </a:solidFill>
                 <a:latin typeface="Arial"/>
               </a:rPr>
-              <a:t>+50% над EPA — это не «AI ошибается». Это AI измеряет, а EPA inventory считает по емission factors 30-летней давности.</a:t>
+              <a:t>+50% над EPA — это не «AI ошибается». Это AI измеряет, а EPA считает по коэффициентам эмиссий 30-летней давности.</a:t>
             </a:r>
           </a:p>
         </p:txBody>
@@ -20453,7 +20453,7 @@
                 </a:solidFill>
                 <a:latin typeface="Arial"/>
               </a:rPr>
-              <a:t>4 марта 2024 запуск → 20 июня 2025 «spacecraft anomaly». 26% от 5-летнего designed lifetime.</a:t>
+              <a:t>4 марта 2024 запуск → 20 июня 2025 «аномалия аппарата». 26% от расчётного 5-летнего срока.</a:t>
             </a:r>
           </a:p>
         </p:txBody>
@@ -20584,7 +20584,7 @@
                 </a:solidFill>
                 <a:latin typeface="Arial"/>
               </a:rPr>
-              <a:t>Timeline</a:t>
+              <a:t>Хронология</a:t>
             </a:r>
           </a:p>
         </p:txBody>
@@ -20703,7 +20703,7 @@
                 </a:solidFill>
                 <a:latin typeface="Arial"/>
               </a:rPr>
-              <a:t>~2 000 data files собрано</a:t>
+              <a:t>~2 000 файлов данных собрано</a:t>
             </a:r>
           </a:p>
           <a:p>
@@ -20751,7 +20751,7 @@
                 </a:solidFill>
                 <a:latin typeface="Arial"/>
               </a:rPr>
-              <a:t>«Spacecraft anomaly» — потеря связи</a:t>
+              <a:t>«Аномалия аппарата» — потеря связи</a:t>
             </a:r>
           </a:p>
           <a:p>
@@ -20783,7 +20783,7 @@
                 </a:solidFill>
                 <a:latin typeface="Arial"/>
               </a:rPr>
-              <a:t>15,5 / 60 мес designed</a:t>
+              <a:t>15,5 / 60 мес расчётных</a:t>
             </a:r>
           </a:p>
           <a:p>
@@ -20799,7 +20799,7 @@
                 </a:solidFill>
                 <a:latin typeface="Arial"/>
               </a:rPr>
-              <a:t>= 26% lifetime realized</a:t>
+              <a:t>= 26% реализованного срока</a:t>
             </a:r>
           </a:p>
           <a:p>
@@ -20831,7 +20831,7 @@
                 </a:solidFill>
                 <a:latin typeface="Arial"/>
               </a:rPr>
-              <a:t>$5,7M/мес realized vs $1,5M/мес планировалось</a:t>
+              <a:t>$5,7 млн/мес фактически vs $1,5 млн/мес планировалось</a:t>
             </a:r>
           </a:p>
         </p:txBody>
@@ -20962,7 +20962,7 @@
                 </a:solidFill>
                 <a:latin typeface="Arial"/>
               </a:rPr>
-              <a:t>4 урока loss</a:t>
+              <a:t>4 урока потери</a:t>
             </a:r>
           </a:p>
         </p:txBody>
@@ -21001,7 +21001,7 @@
                 </a:solidFill>
                 <a:latin typeface="Arial"/>
               </a:rPr>
-              <a:t>1. SPOF (single point of failure)</a:t>
+              <a:t>1. Единая точка отказа (SPOF)</a:t>
             </a:r>
           </a:p>
           <a:p>
@@ -21017,7 +21017,7 @@
                 </a:solidFill>
                 <a:latin typeface="Arial"/>
               </a:rPr>
-              <a:t>Single satellite = catastrophic loss vector. Constellation (GHGSat 13+) — robust.</a:t>
+              <a:t>Один спутник = катастрофический вектор потери. Группировка (GHGSat 13+) — устойчива.</a:t>
             </a:r>
           </a:p>
           <a:p>
@@ -21049,7 +21049,7 @@
                 </a:solidFill>
                 <a:latin typeface="Arial"/>
               </a:rPr>
-              <a:t>2. Hardware reliability</a:t>
+              <a:t>2. Надёжность аппаратуры</a:t>
             </a:r>
           </a:p>
           <a:p>
@@ -21065,7 +21065,7 @@
                 </a:solidFill>
                 <a:latin typeface="Arial"/>
               </a:rPr>
-              <a:t>Свободный космос ≠ контролируемая лаборатория. 26% lifetime — high risk.</a:t>
+              <a:t>Открытый космос ≠ контролируемая лаборатория. 26% срока — высокий риск.</a:t>
             </a:r>
           </a:p>
           <a:p>
@@ -21097,7 +21097,7 @@
                 </a:solidFill>
                 <a:latin typeface="Arial"/>
               </a:rPr>
-              <a:t>3. Regulator constraint</a:t>
+              <a:t>3. Регуляторное ограничение</a:t>
             </a:r>
           </a:p>
           <a:p>
@@ -21113,7 +21113,7 @@
                 </a:solidFill>
                 <a:latin typeface="Arial"/>
               </a:rPr>
-              <a:t>EU 2024/1787 inspector cannot rely on one source. Diversification mandatory.</a:t>
+              <a:t>Инспектор по EU 2024/1787 не может полагаться на один источник. Диверсификация обязательна.</a:t>
             </a:r>
           </a:p>
           <a:p>
@@ -21145,7 +21145,7 @@
                 </a:solidFill>
                 <a:latin typeface="Arial"/>
               </a:rPr>
-              <a:t>4. AI ≠ upstream data</a:t>
+              <a:t>4. AI ≠ верхний слой данных</a:t>
             </a:r>
           </a:p>
           <a:p>
@@ -21161,7 +21161,7 @@
                 </a:solidFill>
                 <a:latin typeface="Arial"/>
               </a:rPr>
-              <a:t>Software работает. Hardware failed. AI зависит от верхнего слоя.</a:t>
+              <a:t>Софт работает. Аппаратура отказала. AI зависит от верхнего слоя.</a:t>
             </a:r>
           </a:p>
         </p:txBody>
@@ -21248,7 +21248,7 @@
                 </a:solidFill>
                 <a:latin typeface="Arial"/>
               </a:rPr>
-              <a:t>Урок: regulatory infrastructure требует diversified sensor network, не single satellite. AI зависит от upstream hardware.</a:t>
+              <a:t>Урок: регуляторная инфраструктура требует диверсифицированной сенсорной сети, не одного спутника. AI зависит от аппаратуры на верхнем слое.</a:t>
             </a:r>
           </a:p>
         </p:txBody>
@@ -21313,7 +21313,7 @@
                 </a:solidFill>
                 <a:latin typeface="Arial"/>
               </a:rPr>
-              <a:t>Post-MethaneSAT: Carbon Mapper + GHGSat + Bridger + SeekOps</a:t>
+              <a:t>После MethaneSAT: Carbon Mapper + GHGSat + Bridger + SeekOps</a:t>
             </a:r>
           </a:p>
         </p:txBody>
@@ -21352,7 +21352,7 @@
                 </a:solidFill>
                 <a:latin typeface="Arial"/>
               </a:rPr>
-              <a:t>Диверсифицированный sensor network — то, чем должен был быть MethaneSAT. Несколько провайдеров после loss.</a:t>
+              <a:t>Диверсифицированная сенсорная сеть — то, чем должен был быть MethaneSAT. Несколько провайдеров после потери.</a:t>
             </a:r>
           </a:p>
         </p:txBody>
@@ -21523,9 +21523,9 @@
                 <a:latin typeface="Arial"/>
               </a:rPr>
               <a:t>Запуск 16 авг 2024.
-Planet Labs constellation.
-NASA JPL technology.
-Facility-level detection.</a:t>
+Группировка Planet Labs.
+Технология NASA JPL.
+Детекция на уровне площадки.</a:t>
             </a:r>
           </a:p>
         </p:txBody>
@@ -21656,7 +21656,7 @@
                 </a:solidFill>
                 <a:latin typeface="Arial"/>
               </a:rPr>
-              <a:t>GHGSat constellation</a:t>
+              <a:t>Группировка GHGSat</a:t>
             </a:r>
           </a:p>
         </p:txBody>
@@ -21695,10 +21695,10 @@
                 </a:solidFill>
                 <a:latin typeface="Arial"/>
               </a:rPr>
-              <a:t>13-satellite по середине 2025.
-25м разрешение.
-Facility-level focus.
-Commercial: ExxonMobil, ConocoPhillips, EOG.</a:t>
+              <a:t>13 спутников к середине 2025.
+Разрешение 25 м.
+Фокус на уровне площадки.
+Коммерческие: ExxonMobil, ConocoPhillips, EOG.</a:t>
             </a:r>
           </a:p>
         </p:txBody>
@@ -21829,7 +21829,7 @@
                 </a:solidFill>
                 <a:latin typeface="Arial"/>
               </a:rPr>
-              <a:t>Bridger Photonics aerial</a:t>
+              <a:t>Авиасъёмка Bridger Photonics</a:t>
             </a:r>
           </a:p>
         </p:txBody>
@@ -21868,10 +21868,10 @@
                 </a:solidFill>
                 <a:latin typeface="Arial"/>
               </a:rPr>
-              <a:t>Aerial LiDAR (gas mapping).
-4× точнее ground OGI.
-Close-range, slow scan.
-For LDAR программ.</a:t>
+              <a:t>Воздушный LiDAR (картирование газов).
+4× точнее наземной OGI.
+Ближняя дистанция, медленное сканирование.
+Для программ LDAR.</a:t>
             </a:r>
           </a:p>
         </p:txBody>
@@ -22041,9 +22041,9 @@
                 </a:solidFill>
                 <a:latin typeface="Arial"/>
               </a:rPr>
-              <a:t>SeekOps — UAV-mounted methane sensors.
-Project Canary — continuous monitoring sites.
-Certification (RSG, MiQ).</a:t>
+              <a:t>SeekOps — метановые сенсоры на БПЛА.
+Project Canary — непрерывный мониторинг площадок.
+Сертификация (RSG, MiQ).</a:t>
             </a:r>
           </a:p>
         </p:txBody>
@@ -22130,7 +22130,7 @@
                 </a:solidFill>
                 <a:latin typeface="Arial"/>
               </a:rPr>
-              <a:t>Lesson: один спутник — single point of failure. Диверсифицированный sensor network (satellite + aerial + ground) — robust. EU regulator требует именно этого.</a:t>
+              <a:t>Урок: один спутник — единая точка отказа. Диверсифицированная сенсорная сеть (спутник + авиа + наземная) — устойчива. Регулятор EU требует именно этого.</a:t>
             </a:r>
           </a:p>
         </p:txBody>
@@ -22195,7 +22195,7 @@
                 </a:solidFill>
                 <a:latin typeface="Arial"/>
               </a:rPr>
-              <a:t>4× разрыв industry vs регулятор — methodological gap</a:t>
+              <a:t>4× разрыв отрасль vs регулятор — методологический разрыв</a:t>
             </a:r>
           </a:p>
         </p:txBody>
@@ -22234,7 +22234,7 @@
                 </a:solidFill>
                 <a:latin typeface="Arial"/>
               </a:rPr>
-              <a:t>MethaneSAT measured ~15 Mt/год US O&amp;G. EPA Inventory ~4 Mt. Stanford 2024 aerial ~7 Mt = factor 2.</a:t>
+              <a:t>MethaneSAT измерил ~15 млн т/год по нефтегазу США. EPA Inventory ~4 млн т. Stanford 2024 авиа ~7 млн т = в 2 раза.</a:t>
             </a:r>
           </a:p>
         </p:txBody>
@@ -22303,8 +22303,8 @@
         </p:blipFill>
         <p:spPr>
           <a:xfrm>
-            <a:off x="640080" y="2042160"/>
-            <a:ext cx="5120640" cy="3413759"/>
+            <a:off x="640080" y="2148840"/>
+            <a:ext cx="5120640" cy="3200399"/>
           </a:xfrm>
           <a:prstGeom prst="rect">
             <a:avLst/>
@@ -22409,7 +22409,7 @@
                 </a:solidFill>
                 <a:latin typeface="Arial"/>
               </a:rPr>
-              <a:t>· EPA inventory: bottom-up подход, факторы 1990-х.</a:t>
+              <a:t>· EPA inventory: подход «снизу вверх», коэффициенты 1990-х.</a:t>
             </a:r>
           </a:p>
           <a:p>
@@ -22425,7 +22425,7 @@
                 </a:solidFill>
                 <a:latin typeface="Arial"/>
               </a:rPr>
-              <a:t>· Stanford aerial: top-down measurements, 2024.</a:t>
+              <a:t>· Stanford авиа: измерения «сверху вниз», 2024.</a:t>
             </a:r>
           </a:p>
           <a:p>
@@ -22441,7 +22441,7 @@
                 </a:solidFill>
                 <a:latin typeface="Arial"/>
               </a:rPr>
-              <a:t>· MethaneSAT: spaceborne, всё что меньше 500 кг/ч missed.</a:t>
+              <a:t>· MethaneSAT: космос, всё что меньше 500 кг/ч пропускается.</a:t>
             </a:r>
           </a:p>
           <a:p>
@@ -22473,7 +22473,7 @@
                 </a:solidFill>
                 <a:latin typeface="Arial"/>
               </a:rPr>
-              <a:t>9-satellite test 2024 (Atmospheric Measurement Techniques):</a:t>
+              <a:t>9-спутниковый тест 2024 (Atmospheric Measurement Techniques):</a:t>
             </a:r>
           </a:p>
           <a:p>
@@ -22489,7 +22489,7 @@
                 </a:solidFill>
                 <a:latin typeface="Arial"/>
               </a:rPr>
-              <a:t>· 58% emission points identified.</a:t>
+              <a:t>· 58% точек эмиссии идентифицировано.</a:t>
             </a:r>
           </a:p>
           <a:p>
@@ -22505,7 +22505,7 @@
                 </a:solidFill>
                 <a:latin typeface="Arial"/>
               </a:rPr>
-              <a:t>· 41% false negatives.</a:t>
+              <a:t>· 41% ложных пропусков.</a:t>
             </a:r>
           </a:p>
           <a:p>
@@ -22521,7 +22521,7 @@
                 </a:solidFill>
                 <a:latin typeface="Arial"/>
               </a:rPr>
-              <a:t>· AI не «ошибается» — sensors имеют структурные limit.</a:t>
+              <a:t>· AI не «ошибается» — сенсоры имеют структурные ограничения.</a:t>
             </a:r>
           </a:p>
           <a:p>
@@ -22553,7 +22553,7 @@
                 </a:solidFill>
                 <a:latin typeface="Arial"/>
               </a:rPr>
-              <a:t>Это не AI failure:</a:t>
+              <a:t>Это не провал AI:</a:t>
             </a:r>
           </a:p>
           <a:p>
@@ -22569,7 +22569,7 @@
                 </a:solidFill>
                 <a:latin typeface="Arial"/>
               </a:rPr>
-              <a:t>Это structural methodological gap. EPA modernization in progress.</a:t>
+              <a:t>Это структурный методологический разрыв. Модернизация EPA в процессе.</a:t>
             </a:r>
           </a:p>
         </p:txBody>
@@ -22656,7 +22656,7 @@
                 </a:solidFill>
                 <a:latin typeface="Arial"/>
               </a:rPr>
-              <a:t>Cross-source triangulation = единственный валидный подход. AI essential, но AI ≠ ground truth — он измеряет, факелы факелуют.</a:t>
+              <a:t>Триангуляция из нескольких источников — единственный валидный подход. AI необходим, но AI ≠ эталон — он измеряет, факелы факелуют.</a:t>
             </a:r>
           </a:p>
         </p:txBody>
@@ -22721,7 +22721,7 @@
                 </a:solidFill>
                 <a:latin typeface="Arial"/>
               </a:rPr>
-              <a:t>EU 2024/1787 vs EPA Subpart W — AI MRV рынок развивается асимметрично</a:t>
+              <a:t>EU 2024/1787 vs EPA Subpart W — рынок AI MRV развивается асимметрично</a:t>
             </a:r>
           </a:p>
         </p:txBody>
@@ -22760,7 +22760,7 @@
                 </a:solidFill>
                 <a:latin typeface="Arial"/>
               </a:rPr>
-              <a:t>EU operator рискует штрафом &gt; прибыли от добычи. US operator не торопится инвестировать.</a:t>
+              <a:t>Оператор в EU рискует штрафом &gt; прибыли от добычи. Оператор в США не торопится инвестировать.</a:t>
             </a:r>
           </a:p>
         </p:txBody>
@@ -22946,7 +22946,7 @@
                 </a:solidFill>
                 <a:latin typeface="Arial"/>
               </a:rPr>
-              <a:t>оборотного штрафа за non-compliance</a:t>
+              <a:t>оборотного штрафа за несоответствие</a:t>
             </a:r>
           </a:p>
           <a:p>
@@ -22978,7 +22978,7 @@
                 </a:solidFill>
                 <a:latin typeface="Arial"/>
               </a:rPr>
-              <a:t>Ключевые deadlines:</a:t>
+              <a:t>Ключевые сроки:</a:t>
             </a:r>
           </a:p>
           <a:p>
@@ -23010,7 +23010,7 @@
                 </a:solidFill>
                 <a:latin typeface="Arial"/>
               </a:rPr>
-              <a:t>· OGMP Level 4/5 reports — 5 авг 2025</a:t>
+              <a:t>· OGMP уровень 4/5 отчёты — 5 авг 2025</a:t>
             </a:r>
           </a:p>
           <a:p>
@@ -23026,7 +23026,7 @@
                 </a:solidFill>
                 <a:latin typeface="Arial"/>
               </a:rPr>
-              <a:t>· Imports compliance — с 2027</a:t>
+              <a:t>· Соответствие для импорта — с 2027</a:t>
             </a:r>
           </a:p>
           <a:p>
@@ -23058,7 +23058,7 @@
                 </a:solidFill>
                 <a:latin typeface="Arial"/>
               </a:rPr>
-              <a:t>Driver:</a:t>
+              <a:t>Драйвер:</a:t>
             </a:r>
           </a:p>
           <a:p>
@@ -23074,7 +23074,7 @@
                 </a:solidFill>
                 <a:latin typeface="Arial"/>
               </a:rPr>
-              <a:t>Shell, TotalEnergies — фронт enforcement.</a:t>
+              <a:t>Shell, TotalEnergies — на переднем крае выполнения.</a:t>
             </a:r>
           </a:p>
         </p:txBody>
@@ -23244,7 +23244,7 @@
                 </a:solidFill>
                 <a:latin typeface="Arial"/>
               </a:rPr>
-              <a:t>6 мая 2024 final → delay 2034 [VFY]</a:t>
+              <a:t>6 мая 2024 утверждён → отсрочка до 2034</a:t>
             </a:r>
           </a:p>
           <a:p>
@@ -23292,7 +23292,7 @@
                 </a:solidFill>
                 <a:latin typeface="Arial"/>
               </a:rPr>
-              <a:t>· Final rule утверждён 6 мая 2024</a:t>
+              <a:t>· Финальное правило утверждено 6 мая 2024</a:t>
             </a:r>
           </a:p>
           <a:p>
@@ -23308,7 +23308,7 @@
                 </a:solidFill>
                 <a:latin typeface="Arial"/>
               </a:rPr>
-              <a:t>· Trump administration пересмотр сентябрь 2025</a:t>
+              <a:t>· Администрация Трампа — пересмотр сент. 2025</a:t>
             </a:r>
           </a:p>
           <a:p>
@@ -23324,7 +23324,7 @@
                 </a:solidFill>
                 <a:latin typeface="Arial"/>
               </a:rPr>
-              <a:t>· Proposed delay до 2034 для имплементации</a:t>
+              <a:t>· Предлагается отсрочка до 2034 для внедрения</a:t>
             </a:r>
           </a:p>
           <a:p>
@@ -23372,7 +23372,7 @@
                 </a:solidFill>
                 <a:latin typeface="Arial"/>
               </a:rPr>
-              <a:t>· US AI MRV рынок ~$200M (2024)</a:t>
+              <a:t>· Рынок AI MRV США ~$200 млн (2024)</a:t>
             </a:r>
           </a:p>
           <a:p>
@@ -23388,7 +23388,7 @@
                 </a:solidFill>
                 <a:latin typeface="Arial"/>
               </a:rPr>
-              <a:t>· vs EU ~$500M+ к 2026 (estimate)</a:t>
+              <a:t>· vs EU ~$500 млн+ к 2026 (оценка)</a:t>
             </a:r>
           </a:p>
         </p:txBody>
@@ -23475,7 +23475,7 @@
                 </a:solidFill>
                 <a:latin typeface="Arial"/>
               </a:rPr>
-              <a:t>Регуляторика — главный driver Q2. EU жёстко → AI essential. US wait-and-see → AI рынок развивается медленнее.</a:t>
+              <a:t>Регуляторика — главный драйвер Q2. EU жёстко → AI необходим. США в режиме ожидания → рынок AI развивается медленнее.</a:t>
             </a:r>
           </a:p>
         </p:txBody>
@@ -23540,7 +23540,7 @@
                 </a:solidFill>
                 <a:latin typeface="Arial"/>
               </a:rPr>
-              <a:t>Альтернатива Q2: ground OGI + portable analyzers</a:t>
+              <a:t>Альтернатива Q2: наземная OGI + переносные анализаторы</a:t>
             </a:r>
           </a:p>
         </p:txBody>
@@ -23579,7 +23579,7 @@
                 </a:solidFill>
                 <a:latin typeface="Arial"/>
               </a:rPr>
-              <a:t>Когда AI не нужен — OGMP Level 5 (прямое измерение) + custody transfer metering.</a:t>
+              <a:t>Когда AI не нужен — OGMP уровень 5 (прямое измерение) + коммерческий учёт нефти.</a:t>
             </a:r>
           </a:p>
         </p:txBody>
@@ -23749,9 +23749,9 @@
                 </a:solidFill>
                 <a:latin typeface="Arial"/>
               </a:rPr>
-              <a:t>Hand-held OGI cameras.
-IR imaging углеводородов.
-2-3 inspection events/site/год.</a:t>
+              <a:t>Ручные OGI-камеры.
+ИК-визуализация углеводородов.
+2-3 обхода объекта в год.</a:t>
             </a:r>
           </a:p>
         </p:txBody>
@@ -23921,9 +23921,9 @@
                 </a:solidFill>
                 <a:latin typeface="Arial"/>
               </a:rPr>
-              <a:t>Portable cavity ring-down spectroscopy.
-Direct measurement, ppb-уровень.
-For OGMP Level 5 verification.</a:t>
+              <a:t>Переносная спектроскопия затухания в полости.
+Прямое измерение, уровень частей на млрд (ppb).
+Для верификации OGMP уровень 5.</a:t>
             </a:r>
           </a:p>
         </p:txBody>
@@ -24093,9 +24093,9 @@
                 </a:solidFill>
                 <a:latin typeface="Arial"/>
               </a:rPr>
-              <a:t>Fixed-position OGI + analytics.
-Continuous facility-level.
-Replaces AI screening на крупных hub.</a:t>
+              <a:t>Стационарная OGI + аналитика.
+Непрерывный мониторинг площадки.
+Заменяет AI-скрининг на крупных узлах.</a:t>
             </a:r>
           </a:p>
         </p:txBody>
@@ -24265,9 +24265,9 @@
                 </a:solidFill>
                 <a:latin typeface="Arial"/>
               </a:rPr>
-              <a:t>Detector + sniffer for всех valves, flanges.
+              <a:t>Детектор + газоанализатор для всех клапанов, фланцев.
 4×/год обходы.
-Mandatory под регуляцией.</a:t>
+Обязательно по регуляции.</a:t>
             </a:r>
           </a:p>
         </p:txBody>
@@ -24354,7 +24354,7 @@
                 </a:solidFill>
                 <a:latin typeface="Arial"/>
               </a:rPr>
-              <a:t>2 criteria когда AI не нужен в Q2: (1) OGMP Level 5 direct measurement compliance — regulator требует точность, не estimate; (2) custody transfer metering — mass flow meter mandatory, не AI.</a:t>
+              <a:t>2 критерия когда AI не нужен в Q2: (1) соответствие OGMP уровень 5 — регулятор требует точность, не оценку; (2) коммерческий учёт нефти — расходомер обязателен, не AI.</a:t>
             </a:r>
           </a:p>
         </p:txBody>
@@ -24463,7 +24463,7 @@
                 </a:solidFill>
                 <a:latin typeface="Arial"/>
               </a:rPr>
-              <a:t>1. Keystone</a:t>
+              <a:t>1. Стержень</a:t>
             </a:r>
           </a:p>
         </p:txBody>
@@ -24546,7 +24546,7 @@
                 </a:solidFill>
                 <a:latin typeface="Arial"/>
               </a:rPr>
-              <a:t>2. Q1 Mature</a:t>
+              <a:t>2. Q1 Зрелое</a:t>
             </a:r>
           </a:p>
         </p:txBody>
@@ -24629,7 +24629,7 @@
                 </a:solidFill>
                 <a:latin typeface="Arial"/>
               </a:rPr>
-              <a:t>3. Q3 Frontier</a:t>
+              <a:t>3. Q3 Разведка</a:t>
             </a:r>
           </a:p>
         </p:txBody>
@@ -24712,7 +24712,7 @@
                 </a:solidFill>
                 <a:latin typeface="Arial"/>
               </a:rPr>
-              <a:t>4. Q2 Methane</a:t>
+              <a:t>4. Q2 Метан</a:t>
             </a:r>
           </a:p>
         </p:txBody>
@@ -24795,7 +24795,7 @@
                 </a:solidFill>
                 <a:latin typeface="Arial"/>
               </a:rPr>
-              <a:t>5. Q4 Transition</a:t>
+              <a:t>5. Q4 Переход</a:t>
             </a:r>
           </a:p>
         </p:txBody>
@@ -25078,7 +25078,7 @@
                 </a:solidFill>
                 <a:latin typeface="Arial"/>
               </a:rPr>
-              <a:t>Здесь AI и физика буксуют вместе. Long-horizon, low-data, low-physics-certainty. Самый честный квадрант.</a:t>
+              <a:t>Здесь AI и физика буксуют вместе. Длинный горизонт, мало данных, низкая определённость физики. Самый честный квадрант.</a:t>
             </a:r>
           </a:p>
         </p:txBody>
@@ -25947,7 +25947,7 @@
                 </a:solidFill>
                 <a:latin typeface="Arial"/>
               </a:rPr>
-              <a:t>Northern Lights CCS — 0,02% от needed scale</a:t>
+              <a:t>Northern Lights CCS — 0,02% от необходимого масштаба</a:t>
             </a:r>
           </a:p>
         </p:txBody>
@@ -25986,7 +25986,7 @@
                 </a:solidFill>
                 <a:latin typeface="Arial"/>
               </a:rPr>
-              <a:t>JV Equinor + Shell + TotalEnergies. Commercial launch 2024. Эугарден, Норвегия.</a:t>
+              <a:t>СП Equinor + Shell + TotalEnergies. Коммерческий запуск 2024. Эугарден, Норвегия.</a:t>
             </a:r>
           </a:p>
         </p:txBody>
@@ -26041,7 +26041,7 @@
       </p:sp>
       <p:pic>
         <p:nvPicPr>
-          <p:cNvPr id="5" name="Picture 4" descr="s29-nl.png"/>
+          <p:cNvPr id="5" name="Picture 4" descr="s29-nl.jpg"/>
           <p:cNvPicPr>
             <a:picLocks noChangeAspect="1"/>
           </p:cNvPicPr>
@@ -26055,8 +26055,8 @@
         </p:blipFill>
         <p:spPr>
           <a:xfrm>
-            <a:off x="1371600" y="1828800"/>
-            <a:ext cx="3657600" cy="3657600"/>
+            <a:off x="762000" y="1828800"/>
+            <a:ext cx="4876800" cy="3657600"/>
           </a:xfrm>
           <a:prstGeom prst="rect">
             <a:avLst/>
@@ -26097,7 +26097,7 @@
                 </a:solidFill>
                 <a:latin typeface="Arial"/>
               </a:rPr>
-              <a:t>Northern Lights JV · 2024</a:t>
+              <a:t>Wikimedia Commons / Zypres · CC-BY-SA 4.0</a:t>
             </a:r>
           </a:p>
         </p:txBody>
@@ -26200,7 +26200,7 @@
                 </a:solidFill>
                 <a:latin typeface="Arial"/>
               </a:rPr>
-              <a:t>· Phase 1 capacity: 1,5 Mt CO₂/год</a:t>
+              <a:t>· Мощность фазы 1: 1,5 млн т CO₂/год</a:t>
             </a:r>
           </a:p>
           <a:p>
@@ -26216,7 +26216,7 @@
                 </a:solidFill>
                 <a:latin typeface="Arial"/>
               </a:rPr>
-              <a:t>· Operational с 2024</a:t>
+              <a:t>· В эксплуатации с 2024</a:t>
             </a:r>
           </a:p>
           <a:p>
@@ -26232,7 +26232,7 @@
                 </a:solidFill>
                 <a:latin typeface="Arial"/>
               </a:rPr>
-              <a:t>· CO₂ источники: Microsoft, Heidelberg Materials, Yara</a:t>
+              <a:t>· Источники CO₂: Microsoft, Heidelberg Materials, Yara</a:t>
             </a:r>
           </a:p>
           <a:p>
@@ -26264,7 +26264,7 @@
                 </a:solidFill>
                 <a:latin typeface="Arial"/>
               </a:rPr>
-              <a:t>Сравнение со scale:</a:t>
+              <a:t>Сравнение с масштабом:</a:t>
             </a:r>
           </a:p>
           <a:p>
@@ -26280,7 +26280,7 @@
                 </a:solidFill>
                 <a:latin typeface="Arial"/>
               </a:rPr>
-              <a:t>1,5 Mt/год</a:t>
+              <a:t>1,5 млн т/год</a:t>
             </a:r>
           </a:p>
           <a:p>
@@ -26312,7 +26312,7 @@
                 </a:solidFill>
                 <a:latin typeface="Arial"/>
               </a:rPr>
-              <a:t>7 600 Mt/год (IEA target 2050)</a:t>
+              <a:t>7 600 млн т/год (цель IEA на 2050)</a:t>
             </a:r>
           </a:p>
           <a:p>
@@ -26344,7 +26344,7 @@
                 </a:solidFill>
                 <a:latin typeface="Arial"/>
               </a:rPr>
-              <a:t>= 0,02% от needed scale</a:t>
+              <a:t>= 0,02% от необходимого масштаба</a:t>
             </a:r>
           </a:p>
           <a:p>
@@ -26360,7 +26360,7 @@
                 </a:solidFill>
                 <a:latin typeface="Arial"/>
               </a:rPr>
-              <a:t>= 190× scale-up gap к 2050</a:t>
+              <a:t>= 190× разрыв масштабирования к 2050</a:t>
             </a:r>
           </a:p>
         </p:txBody>
@@ -26447,7 +26447,7 @@
                 </a:solidFill>
                 <a:latin typeface="Arial"/>
               </a:rPr>
-              <a:t>AI helps per-unit cost (subsurface modeling, leak detection). AI НЕ масштабирует индустрию — нужно 5000+ Northern Lights к 2050.</a:t>
+              <a:t>AI снижает удельную стоимость (моделирование пласта, выявление утечек). AI НЕ масштабирует индустрию — нужно 5000+ Northern Lights к 2050.</a:t>
             </a:r>
           </a:p>
         </p:txBody>
@@ -26512,7 +26512,7 @@
                 </a:solidFill>
                 <a:latin typeface="Arial"/>
               </a:rPr>
-              <a:t>Fervo Energy EGS — IPO 12 мая 2026, 40× growth ceiling</a:t>
+              <a:t>Fervo Energy EGS — IPO 12 мая 2026, потолок роста в 40 раз</a:t>
             </a:r>
           </a:p>
         </p:txBody>
@@ -26551,7 +26551,7 @@
                 </a:solidFill>
                 <a:latin typeface="Arial"/>
               </a:rPr>
-              <a:t>Только renewable baseload, доступный при сегодняшних технологиях. Driver: AI workloads потребляют 24/7 stable power.</a:t>
+              <a:t>Единственная возобновляемая базовая мощность, доступная при сегодняшних технологиях. Драйвер: AI-нагрузки требуют стабильное питание 24/7.</a:t>
             </a:r>
           </a:p>
         </p:txBody>
@@ -26837,7 +26837,7 @@
                 </a:solidFill>
                 <a:latin typeface="Arial"/>
               </a:rPr>
-              <a:t>Cape Station Utah ($206M):</a:t>
+              <a:t>Cape Station Юта ($206 млн):</a:t>
             </a:r>
           </a:p>
           <a:p>
@@ -26853,7 +26853,7 @@
                 </a:solidFill>
                 <a:latin typeface="Arial"/>
               </a:rPr>
-              <a:t>· Pilot 2024 → commercial 2026</a:t>
+              <a:t>· Пилот 2024 → коммерческий 2026</a:t>
             </a:r>
           </a:p>
           <a:p>
@@ -26869,7 +26869,7 @@
                 </a:solidFill>
                 <a:latin typeface="Arial"/>
               </a:rPr>
-              <a:t>· Distributed temperature sensing</a:t>
+              <a:t>· Распределённое измерение температуры</a:t>
             </a:r>
           </a:p>
           <a:p>
@@ -26885,7 +26885,7 @@
                 </a:solidFill>
                 <a:latin typeface="Arial"/>
               </a:rPr>
-              <a:t>· Hydraulic fracking → закрытый цикл</a:t>
+              <a:t>· ГРП → замкнутый цикл</a:t>
             </a:r>
           </a:p>
           <a:p>
@@ -26917,7 +26917,7 @@
                 </a:solidFill>
                 <a:latin typeface="Arial"/>
               </a:rPr>
-              <a:t>Driver:</a:t>
+              <a:t>Драйвер:</a:t>
             </a:r>
           </a:p>
           <a:p>
@@ -26933,7 +26933,7 @@
                 </a:solidFill>
                 <a:latin typeface="Arial"/>
               </a:rPr>
-              <a:t>· Google, Microsoft, Meta — PPA buyers</a:t>
+              <a:t>· Google, Microsoft, Meta — покупатели PPA</a:t>
             </a:r>
           </a:p>
           <a:p>
@@ -26949,7 +26949,7 @@
                 </a:solidFill>
                 <a:latin typeface="Arial"/>
               </a:rPr>
-              <a:t>· AI data centers → 24/7 clean baseload</a:t>
+              <a:t>· AI ЦОДы → 24/7 чистая базовая мощность</a:t>
             </a:r>
           </a:p>
           <a:p>
@@ -26965,7 +26965,7 @@
                 </a:solidFill>
                 <a:latin typeface="Arial"/>
               </a:rPr>
-              <a:t>· US EGS potential 150 GW vs current 3,7 GW</a:t>
+              <a:t>· Потенциал EGS в США 150 ГВт vs текущие 3,7 ГВт</a:t>
             </a:r>
           </a:p>
         </p:txBody>
@@ -27052,7 +27052,7 @@
                 </a:solidFill>
                 <a:latin typeface="Arial"/>
               </a:rPr>
-              <a:t>Closed-loop: AI tech tycoons спонсируют EGS чтобы запитать AI data centers. Self-referential AI infrastructure expansion cycle.</a:t>
+              <a:t>Замкнутый цикл: AI-гиганты спонсируют EGS чтобы запитать AI ЦОДы. Самореферентное расширение AI-инфраструктуры.</a:t>
             </a:r>
           </a:p>
         </p:txBody>
@@ -27117,7 +27117,7 @@
                 </a:solidFill>
                 <a:latin typeface="Arial"/>
               </a:rPr>
-              <a:t>CCS 190× scale-up gap — engineering reality vs policy</a:t>
+              <a:t>CCS — 190× разрыв масштабирования: инженерия vs политика</a:t>
             </a:r>
           </a:p>
         </p:txBody>
@@ -27156,7 +27156,7 @@
                 </a:solidFill>
                 <a:latin typeface="Arial"/>
               </a:rPr>
-              <a:t>AI helps per-unit cost. AI не масштабирует индустрию. AI на 100-летнем horizon — hallucinate easy.</a:t>
+              <a:t>AI снижает удельную стоимость. AI не масштабирует индустрию. На 100-летнем горизонте AI легко галлюцинирует.</a:t>
             </a:r>
           </a:p>
         </p:txBody>
@@ -27225,8 +27225,8 @@
         </p:blipFill>
         <p:spPr>
           <a:xfrm>
-            <a:off x="640080" y="2042160"/>
-            <a:ext cx="5120640" cy="3413759"/>
+            <a:off x="640080" y="2148840"/>
+            <a:ext cx="5120640" cy="3200399"/>
           </a:xfrm>
           <a:prstGeom prst="rect">
             <a:avLst/>
@@ -27315,7 +27315,7 @@
                 </a:solidFill>
                 <a:latin typeface="Arial"/>
               </a:rPr>
-              <a:t>Что AI hallucinates на 100-летнем horizon:</a:t>
+              <a:t>Где AI галлюцинирует на 100-летнем горизонте:</a:t>
             </a:r>
           </a:p>
           <a:p>
@@ -27331,7 +27331,7 @@
                 </a:solidFill>
                 <a:latin typeface="Arial"/>
               </a:rPr>
-              <a:t>· Plume migration CO₂ через 50-100 лет</a:t>
+              <a:t>· Миграция шлейфа CO₂ через 50-100 лет</a:t>
             </a:r>
           </a:p>
           <a:p>
@@ -27347,7 +27347,7 @@
                 </a:solidFill>
                 <a:latin typeface="Arial"/>
               </a:rPr>
-              <a:t>· Multi-phase flow в неизвестных формациях</a:t>
+              <a:t>· Многофазный поток в неизвестных формациях</a:t>
             </a:r>
           </a:p>
           <a:p>
@@ -27363,7 +27363,7 @@
                 </a:solidFill>
                 <a:latin typeface="Arial"/>
               </a:rPr>
-              <a:t>· Caprock integrity — out-of-distribution scenarios</a:t>
+              <a:t>· Целостность покрышки — сценарии вне обучения</a:t>
             </a:r>
           </a:p>
           <a:p>
@@ -27395,7 +27395,7 @@
                 </a:solidFill>
                 <a:latin typeface="Arial"/>
               </a:rPr>
-              <a:t>Gartner 2027 prediction:</a:t>
+              <a:t>Прогноз Gartner на 2027:</a:t>
             </a:r>
           </a:p>
           <a:p>
@@ -27427,7 +27427,7 @@
                 </a:solidFill>
                 <a:latin typeface="Arial"/>
               </a:rPr>
-              <a:t>agentic AI проектов будут отменены к 2027</a:t>
+              <a:t>агентских AI-проектов будут отменены к 2027</a:t>
             </a:r>
           </a:p>
           <a:p>
@@ -27459,7 +27459,7 @@
                 </a:solidFill>
                 <a:latin typeface="Arial"/>
               </a:rPr>
-              <a:t>Sleipner Norway 1996:</a:t>
+              <a:t>Sleipner Норвегия, 1996:</a:t>
             </a:r>
           </a:p>
           <a:p>
@@ -27475,7 +27475,7 @@
                 </a:solidFill>
                 <a:latin typeface="Arial"/>
               </a:rPr>
-              <a:t>· Oldest CCS, $1B+ инвестиций</a:t>
+              <a:t>· Старейший CCS, $1 млрд+ инвестиций</a:t>
             </a:r>
           </a:p>
           <a:p>
@@ -27491,7 +27491,7 @@
                 </a:solidFill>
                 <a:latin typeface="Arial"/>
               </a:rPr>
-              <a:t>· 30 лет данных — empirical baseline</a:t>
+              <a:t>· 30 лет данных — эмпирическая база</a:t>
             </a:r>
           </a:p>
           <a:p>
@@ -27507,7 +27507,7 @@
                 </a:solidFill>
                 <a:latin typeface="Arial"/>
               </a:rPr>
-              <a:t>· AI augmentation — да; AI prediction 100 лет — нет.</a:t>
+              <a:t>· AI как дополнение — да; AI-прогноз на 100 лет — нет.</a:t>
             </a:r>
           </a:p>
         </p:txBody>
@@ -27594,7 +27594,7 @@
                 </a:solidFill>
                 <a:latin typeface="Arial"/>
               </a:rPr>
-              <a:t>Inverse atmospheric problem на 100-летнем horizon = AI hallucination easy. Physics-informed neural networks (PINN) — research-grade, не commercial.</a:t>
+              <a:t>Обратная атмосферная задача на 100-летнем горизонте = AI легко галлюцинирует. PINN (нейросети с встроенной физикой) — исследовательский уровень, не коммерческий.</a:t>
             </a:r>
           </a:p>
         </p:txBody>
@@ -27659,7 +27659,7 @@
                 </a:solidFill>
                 <a:latin typeface="Arial"/>
               </a:rPr>
-              <a:t>Refinery plant-wide stagnation = Q4 структурная проблема</a:t>
+              <a:t>Общезаводская стагнация НПЗ = структурная проблема Q4</a:t>
             </a:r>
           </a:p>
         </p:txBody>
@@ -27698,7 +27698,7 @@
                 </a:solidFill>
                 <a:latin typeface="Arial"/>
               </a:rPr>
-              <a:t>Multi-physics (mass + energy + reaction + corrosion) ломает ML-суррогаты на edge cases.</a:t>
+              <a:t>Многослойная физика (масса + энергия + реакция + коррозия) ломает ML-суррогаты на нестандартных режимах.</a:t>
             </a:r>
           </a:p>
         </p:txBody>
@@ -27896,7 +27896,7 @@
                 </a:solidFill>
                 <a:latin typeface="Arial"/>
               </a:rPr>
-              <a:t>Yokogawa Idemitsu case:</a:t>
+              <a:t>Кейс Yokogawa Idemitsu:</a:t>
             </a:r>
           </a:p>
           <a:p>
@@ -27912,7 +27912,7 @@
                 </a:solidFill>
                 <a:latin typeface="Arial"/>
               </a:rPr>
-              <a:t>· 2018+: single-column distillation pilot — success</a:t>
+              <a:t>· 2018+: пилот на одной колонне дистилляции — успех</a:t>
             </a:r>
           </a:p>
           <a:p>
@@ -27928,7 +27928,7 @@
                 </a:solidFill>
                 <a:latin typeface="Arial"/>
               </a:rPr>
-              <a:t>· Plant-wide пилот → тихо закрыт [VFY-day-of]</a:t>
+              <a:t>· Общезаводской пилот → тихо закрыт</a:t>
             </a:r>
           </a:p>
           <a:p>
@@ -27976,7 +27976,7 @@
                 </a:solidFill>
                 <a:latin typeface="Arial"/>
               </a:rPr>
-              <a:t>· 100+ units в типичном НПЗ</a:t>
+              <a:t>· 100+ установок в типичном НПЗ</a:t>
             </a:r>
           </a:p>
           <a:p>
@@ -27992,7 +27992,7 @@
                 </a:solidFill>
                 <a:latin typeface="Arial"/>
               </a:rPr>
-              <a:t>· Mass + energy + reaction + corrosion = 4 physics</a:t>
+              <a:t>· Масса + энергия + реакция + коррозия = 4 физики</a:t>
             </a:r>
           </a:p>
           <a:p>
@@ -28008,7 +28008,7 @@
                 </a:solidFill>
                 <a:latin typeface="Arial"/>
               </a:rPr>
-              <a:t>· ML суррогат breaks на feedstock shift, season swing</a:t>
+              <a:t>· ML-суррогат ломается при смене сырья, сезонных колебаниях</a:t>
             </a:r>
           </a:p>
           <a:p>
@@ -28040,7 +28040,7 @@
                 </a:solidFill>
                 <a:latin typeface="Arial"/>
               </a:rPr>
-              <a:t>Field life vs ML decay:</a:t>
+              <a:t>Срок жизни vs деградация ML:</a:t>
             </a:r>
           </a:p>
           <a:p>
@@ -28056,7 +28056,7 @@
                 </a:solidFill>
                 <a:latin typeface="Arial"/>
               </a:rPr>
-              <a:t>40-50 лет field life</a:t>
+              <a:t>40-50 лет жизни месторождения</a:t>
             </a:r>
           </a:p>
           <a:p>
@@ -28072,7 +28072,7 @@
                 </a:solidFill>
                 <a:latin typeface="Arial"/>
               </a:rPr>
-              <a:t>vs 1-2 года ML model decay</a:t>
+              <a:t>vs 1-2 года деградации ML-модели</a:t>
             </a:r>
           </a:p>
           <a:p>
@@ -28088,7 +28088,7 @@
                 </a:solidFill>
                 <a:latin typeface="Arial"/>
               </a:rPr>
-              <a:t>Retraining cost &gt; benefit на edge cases.</a:t>
+              <a:t>Стоимость переобучения &gt; выгода на нестандартных режимах.</a:t>
             </a:r>
           </a:p>
         </p:txBody>
@@ -28175,7 +28175,7 @@
                 </a:solidFill>
                 <a:latin typeface="Arial"/>
               </a:rPr>
-              <a:t>Это не Q1 failure — это Q4-структурный. Multi-physics + long horizon + frequent retraining = ML-суррогат не выживает.</a:t>
+              <a:t>Это не провал Q1 — это структурный Q4. Многослойная физика + длинный горизонт + частое переобучение = ML-суррогат не выживает.</a:t>
             </a:r>
           </a:p>
         </p:txBody>
@@ -28240,7 +28240,7 @@
                 </a:solidFill>
                 <a:latin typeface="Arial"/>
               </a:rPr>
-              <a:t>Альтернатива Q4: classical engineering + deterministic safety</a:t>
+              <a:t>Альтернатива Q4: классическая инженерия + детерминированная безопасность</a:t>
             </a:r>
           </a:p>
         </p:txBody>
@@ -28279,7 +28279,7 @@
                 </a:solidFill>
                 <a:latin typeface="Arial"/>
               </a:rPr>
-              <a:t>3 категории. Для regulatory submissions — physics-traceable mandatory. AI не accept.</a:t>
+              <a:t>3 категории. Для регуляторных отчётов — физически прослеживаемое обязательно. AI не принимается.</a:t>
             </a:r>
           </a:p>
         </p:txBody>
@@ -28410,7 +28410,7 @@
                 </a:solidFill>
                 <a:latin typeface="Arial"/>
               </a:rPr>
-              <a:t>Physics для CCS / геомеханики</a:t>
+              <a:t>Физика для CCS / геомеханики</a:t>
             </a:r>
           </a:p>
         </p:txBody>
@@ -28451,7 +28451,7 @@
               </a:rPr>
               <a:t>Eclipse / INTERSECT / CMG GEM /
 Visage / Abaqus / Plaxis.
-Plume migration 100 лет — physics-based mandatory.</a:t>
+Миграция шлейфа 100 лет — физическое моделирование обязательно.</a:t>
             </a:r>
           </a:p>
         </p:txBody>
@@ -28582,7 +28582,8 @@
                 </a:solidFill>
                 <a:latin typeface="Arial"/>
               </a:rPr>
-              <a:t>Classical APC для refinery</a:t>
+              <a:t>Классический APC для НПЗ
+(Advanced Process Control)</a:t>
             </a:r>
           </a:p>
         </p:txBody>
@@ -28623,7 +28624,7 @@
               </a:rPr>
               <a:t>Honeywell Profit Controller /
 Emerson DeltaV / AspenTech aspenONE.
-MPC + RTO — proven 30 лет, не AI.</a:t>
+MPC + RTO — проверены 30 лет, не AI.</a:t>
             </a:r>
           </a:p>
         </p:txBody>
@@ -28754,7 +28755,7 @@
                 </a:solidFill>
                 <a:latin typeface="Arial"/>
               </a:rPr>
-              <a:t>SIS для safety-critical</a:t>
+              <a:t>SIS для критичной безопасности</a:t>
             </a:r>
           </a:p>
         </p:txBody>
@@ -28794,9 +28795,9 @@
                 <a:latin typeface="Arial"/>
               </a:rPr>
               <a:t>SIL3/SIL4 по IEC 61511.
-3oo2 voting + periodic proof tests.
+Голосование 3oo2 (три из двух) + периодические проверки.
 ML НЕ сертифицируется.
-Deepwater Horizon 2010 — alarm bypass anchor.</a:t>
+Deepwater Horizon 2010 — обход тревог как якорь.</a:t>
             </a:r>
           </a:p>
         </p:txBody>
@@ -28883,7 +28884,7 @@
                 </a:solidFill>
                 <a:latin typeface="Arial"/>
               </a:rPr>
-              <a:t>SIL3 = 0,001–0,0001 PFD (probability of failure on demand). ML модель не воспроизводимо проверяемая под IEC 61511. Engineering rule.</a:t>
+              <a:t>SIL3 = 0,001–0,0001 PFD (вероятность отказа по требованию). ML-модель не проверяема воспроизводимо под IEC 61511. Инженерное правило.</a:t>
             </a:r>
           </a:p>
         </p:txBody>
@@ -28992,7 +28993,7 @@
                 </a:solidFill>
                 <a:latin typeface="Arial"/>
               </a:rPr>
-              <a:t>1. Keystone</a:t>
+              <a:t>1. Стержень</a:t>
             </a:r>
           </a:p>
         </p:txBody>
@@ -29075,7 +29076,7 @@
                 </a:solidFill>
                 <a:latin typeface="Arial"/>
               </a:rPr>
-              <a:t>2. Q1 Mature</a:t>
+              <a:t>2. Q1 Зрелое</a:t>
             </a:r>
           </a:p>
         </p:txBody>
@@ -29158,7 +29159,7 @@
                 </a:solidFill>
                 <a:latin typeface="Arial"/>
               </a:rPr>
-              <a:t>3. Q3 Frontier</a:t>
+              <a:t>3. Q3 Разведка</a:t>
             </a:r>
           </a:p>
         </p:txBody>
@@ -29241,7 +29242,7 @@
                 </a:solidFill>
                 <a:latin typeface="Arial"/>
               </a:rPr>
-              <a:t>4. Q2 Methane</a:t>
+              <a:t>4. Q2 Метан</a:t>
             </a:r>
           </a:p>
         </p:txBody>
@@ -29324,7 +29325,7 @@
                 </a:solidFill>
                 <a:latin typeface="Arial"/>
               </a:rPr>
-              <a:t>5. Q4 Transition</a:t>
+              <a:t>5. Q4 Переход</a:t>
             </a:r>
           </a:p>
         </p:txBody>
@@ -29529,7 +29530,7 @@
                 </a:solidFill>
                 <a:latin typeface="Arial"/>
               </a:rPr>
-              <a:t>Россия — sanctions, insourcing, vertical integration</a:t>
+              <a:t>Россия — санкции, внутренняя разработка, вертикальная интеграция</a:t>
             </a:r>
           </a:p>
         </p:txBody>
@@ -29568,7 +29569,7 @@
                 </a:solidFill>
                 <a:latin typeface="Arial"/>
               </a:rPr>
-              <a:t>По 4 квадрантам keystone-матрицы. После марта 2022 — структурный shift.</a:t>
+              <a:t>По 4 квадрантам матрицы. После марта 2022 — структурный сдвиг.</a:t>
             </a:r>
           </a:p>
         </p:txBody>
@@ -29699,7 +29700,7 @@
                 </a:solidFill>
                 <a:latin typeface="Arial"/>
               </a:rPr>
-              <a:t>Q1 Mature</a:t>
+              <a:t>Q1 Зрелое</a:t>
             </a:r>
           </a:p>
         </p:txBody>
@@ -29740,7 +29741,7 @@
               </a:rPr>
               <a:t>Роснефть Digital Field
 на Башнефть Илишевское
-+1 Mt/год нефти</a:t>
++1 млн т/год нефти</a:t>
             </a:r>
           </a:p>
         </p:txBody>
@@ -29871,7 +29872,7 @@
                 </a:solidFill>
                 <a:latin typeface="Arial"/>
               </a:rPr>
-              <a:t>Q3 Frontier</a:t>
+              <a:t>Q3 Разведка</a:t>
             </a:r>
           </a:p>
         </p:txBody>
@@ -29912,7 +29913,7 @@
               </a:rPr>
               <a:t>Газпром нефть Cognitive Geo
 с IBM Research Brazil 2019–2022
-→ internal post-IBM exit</a:t>
+→ внутренняя разработка после ухода IBM</a:t>
             </a:r>
           </a:p>
         </p:txBody>
@@ -30043,7 +30044,7 @@
                 </a:solidFill>
                 <a:latin typeface="Arial"/>
               </a:rPr>
-              <a:t>Q2 Methane</a:t>
+              <a:t>Q2 Метан</a:t>
             </a:r>
           </a:p>
         </p:txBody>
@@ -30083,8 +30084,8 @@
                 <a:latin typeface="Arial"/>
               </a:rPr>
               <a:t>EU 2024/1787 не применяется
-компаниям РФ через imports
-compliance с 2027</a:t>
+к компаниям РФ через импорт
+соответствие с 2027</a:t>
             </a:r>
           </a:p>
         </p:txBody>
@@ -30215,7 +30216,7 @@
                 </a:solidFill>
                 <a:latin typeface="Arial"/>
               </a:rPr>
-              <a:t>Q4 Transition</a:t>
+              <a:t>Q4 Переход</a:t>
             </a:r>
           </a:p>
         </p:txBody>
@@ -30255,8 +30256,8 @@
                 <a:latin typeface="Arial"/>
               </a:rPr>
               <a:t>CCS / EGS — ограниченные
-пилоты. Sanctions blockуют
-closed-loop AI infrastructure</a:t>
+пилоты. Санкции блокируют
+замкнутую AI-инфраструктуру</a:t>
             </a:r>
           </a:p>
         </p:txBody>
@@ -30343,7 +30344,7 @@
                 </a:solidFill>
                 <a:latin typeface="Arial"/>
               </a:rPr>
-              <a:t>Vertical integration — необходимость, не выбор. Российский путь ближе к Sinopec / CNOOC, чем к Aramco / ExxonMobil vendor-based.</a:t>
+              <a:t>Вертикальная интеграция — необходимость, не выбор. Российский путь ближе к Sinopec / CNOOC, чем к Aramco / ExxonMobil на основе поставщиков.</a:t>
             </a:r>
           </a:p>
         </p:txBody>
@@ -30408,7 +30409,7 @@
                 </a:solidFill>
                 <a:latin typeface="Arial"/>
               </a:rPr>
-              <a:t>Газпром нефть Cognitive Geologist — flagship российский Q3</a:t>
+              <a:t>Газпром нефть Cognitive Geologist — ключевой российский кейс Q3</a:t>
             </a:r>
           </a:p>
         </p:txBody>
@@ -30447,7 +30448,7 @@
                 </a:solidFill>
                 <a:latin typeface="Arial"/>
               </a:rPr>
-              <a:t>С IBM Research Brazil 2019–2022 → internal development после ухода IBM. Survived where BP+Beyond Limits + IBM+Repsol failed.</a:t>
+              <a:t>С IBM Research Brazil 2019–2022 → внутренняя разработка после ухода IBM. Выжил там, где BP+Beyond Limits + IBM+Repsol провалились.</a:t>
             </a:r>
           </a:p>
         </p:txBody>
@@ -30566,7 +30567,7 @@
                 </a:solidFill>
                 <a:latin typeface="Arial"/>
               </a:rPr>
-              <a:t>Геология цикл:</a:t>
+              <a:t>Геологический цикл:</a:t>
             </a:r>
           </a:p>
           <a:p>
@@ -30630,7 +30631,7 @@
                 </a:solidFill>
                 <a:latin typeface="Arial"/>
               </a:rPr>
-              <a:t>· First oil из нового поля</a:t>
+              <a:t>· Первая нефть нового поля</a:t>
             </a:r>
           </a:p>
           <a:p>
@@ -30646,7 +30647,7 @@
                 </a:solidFill>
                 <a:latin typeface="Arial"/>
               </a:rPr>
-              <a:t>· Cut twofold время до first oil</a:t>
+              <a:t>· Сокращение вдвое времени до первой нефти</a:t>
             </a:r>
           </a:p>
           <a:p>
@@ -30662,7 +30663,7 @@
                 </a:solidFill>
                 <a:latin typeface="Arial"/>
               </a:rPr>
-              <a:t>· +40% projects к 2030 (target)</a:t>
+              <a:t>· +40% проектов к 2030 (цель)</a:t>
             </a:r>
           </a:p>
           <a:p>
@@ -30694,7 +30695,7 @@
                 </a:solidFill>
                 <a:latin typeface="Arial"/>
               </a:rPr>
-              <a:t>Структурный success:</a:t>
+              <a:t>Структурный успех:</a:t>
             </a:r>
           </a:p>
           <a:p>
@@ -30710,7 +30711,7 @@
                 </a:solidFill>
                 <a:latin typeface="Arial"/>
               </a:rPr>
-              <a:t>Узкая задача (seismic preview) + measurable baseline (months → minutes) + senior expert QC.</a:t>
+              <a:t>Узкая задача (предварительная сейсмика) + измеримая база (месяцы → минуты) + контроль старшего эксперта.</a:t>
             </a:r>
           </a:p>
         </p:txBody>
@@ -30797,7 +30798,7 @@
                 </a:solidFill>
                 <a:latin typeface="Arial"/>
               </a:rPr>
-              <a:t>AIQ partnership:</a:t>
+              <a:t>Партнёрство AIQ:</a:t>
             </a:r>
           </a:p>
           <a:p>
@@ -30813,7 +30814,7 @@
                 </a:solidFill>
                 <a:latin typeface="Arial"/>
               </a:rPr>
-              <a:t>· ADNOC + G42 + Presight joint venture</a:t>
+              <a:t>· Совместное предприятие ADNOC + G42 + Presight</a:t>
             </a:r>
           </a:p>
           <a:p>
@@ -30845,7 +30846,7 @@
                 </a:solidFill>
                 <a:latin typeface="Arial"/>
               </a:rPr>
-              <a:t>· Aramco + Groq sister AI deal</a:t>
+              <a:t>· Aramco + Groq — родственная AI-сделка</a:t>
             </a:r>
           </a:p>
           <a:p>
@@ -30877,7 +30878,7 @@
                 </a:solidFill>
                 <a:latin typeface="Arial"/>
               </a:rPr>
-              <a:t>Контраст с failures:</a:t>
+              <a:t>Контраст с провалами:</a:t>
             </a:r>
           </a:p>
           <a:p>
@@ -30893,7 +30894,7 @@
                 </a:solidFill>
                 <a:latin typeface="Arial"/>
               </a:rPr>
-              <a:t>· BP + Beyond Limits — single vendor + cognitive overpromise</a:t>
+              <a:t>· BP + Beyond Limits — один поставщик + когнитивное переобещание</a:t>
             </a:r>
           </a:p>
           <a:p>
@@ -30909,7 +30910,7 @@
                 </a:solidFill>
                 <a:latin typeface="Arial"/>
               </a:rPr>
-              <a:t>· IBM + Repsol — general-purpose в narrow domain</a:t>
+              <a:t>· IBM + Repsol — универсальный в узкой области</a:t>
             </a:r>
           </a:p>
           <a:p>
@@ -30925,7 +30926,7 @@
                 </a:solidFill>
                 <a:latin typeface="Arial"/>
               </a:rPr>
-              <a:t>· Cognitive Geo — narrow task + custom + senior QC = успех.</a:t>
+              <a:t>· Cognitive Geo — узкая задача + кастом + контроль старшего = успех.</a:t>
             </a:r>
           </a:p>
           <a:p>
@@ -30957,7 +30958,7 @@
                 </a:solidFill>
                 <a:latin typeface="Arial"/>
               </a:rPr>
-              <a:t>Caveat:</a:t>
+              <a:t>Оговорка:</a:t>
             </a:r>
           </a:p>
           <a:p>
@@ -30973,7 +30974,7 @@
                 </a:solidFill>
                 <a:latin typeface="Arial"/>
               </a:rPr>
-              <a:t>Российские KPI = self-reported. Тот же caveat что Aramco.</a:t>
+              <a:t>Российские KPI — самоотчёт. Та же оговорка что для Aramco.</a:t>
             </a:r>
           </a:p>
         </p:txBody>
@@ -31060,7 +31061,7 @@
                 </a:solidFill>
                 <a:latin typeface="Arial"/>
               </a:rPr>
-              <a:t>Структурный паттерн success Q3: узкая задача + measurable baseline + senior expert QC. Anthropomorphic framing («AI имитирует геолога») = красный флаг.</a:t>
+              <a:t>Структурный паттерн успеха Q3: узкая задача + измеримая база + контроль старшего эксперта. Антропоморфная рамка («AI имитирует геолога») = красный флаг.</a:t>
             </a:r>
           </a:p>
         </p:txBody>
@@ -31125,7 +31126,7 @@
                 </a:solidFill>
                 <a:latin typeface="Arial"/>
               </a:rPr>
-              <a:t>Российский Q1: flagship + средний эшелон</a:t>
+              <a:t>Российский Q1: ключевой кейс + средний эшелон</a:t>
             </a:r>
           </a:p>
         </p:txBody>
@@ -31164,7 +31165,7 @@
                 </a:solidFill>
                 <a:latin typeface="Arial"/>
               </a:rPr>
-              <a:t>Disclosure gap structural — корпоративные пресс-релизы вместо SEC 10-K mandatory.</a:t>
+              <a:t>Структурный разрыв в раскрытии — корпоративные пресс-релизы вместо обязательной отчётности SEC 10-K.</a:t>
             </a:r>
           </a:p>
         </p:txBody>
@@ -31334,7 +31335,7 @@
                 </a:solidFill>
                 <a:latin typeface="Arial"/>
               </a:rPr>
-              <a:t>Башнефть Илишевское flagship:</a:t>
+              <a:t>Башнефть Илишевское — ключевой кейс:</a:t>
             </a:r>
           </a:p>
           <a:p>
@@ -31366,7 +31367,7 @@
                 </a:solidFill>
                 <a:latin typeface="Arial"/>
               </a:rPr>
-              <a:t>· +1 Mt/год дополнительной нефти</a:t>
+              <a:t>· +1 млн т/год дополнительной нефти</a:t>
             </a:r>
           </a:p>
           <a:p>
@@ -31478,7 +31479,7 @@
                 </a:solidFill>
                 <a:latin typeface="Arial"/>
               </a:rPr>
-              <a:t>· Roxar (Schlumberger) ушёл 2022</a:t>
+              <a:t>· Roxar (Schlumberger) ушёл в 2022</a:t>
             </a:r>
           </a:p>
           <a:p>
@@ -31494,7 +31495,7 @@
                 </a:solidFill>
                 <a:latin typeface="Arial"/>
               </a:rPr>
-              <a:t>· Internal development = только путь</a:t>
+              <a:t>· Внутренняя разработка — единственный путь</a:t>
             </a:r>
           </a:p>
         </p:txBody>
@@ -31680,7 +31681,7 @@
                 </a:solidFill>
                 <a:latin typeface="Arial"/>
               </a:rPr>
-              <a:t>· АнтиХрупкий программа (resilience-driven)</a:t>
+              <a:t>· Программа «АнтиХрупкий» (управление устойчивостью)</a:t>
             </a:r>
           </a:p>
           <a:p>
@@ -31696,7 +31697,7 @@
                 </a:solidFill>
                 <a:latin typeface="Arial"/>
               </a:rPr>
-              <a:t>· Нижнекамск НПЗ — partial AI deployment</a:t>
+              <a:t>· Нижнекамск НПЗ — частичное внедрение AI</a:t>
             </a:r>
           </a:p>
           <a:p>
@@ -31712,7 +31713,7 @@
                 </a:solidFill>
                 <a:latin typeface="Arial"/>
               </a:rPr>
-              <a:t>· Public disclosure ограничен</a:t>
+              <a:t>· Публичное раскрытие ограничено</a:t>
             </a:r>
           </a:p>
           <a:p>
@@ -31760,7 +31761,7 @@
                 </a:solidFill>
                 <a:latin typeface="Arial"/>
               </a:rPr>
-              <a:t>· Волго-Урал — internal teams без vendor</a:t>
+              <a:t>· Волго-Урал — внутренние команды без поставщика</a:t>
             </a:r>
           </a:p>
           <a:p>
@@ -31776,7 +31777,7 @@
                 </a:solidFill>
                 <a:latin typeface="Arial"/>
               </a:rPr>
-              <a:t>· No detailed KPI публично</a:t>
+              <a:t>· Подробных KPI публично нет</a:t>
             </a:r>
           </a:p>
           <a:p>
@@ -31824,7 +31825,7 @@
                 </a:solidFill>
                 <a:latin typeface="Arial"/>
               </a:rPr>
-              <a:t>· Cognitive Pilot + Sberbank ecosystem</a:t>
+              <a:t>· Cognitive Pilot + экосистема Sberbank</a:t>
             </a:r>
           </a:p>
           <a:p>
@@ -31840,7 +31841,7 @@
                 </a:solidFill>
                 <a:latin typeface="Arial"/>
               </a:rPr>
-              <a:t>· Conservative disclosure</a:t>
+              <a:t>· Консервативное раскрытие</a:t>
             </a:r>
           </a:p>
           <a:p>
@@ -31872,7 +31873,7 @@
                 </a:solidFill>
                 <a:latin typeface="Arial"/>
               </a:rPr>
-              <a:t>Structural gap:</a:t>
+              <a:t>Структурный разрыв:</a:t>
             </a:r>
           </a:p>
           <a:p>
@@ -31888,7 +31889,7 @@
                 </a:solidFill>
                 <a:latin typeface="Arial"/>
               </a:rPr>
-              <a:t>Без mandatory SEC-style reporting — оценка только qualitative.</a:t>
+              <a:t>Без обязательной отчётности по образцу SEC — оценка только качественная.</a:t>
             </a:r>
           </a:p>
         </p:txBody>
@@ -31975,7 +31976,7 @@
                 </a:solidFill>
                 <a:latin typeface="Arial"/>
               </a:rPr>
-              <a:t>Российский Q1 working pattern: NOC + internal teams + узкая задача + measurable baseline. Vendor dependency = риск (Roxar exit 2022).</a:t>
+              <a:t>Российский паттерн работающего Q1: нацкомпания + внутренние команды + узкая задача + измеримая база. Зависимость от поставщика = риск (Roxar ушёл 2022).</a:t>
             </a:r>
           </a:p>
         </p:txBody>
@@ -32034,13 +32035,13 @@
               </a:lnSpc>
             </a:pPr>
             <a:r>
-              <a:rPr sz="2600" b="1" i="0">
-                <a:solidFill>
-                  <a:srgbClr val="21295C"/>
-                </a:solidFill>
-                <a:latin typeface="Arial"/>
-              </a:rPr>
-              <a:t>Ransomware на нефтегаз +935% год к году</a:t>
+              <a:rPr sz="2200" b="1" i="0">
+                <a:solidFill>
+                  <a:srgbClr val="21295C"/>
+                </a:solidFill>
+                <a:latin typeface="Arial"/>
+              </a:rPr>
+              <a:t>Шифровальщики против нефтегаза +935% год к году (апр 2024 → апр 2025)</a:t>
             </a:r>
           </a:p>
         </p:txBody>
@@ -32079,7 +32080,7 @@
                 </a:solidFill>
                 <a:latin typeface="Arial"/>
               </a:rPr>
-              <a:t>Zscaler ThreatLabz 2025 report. Counter-trend AI-расширения — безопасность phase 1, не phase 4.</a:t>
+              <a:t>Отчёт Zscaler ThreatLabz 2025. Встречный тренд AI-расширения — безопасность фаза 1, не фаза 4.</a:t>
             </a:r>
           </a:p>
         </p:txBody>
@@ -32148,8 +32149,8 @@
         </p:blipFill>
         <p:spPr>
           <a:xfrm>
-            <a:off x="640080" y="2042160"/>
-            <a:ext cx="5120640" cy="3413759"/>
+            <a:off x="640080" y="2148840"/>
+            <a:ext cx="5120640" cy="3200399"/>
           </a:xfrm>
           <a:prstGeom prst="rect">
             <a:avLst/>
@@ -32238,7 +32239,7 @@
                 </a:solidFill>
                 <a:latin typeface="Arial"/>
               </a:rPr>
-              <a:t>Colonial Pipeline 2021 anchor:</a:t>
+              <a:t>Якорь Colonial Pipeline 2021:</a:t>
             </a:r>
           </a:p>
           <a:p>
@@ -32254,7 +32255,7 @@
                 </a:solidFill>
                 <a:latin typeface="Arial"/>
               </a:rPr>
-              <a:t>· VPN account без MFA — единый entry point</a:t>
+              <a:t>· VPN-аккаунт без MFA (многофакторной аутентификации) — единая точка входа</a:t>
             </a:r>
           </a:p>
           <a:p>
@@ -32270,7 +32271,7 @@
                 </a:solidFill>
                 <a:latin typeface="Arial"/>
               </a:rPr>
-              <a:t>· DarkSide ransomware → 6 дней shutdown</a:t>
+              <a:t>· Шифровальщик DarkSide → 6 дней остановки</a:t>
             </a:r>
           </a:p>
           <a:p>
@@ -32286,7 +32287,7 @@
                 </a:solidFill>
                 <a:latin typeface="Arial"/>
               </a:rPr>
-              <a:t>· 50% Восточно-побережной топливной поставки</a:t>
+              <a:t>· 50% поставок топлива на Восточном побережье</a:t>
             </a:r>
           </a:p>
           <a:p>
@@ -32302,7 +32303,7 @@
                 </a:solidFill>
                 <a:latin typeface="Arial"/>
               </a:rPr>
-              <a:t>· $4,4M ransom paid (часть recovered)</a:t>
+              <a:t>· $4,4 млн выкупа уплачено (часть возвращена)</a:t>
             </a:r>
           </a:p>
           <a:p>
@@ -32334,7 +32335,7 @@
                 </a:solidFill>
                 <a:latin typeface="Arial"/>
               </a:rPr>
-              <a:t>Защитные AI alternatives:</a:t>
+              <a:t>Защитные AI-альтернативы:</a:t>
             </a:r>
           </a:p>
           <a:p>
@@ -32350,7 +32351,7 @@
                 </a:solidFill>
                 <a:latin typeface="Arial"/>
               </a:rPr>
-              <a:t>· Dragos OT security platform</a:t>
+              <a:t>· Платформа OT-безопасности Dragos</a:t>
             </a:r>
           </a:p>
           <a:p>
@@ -32366,7 +32367,7 @@
                 </a:solidFill>
                 <a:latin typeface="Arial"/>
               </a:rPr>
-              <a:t>· Claroty + Nozomi Networks SCADA monitoring</a:t>
+              <a:t>· Claroty + Nozomi Networks — мониторинг SCADA</a:t>
             </a:r>
           </a:p>
           <a:p>
@@ -32414,7 +32415,7 @@
                 </a:solidFill>
                 <a:latin typeface="Arial"/>
               </a:rPr>
-              <a:t>Counter-trend insight:</a:t>
+              <a:t>Встречный вывод:</a:t>
             </a:r>
           </a:p>
           <a:p>
@@ -32430,7 +32431,7 @@
                 </a:solidFill>
                 <a:latin typeface="Arial"/>
               </a:rPr>
-              <a:t>AI расширяет attack surface. Defensive AI (anomaly detection) — необходим, но недостаточен.</a:t>
+              <a:t>AI расширяет поверхность атаки. Защитный AI (выявление аномалий) — необходим, но недостаточен.</a:t>
             </a:r>
           </a:p>
         </p:txBody>
@@ -32517,7 +32518,7 @@
                 </a:solidFill>
                 <a:latin typeface="Arial"/>
               </a:rPr>
-              <a:t>Безопасность — phase 1 (perimeter + MFA + segmentation), НЕ phase 4 (AI-defense overlay). Сначала basics, потом AI.</a:t>
+              <a:t>Безопасность — фаза 1 (периметр + MFA + сегментация), НЕ фаза 4 (наложение AI-защиты). Сначала базовое, потом AI.</a:t>
             </a:r>
           </a:p>
         </p:txBody>
@@ -32582,7 +32583,7 @@
                 </a:solidFill>
                 <a:latin typeface="Arial"/>
               </a:rPr>
-              <a:t>Industry cyclicality &gt; AI hype cycle. Deepwater Horizon = anchor.</a:t>
+              <a:t>Цикл отрасли &gt; цикл AI-хайпа. Deepwater Horizon = якорь.</a:t>
             </a:r>
           </a:p>
         </p:txBody>
@@ -32621,7 +32622,7 @@
                 </a:solidFill>
                 <a:latin typeface="Arial"/>
               </a:rPr>
-              <a:t>2020 crash 107k jobs за 6 мес + Deepwater Horizon 2010 — два cross-cutting anchor.</a:t>
+              <a:t>Кризис 2020 — 107 тыс. рабочих мест за 6 мес + Deepwater Horizon 2010 — два сквозных якоря.</a:t>
             </a:r>
           </a:p>
         </p:txBody>
@@ -32752,7 +32753,7 @@
                 </a:solidFill>
                 <a:latin typeface="Arial"/>
               </a:rPr>
-              <a:t>2020 oil crash</a:t>
+              <a:t>Нефтяной кризис 2020</a:t>
             </a:r>
           </a:p>
         </p:txBody>
@@ -32773,8 +32774,8 @@
         </p:blipFill>
         <p:spPr>
           <a:xfrm>
-            <a:off x="1691640" y="2286000"/>
-            <a:ext cx="3017520" cy="2011680"/>
+            <a:off x="1591055" y="2286000"/>
+            <a:ext cx="3218688" cy="2011680"/>
           </a:xfrm>
           <a:prstGeom prst="rect">
             <a:avLst/>
@@ -32815,7 +32816,7 @@
                 </a:solidFill>
                 <a:latin typeface="Arial"/>
               </a:rPr>
-              <a:t>107 000 jobs lost за 6 мес = 9,7% индустрии</a:t>
+              <a:t>107 000 рабочих мест потеряно за 6 мес = 9,7% индустрии</a:t>
             </a:r>
           </a:p>
           <a:p>
@@ -32831,7 +32832,7 @@
                 </a:solidFill>
                 <a:latin typeface="Arial"/>
               </a:rPr>
-              <a:t>· WTI futures: -$37 (negative) на короткое время</a:t>
+              <a:t>· Фьючерсы WTI: −$37 (отрицательные) на короткое время</a:t>
             </a:r>
           </a:p>
           <a:p>
@@ -32847,7 +32848,7 @@
                 </a:solidFill>
                 <a:latin typeface="Arial"/>
               </a:rPr>
-              <a:t>· AI программы заморожены на 18-24 мес</a:t>
+              <a:t>· AI-программы заморожены на 18-24 мес</a:t>
             </a:r>
           </a:p>
           <a:p>
@@ -32863,7 +32864,7 @@
                 </a:solidFill>
                 <a:latin typeface="Arial"/>
               </a:rPr>
-              <a:t>· Job market не восстановился полностью к 2024</a:t>
+              <a:t>· Рынок труда не восстановился полностью к 2024</a:t>
             </a:r>
           </a:p>
         </p:txBody>
@@ -33057,7 +33058,7 @@
                 </a:solidFill>
                 <a:latin typeface="Arial"/>
               </a:rPr>
-              <a:t>11 deaths + $60 млрд = 20% годовой выручки BP</a:t>
+              <a:t>11 погибших + $60 млрд = 20% годовой выручки BP</a:t>
             </a:r>
           </a:p>
           <a:p>
@@ -33073,7 +33074,7 @@
                 </a:solidFill>
                 <a:latin typeface="Arial"/>
               </a:rPr>
-              <a:t>· Macondo well blowout — Gulf of Mexico</a:t>
+              <a:t>· Выброс на скважине Macondo — Мексиканский залив</a:t>
             </a:r>
           </a:p>
           <a:p>
@@ -33089,7 +33090,7 @@
                 </a:solidFill>
                 <a:latin typeface="Arial"/>
               </a:rPr>
-              <a:t>· BOP (противовыбросовый превентор) failure</a:t>
+              <a:t>· Отказ BOP (противовыбросового превентора)</a:t>
             </a:r>
           </a:p>
           <a:p>
@@ -33105,7 +33106,7 @@
                 </a:solidFill>
                 <a:latin typeface="Arial"/>
               </a:rPr>
-              <a:t>· Alarm bypass culture (Andrea Fleytas testimony)</a:t>
+              <a:t>· Культура обхода тревог (показания Andrea Fleytas)</a:t>
             </a:r>
           </a:p>
         </p:txBody>
@@ -33192,7 +33193,7 @@
                 </a:solidFill>
                 <a:latin typeface="Arial"/>
               </a:rPr>
-              <a:t>AI roadmap должен stress-test индустриальный цикл и культуру обхода тревог (Alert fatigue → alarm bypass — тот же паттерн на 2 разных шкалах).</a:t>
+              <a:t>Дорожная карта AI должна тестироваться на устойчивость к циклу отрасли и культуре обхода тревог (усталость от ложных тревог → обход тревог — тот же паттерн на 2 разных шкалах).</a:t>
             </a:r>
           </a:p>
         </p:txBody>
@@ -33296,7 +33297,7 @@
                 </a:solidFill>
                 <a:latin typeface="Arial"/>
               </a:rPr>
-              <a:t>Не по value chain, а по структуре AI-задачи: данные × физика</a:t>
+              <a:t>Не по цепочке создания стоимости, а по структуре AI-задачи: данные × физика</a:t>
             </a:r>
           </a:p>
         </p:txBody>
@@ -33466,7 +33467,7 @@
                 </a:solidFill>
                 <a:latin typeface="Arial"/>
               </a:rPr>
-              <a:t>Keystone</a:t>
+              <a:t>Стержень</a:t>
             </a:r>
           </a:p>
         </p:txBody>
@@ -33714,7 +33715,7 @@
                 </a:solidFill>
                 <a:latin typeface="Arial"/>
               </a:rPr>
-              <a:t>Q1 Mature</a:t>
+              <a:t>Q1 Зрелое</a:t>
             </a:r>
           </a:p>
         </p:txBody>
@@ -33962,7 +33963,7 @@
                 </a:solidFill>
                 <a:latin typeface="Arial"/>
               </a:rPr>
-              <a:t>Q3 Frontier</a:t>
+              <a:t>Q3 Разведка</a:t>
             </a:r>
           </a:p>
         </p:txBody>
@@ -34210,7 +34211,7 @@
                 </a:solidFill>
                 <a:latin typeface="Arial"/>
               </a:rPr>
-              <a:t>Q2 Methane</a:t>
+              <a:t>Q2 Метан</a:t>
             </a:r>
           </a:p>
         </p:txBody>
@@ -34458,7 +34459,7 @@
                 </a:solidFill>
                 <a:latin typeface="Arial"/>
               </a:rPr>
-              <a:t>Q4 Transition</a:t>
+              <a:t>Q4 Переход</a:t>
             </a:r>
           </a:p>
         </p:txBody>
@@ -35119,7 +35120,7 @@
                 </a:solidFill>
                 <a:latin typeface="Arial"/>
               </a:rPr>
-              <a:t>Quick glossary: MRV = выявление-учёт-проверка · OGI = оптическая газовая визуализация · CCS = улавливание и хранение углерода · EGS = улучшенные геотермальные системы · SIS = приборная система безопасности</a:t>
+              <a:t>Краткий словарь: MRV = выявление-учёт-проверка · OGI = оптическая газовая визуализация · CCS = улавливание и хранение углерода · EGS = улучшенные геотермальные системы · SIS = приборная система безопасности</a:t>
             </a:r>
           </a:p>
         </p:txBody>
@@ -35184,7 +35185,7 @@
                 </a:solidFill>
                 <a:latin typeface="Arial"/>
               </a:rPr>
-              <a:t>4-квадрантный синтез: 10 documented failures + working cases</a:t>
+              <a:t>4-квадрантный синтез: 10 разобранных провалов + работающие кейсы</a:t>
             </a:r>
           </a:p>
         </p:txBody>
@@ -35223,7 +35224,7 @@
                 </a:solidFill>
                 <a:latin typeface="Arial"/>
               </a:rPr>
-              <a:t>Возврат к keystone-матрице. AI в нефтегазе — не одна история, а четыре.</a:t>
+              <a:t>Возврат к матрице. AI в нефтегазе — не одна история, а четыре.</a:t>
             </a:r>
           </a:p>
         </p:txBody>
@@ -35354,7 +35355,7 @@
                 </a:solidFill>
                 <a:latin typeface="Arial"/>
               </a:rPr>
-              <a:t>Q2 Methane — AI essential</a:t>
+              <a:t>Q2 Метан — AI необходим</a:t>
             </a:r>
           </a:p>
         </p:txBody>
@@ -35394,13 +35395,13 @@
                 <a:latin typeface="Arial"/>
               </a:rPr>
               <a:t>Работает:
-· MethaneSAT (15,5 мес до loss)
+· MethaneSAT (15,5 мес до потери)
 · Carbon Mapper Tanager-1
-· GHGSat 13-constellation
-· Bridger aerial LiDAR
+· GHGSat — группировка 13 спутников
+· Bridger авиа-LiDAR
 Провалы (2):
-· MethaneSAT loss 20 июня 2025
-· 4× discrepancy</a:t>
+· Потеря MethaneSAT 20 июня 2025
+· 4× разрыв с EPA</a:t>
             </a:r>
           </a:p>
         </p:txBody>
@@ -35531,7 +35532,7 @@
                 </a:solidFill>
                 <a:latin typeface="Arial"/>
               </a:rPr>
-              <a:t>Q1 Mature — AI мультипликатор</a:t>
+              <a:t>Q1 Зрелое — AI как мультипликатор</a:t>
             </a:r>
           </a:p>
         </p:txBody>
@@ -35571,12 +35572,12 @@
                 <a:latin typeface="Arial"/>
               </a:rPr>
               <a:t>Работает:
-· Ambyint +15% / 200 wells
-· Honeywell UOP 310+ units
-· Роснефть Digital Field +1 Mt/год
+· Ambyint +15% / 200 скважин
+· Honeywell UOP 310+ установок
+· Роснефть Digital Field +1 млн т/год
 Провалы (2):
-· 86% pilot stuck
-· Aspen Mtell alert fatigue</a:t>
+· 86% пилотов застряло
+· Aspen Mtell — усталость от тревог</a:t>
             </a:r>
           </a:p>
         </p:txBody>
@@ -35707,7 +35708,7 @@
                 </a:solidFill>
                 <a:latin typeface="Arial"/>
               </a:rPr>
-              <a:t>Q4 Transition — struggle</a:t>
+              <a:t>Q4 Переход — буксуют вместе</a:t>
             </a:r>
           </a:p>
         </p:txBody>
@@ -35746,12 +35747,12 @@
                 </a:solidFill>
                 <a:latin typeface="Arial"/>
               </a:rPr>
-              <a:t>Работает (limited):
-· Northern Lights 1,5 Mt/год
-· Fervo IPO $1,89B
+              <a:t>Работает (ограниченно):
+· Northern Lights 1,5 млн т/год
+· Fervo IPO $1,89 млрд
 Провалы (2):
-· CCS 190× scale-up gap
-· Refinery plant-wide stagnation</a:t>
+· CCS 190× разрыв масштабирования
+· Общезаводская стагнация НПЗ</a:t>
             </a:r>
           </a:p>
         </p:txBody>
@@ -35882,7 +35883,7 @@
                 </a:solidFill>
                 <a:latin typeface="Arial"/>
               </a:rPr>
-              <a:t>Q3 Frontier — physics-first</a:t>
+              <a:t>Q3 Разведка — сначала физика</a:t>
             </a:r>
           </a:p>
         </p:txBody>
@@ -35926,7 +35927,7 @@
 · SLB Lumi / ExxonMobil Discovery 6
 · Газпром Cognitive Geo
 Провалы (2):
-· BP+Beyond Limits 7 лет 0
+· BP+Beyond Limits — 7 лет 0
 · IBM+Repsol Kalimba</a:t>
             </a:r>
           </a:p>
@@ -36014,7 +36015,7 @@
                 </a:solidFill>
                 <a:latin typeface="Arial"/>
               </a:rPr>
-              <a:t>Когда работает: Q1 multiplier + Q2 essential. Когда осторожно: Q3 augmentation. Когда опасно: Q4 long-horizon + safety-critical SIS.</a:t>
+              <a:t>Когда работает: Q1 мультипликатор + Q2 необходим. Когда осторожно: Q3 как дополнение. Когда опасно: Q4 длинный горизонт + критичная безопасность (SIS).</a:t>
             </a:r>
           </a:p>
         </p:txBody>
@@ -36079,7 +36080,7 @@
                 </a:solidFill>
                 <a:latin typeface="Arial"/>
               </a:rPr>
-              <a:t>3 cornerstone концепта — bridge к Лекции 17</a:t>
+              <a:t>3 опорных концепта — мост к Лекции 17</a:t>
             </a:r>
           </a:p>
         </p:txBody>
@@ -36118,7 +36119,7 @@
                 </a:solidFill>
                 <a:latin typeface="Arial"/>
               </a:rPr>
-              <a:t>Каждый — portable на любую следующую отрасль, не только нефтегаз.</a:t>
+              <a:t>Каждый переносим на любую следующую отрасль, не только нефтегаз.</a:t>
             </a:r>
           </a:p>
         </p:txBody>
@@ -36288,7 +36289,7 @@
                 </a:solidFill>
                 <a:latin typeface="Arial"/>
               </a:rPr>
-              <a:t>AI judgment как структурная задача</a:t>
+              <a:t>AI-суждение как структурная задача</a:t>
             </a:r>
           </a:p>
         </p:txBody>
@@ -36327,7 +36328,7 @@
                 </a:solidFill>
                 <a:latin typeface="Arial"/>
               </a:rPr>
-              <a:t>Главный навык — не «как запустить AI», а «как определить, применим ли». Для нефтегаза: 2×2 matrix данные × физика. Для любой отрасли: 2-3-мерная таксономия. Без диагностики AI = азартная ставка.</a:t>
+              <a:t>Главный навык — не «как запустить AI», а «как определить, применим ли». Для нефтегаза: матрица 2×2 данные × физика. Для любой отрасли: 2-3-мерная таксономия. Без диагностики AI = азартная ставка.</a:t>
             </a:r>
           </a:p>
         </p:txBody>
@@ -36497,7 +36498,7 @@
                 </a:solidFill>
                 <a:latin typeface="Arial"/>
               </a:rPr>
-              <a:t>Альтернатива-как-исходный уровень</a:t>
+              <a:t>Альтернатива как исходный уровень</a:t>
             </a:r>
           </a:p>
         </p:txBody>
@@ -36536,7 +36537,7 @@
                 </a:solidFill>
                 <a:latin typeface="Arial"/>
               </a:rPr>
-              <a:t>Каждое AI-внедрение имеет параллельный не-AI вариант. Для нефтегаза 6 категорий: Eclipse, Picarro, OGI, classical APC, SIS, federated learning. AI добавляется ТОЛЬКО если улучшает baseline.</a:t>
+              <a:t>Каждое AI-внедрение имеет параллельный не-AI вариант. Для нефтегаза 6 категорий: Eclipse, Picarro, OGI, классический APC, SIS, федеративное обучение. AI добавляется ТОЛЬКО если улучшает базовый уровень.</a:t>
             </a:r>
           </a:p>
         </p:txBody>
@@ -36706,7 +36707,7 @@
                 </a:solidFill>
                 <a:latin typeface="Arial"/>
               </a:rPr>
-              <a:t>Industry cyclicality &gt; AI hype cycle</a:t>
+              <a:t>Цикл отрасли &gt; цикл AI-хайпа</a:t>
             </a:r>
           </a:p>
         </p:txBody>
@@ -36745,7 +36746,7 @@
                 </a:solidFill>
                 <a:latin typeface="Arial"/>
               </a:rPr>
-              <a:t>2020 oil crash: 107k jobs за 6 мес → AI заморожены 18-24 мес. AI-roadmap должен иметь stress-tested устойчивость против отраслевого цикла. AI не защищает — он эффект усиления.</a:t>
+              <a:t>Нефтяной кризис 2020: 107 тыс. рабочих мест за 6 мес → AI заморожены 18-24 мес. Дорожная карта AI должна быть устойчивой к отраслевому циклу. AI не защищает — он усиливает эффект.</a:t>
             </a:r>
           </a:p>
         </p:txBody>
@@ -36832,7 +36833,7 @@
                 </a:solidFill>
                 <a:latin typeface="Arial"/>
               </a:rPr>
-              <a:t>Эти три cornerstone — переносимые диагностические инструменты. Лекция 17 — systematization: keystone'ы L11-L16 как universal patterns.</a:t>
+              <a:t>Эти три опорных концепта — переносимые диагностические инструменты. Лекция 17 — систематизация: несущие оси L11-L16 как универсальные шаблоны.</a:t>
             </a:r>
           </a:p>
         </p:txBody>
@@ -36936,7 +36937,7 @@
                 </a:solidFill>
                 <a:latin typeface="Arial"/>
               </a:rPr>
-              <a:t>3 ключевых вопроса для exit ticket — обсуждаем в малых группах, потом общий слайд.</a:t>
+              <a:t>3 ключевых вопроса для выходного билета — обсуждаем в малых группах, потом общий слайд.</a:t>
             </a:r>
           </a:p>
         </p:txBody>
@@ -37106,7 +37107,7 @@
                 </a:solidFill>
                 <a:latin typeface="Arial"/>
               </a:rPr>
-              <a:t>Для какого квадранта матрицы данные × физика AI является ESSENTIAL (а не augmentation)? Конкретный case + почему классической физики недостаточно?</a:t>
+              <a:t>Для какого квадранта матрицы данные × физика AI является НЕОБХОДИМЫМ (а не дополнением)? Конкретный кейс + почему классической физики недостаточно?</a:t>
             </a:r>
           </a:p>
         </p:txBody>
@@ -37276,7 +37277,7 @@
                 </a:solidFill>
                 <a:latin typeface="Arial"/>
               </a:rPr>
-              <a:t>Приведите 2 documented failure из лекции + выученные уроки. (Любые 2 из 10: BP+Beyond Limits, IBM+Repsol, MethaneSAT loss, 86% pilot stuck, Aspen alert fatigue, 4× discrepancy, CCS 190× gap, refinery stagnation, 2020 crash, cyber +935%.)</a:t>
+              <a:t>Приведите 2 разобранных провала из лекции + выученные уроки. (Любые 2 из 10: BP+Beyond Limits, IBM+Repsol, потеря MethaneSAT, 86% застряло, Aspen — усталость от тревог, 4× разрыв, CCS 190×, стагнация НПЗ, кризис 2020, кибер +935%.)</a:t>
             </a:r>
           </a:p>
         </p:txBody>
@@ -37533,7 +37534,7 @@
                 </a:solidFill>
                 <a:latin typeface="Arial"/>
               </a:rPr>
-              <a:t>Bonus для семинара: сравните Eni HPC6 ($104M, AMD, Italy) vs ExxonMobil Discovery 6 ($200-400M, NVIDIA, US) vs Aramco METABRAIN (250B params, internal Saudi).</a:t>
+              <a:t>Дополнительно для семинара: сравните Eni HPC6 ($104 млн, AMD, Италия) vs ExxonMobil Discovery 6 ($200-400 млн, NVIDIA, США) vs Aramco METABRAIN (250 млрд параметров, внутренний Саудовский).</a:t>
             </a:r>
           </a:p>
         </p:txBody>
@@ -37709,7 +37710,7 @@
                 </a:solidFill>
                 <a:latin typeface="Arial"/>
               </a:rPr>
-              <a:t>Bittersweet payoff:</a:t>
+              <a:t>Горько-сладкая развязка:</a:t>
             </a:r>
           </a:p>
           <a:p>
@@ -37741,7 +37742,7 @@
                 </a:solidFill>
                 <a:latin typeface="Arial"/>
               </a:rPr>
-              <a:t>· ~2 000 data files за 15,5 мес → retrospective inventory</a:t>
+              <a:t>· ~2 000 файлов данных за 15,5 мес → ретроспективный реестр</a:t>
             </a:r>
           </a:p>
           <a:p>
@@ -37773,7 +37774,7 @@
                 </a:solidFill>
                 <a:latin typeface="Arial"/>
               </a:rPr>
-              <a:t>Final framing:</a:t>
+              <a:t>Финальная рамка:</a:t>
             </a:r>
           </a:p>
           <a:p>
@@ -37869,7 +37870,7 @@
                 </a:solidFill>
                 <a:latin typeface="Arial"/>
               </a:rPr>
-              <a:t>Хороший инженер строит portfolio reading, не single-quadrant.</a:t>
+              <a:t>Хороший инженер строит честный портфельный обзор, не одиночный квадрант.</a:t>
             </a:r>
           </a:p>
         </p:txBody>
@@ -37956,7 +37957,7 @@
                 </a:solidFill>
                 <a:latin typeface="Arial"/>
               </a:rPr>
-              <a:t>Bridge к Лекции 17 — systematization. Keystone'ы L11–L16 как universal patterns.</a:t>
+              <a:t>Мост к Лекции 17 — систематизация. Несущие оси L11–L16 как универсальные шаблоны.</a:t>
             </a:r>
           </a:p>
         </p:txBody>
@@ -38060,7 +38061,7 @@
                 </a:solidFill>
                 <a:latin typeface="Arial"/>
               </a:rPr>
-              <a:t>От разведки фронтиров до спутникового метана — AI имеет 4 разных profile</a:t>
+              <a:t>От разведки фронтиров до спутникового метана — AI имеет 4 разных профиля</a:t>
             </a:r>
           </a:p>
         </p:txBody>
@@ -38801,7 +38802,7 @@
                 </a:solidFill>
                 <a:latin typeface="Arial"/>
               </a:rPr>
-              <a:t>Physics-first, AI как дополнение
+              <a:t>Сначала физика, AI как дополнение
 Aramco METABRAIN / Eni HPC6</a:t>
             </a:r>
           </a:p>
@@ -38889,7 +38890,7 @@
                 </a:solidFill>
                 <a:latin typeface="Arial"/>
               </a:rPr>
-              <a:t>За каждым AI-внедрением — alternative tool: физический симулятор, OGI-камера, классическая интерпретация.</a:t>
+              <a:t>За каждым AI-внедрением — альтернатива: физический симулятор, OGI-камера, классическая интерпретация.</a:t>
             </a:r>
           </a:p>
         </p:txBody>
@@ -38998,7 +38999,7 @@
                 </a:solidFill>
                 <a:latin typeface="Arial"/>
               </a:rPr>
-              <a:t>1. Keystone</a:t>
+              <a:t>1. Стержень</a:t>
             </a:r>
           </a:p>
         </p:txBody>
@@ -39081,7 +39082,7 @@
                 </a:solidFill>
                 <a:latin typeface="Arial"/>
               </a:rPr>
-              <a:t>2. Q1 Mature</a:t>
+              <a:t>2. Q1 Зрелое</a:t>
             </a:r>
           </a:p>
         </p:txBody>
@@ -39164,7 +39165,7 @@
                 </a:solidFill>
                 <a:latin typeface="Arial"/>
               </a:rPr>
-              <a:t>3. Q3 Frontier</a:t>
+              <a:t>3. Q3 Разведка</a:t>
             </a:r>
           </a:p>
         </p:txBody>
@@ -39247,7 +39248,7 @@
                 </a:solidFill>
                 <a:latin typeface="Arial"/>
               </a:rPr>
-              <a:t>4. Q2 Methane</a:t>
+              <a:t>4. Q2 Метан</a:t>
             </a:r>
           </a:p>
         </p:txBody>
@@ -39330,7 +39331,7 @@
                 </a:solidFill>
                 <a:latin typeface="Arial"/>
               </a:rPr>
-              <a:t>5. Q4 Transition</a:t>
+              <a:t>5. Q4 Переход</a:t>
             </a:r>
           </a:p>
         </p:txBody>
@@ -39804,7 +39805,7 @@
                 </a:solidFill>
                 <a:latin typeface="Arial"/>
               </a:rPr>
-              <a:t>McKinsey State of AI 2024 — vs cross-industry ~67%. Энергетика на 18 п.п. хуже среднего.</a:t>
+              <a:t>McKinsey State of AI 2024 — vs средний по отраслям ~67%. Энергетика на 18 п.п. хуже среднего.</a:t>
             </a:r>
           </a:p>
         </p:txBody>
@@ -39873,8 +39874,8 @@
         </p:blipFill>
         <p:spPr>
           <a:xfrm>
-            <a:off x="640080" y="1950720"/>
-            <a:ext cx="5120640" cy="3413759"/>
+            <a:off x="640080" y="2057400"/>
+            <a:ext cx="5120640" cy="3200399"/>
           </a:xfrm>
           <a:prstGeom prst="rect">
             <a:avLst/>
@@ -40027,7 +40028,7 @@
                 </a:solidFill>
                 <a:latin typeface="Arial"/>
               </a:rPr>
-              <a:t>2. Legacy IT integration. Стоимость интеграции SCADA/MES/ERP — в 3–5× выше стоимости AI-софта.</a:t>
+              <a:t>2. Интеграция со старой IT. Стоимость интеграции SCADA/MES/ERP — в 3–5× выше стоимости AI-софта.</a:t>
             </a:r>
           </a:p>
           <a:p>
@@ -40059,7 +40060,7 @@
                 </a:solidFill>
                 <a:latin typeface="Arial"/>
               </a:rPr>
-              <a:t>3. Дефицит кадров. AI + предметная область. После 2020 крах — 107k jobs потеряно.</a:t>
+              <a:t>3. Дефицит кадров. AI + предметная область. После кризиса 2020 — 107 тыс. рабочих мест потеряно.</a:t>
             </a:r>
           </a:p>
           <a:p>
@@ -40091,7 +40092,7 @@
                 </a:solidFill>
                 <a:latin typeface="Arial"/>
               </a:rPr>
-              <a:t>4. Культура безопасности. Senior operator отказывает рискованной рекомендации — и часто прав.</a:t>
+              <a:t>4. Культура безопасности. Старший оператор отказывает рискованной рекомендации — и часто прав.</a:t>
             </a:r>
           </a:p>
           <a:p>
@@ -40123,7 +40124,7 @@
                 </a:solidFill>
                 <a:latin typeface="Arial"/>
               </a:rPr>
-              <a:t>5. Горизонт ROI. AI-vendor обещает 12–18 мес; field life 20–30 лет. Несовместимо.</a:t>
+              <a:t>5. Горизонт окупаемости. AI-поставщик обещает 12–18 мес; срок жизни месторождения 20–30 лет. Несовместимо.</a:t>
             </a:r>
           </a:p>
         </p:txBody>
@@ -40210,7 +40211,7 @@
                 </a:solidFill>
                 <a:latin typeface="Arial"/>
               </a:rPr>
-              <a:t>Это не «AI плохой» — это статистическая норма отрасли. 14% successful vs 86% stuck — инженерный фильтр, а не приговор.</a:t>
+              <a:t>Это не «AI плохой» — это статистическая норма отрасли. 14% работают vs 86% застряли — инженерный фильтр, а не приговор.</a:t>
             </a:r>
           </a:p>
         </p:txBody>
@@ -40314,7 +40315,7 @@
                 </a:solidFill>
                 <a:latin typeface="Arial"/>
               </a:rPr>
-              <a:t>Aspen Mtell на нефтепереработке: 100–500 алертов в день; plant-wide пилоты тихо закрываются.</a:t>
+              <a:t>Aspen Mtell на нефтепереработке: 100–500 ложных тревог в день; общезаводские пилоты тихо закрываются.</a:t>
             </a:r>
           </a:p>
         </p:txBody>
@@ -40425,7 +40426,7 @@
                 </a:solidFill>
                 <a:latin typeface="Arial"/>
               </a:rPr>
-              <a:t>AspenTech · Aspen Mtell product page</a:t>
+              <a:t>AspenTech · страница продукта Aspen Mtell</a:t>
             </a:r>
           </a:p>
         </p:txBody>
@@ -40592,7 +40593,7 @@
                 </a:solidFill>
                 <a:latin typeface="Arial"/>
               </a:rPr>
-              <a:t>· 100–500 alerts/день — оператор перестаёт реагировать</a:t>
+              <a:t>· 100–500 ложных тревог/день — оператор перестаёт реагировать</a:t>
             </a:r>
           </a:p>
           <a:p>
@@ -40608,7 +40609,7 @@
                 </a:solidFill>
                 <a:latin typeface="Arial"/>
               </a:rPr>
-              <a:t>· Single-column success → plant-wide пилот тихо закрыт</a:t>
+              <a:t>· Успех на одной колонне → общезаводской пилот тихо закрыт</a:t>
             </a:r>
           </a:p>
           <a:p>
@@ -40624,7 +40625,7 @@
                 </a:solidFill>
                 <a:latin typeface="Arial"/>
               </a:rPr>
-              <a:t>· Honeywell UOP 310+ юнитов / ~700 НПЗ = ~44% rate</a:t>
+              <a:t>· Honeywell UOP 310+ установок / ~700 НПЗ = ~44% охвата</a:t>
             </a:r>
           </a:p>
           <a:p>
@@ -40672,7 +40673,7 @@
                 </a:solidFill>
                 <a:latin typeface="Arial"/>
               </a:rPr>
-              <a:t>Структурный gap:</a:t>
+              <a:t>Структурный разрыв:</a:t>
             </a:r>
           </a:p>
           <a:p>
@@ -40688,7 +40689,7 @@
                 </a:solidFill>
                 <a:latin typeface="Arial"/>
               </a:rPr>
-              <a:t>Multi-physics (масс + энергия + реакция + коррозия) ломает ML-суррогаты на edge cases.</a:t>
+              <a:t>Многослойная физика (масса + энергия + реакция + коррозия) ломает ML-суррогаты на нестандартных режимах.</a:t>
             </a:r>
           </a:p>
         </p:txBody>
@@ -40775,7 +40776,7 @@
                 </a:solidFill>
                 <a:latin typeface="Arial"/>
               </a:rPr>
-              <a:t>Урок: vendor self-report ≠ field reality. Custody transfer, SIS, plant-wide refinery — AI ещё не дошёл.</a:t>
+              <a:t>Урок: отчёт поставщика ≠ реальность на установке. Коммерческий учёт, SIS, общезаводская переработка — AI ещё не дошёл.</a:t>
             </a:r>
           </a:p>
         </p:txBody>
@@ -40879,7 +40880,7 @@
                 </a:solidFill>
                 <a:latin typeface="Arial"/>
               </a:rPr>
-              <a:t>Канадский стартап Калгари (2014), $25M Series B 2022. RL для оптимизации искусственного подъёма.</a:t>
+              <a:t>Канадский стартап Калгари (2014), $25 млн раунд Series B 2022. Обучение с подкреплением для оптимизации механизированной добычи.</a:t>
             </a:r>
           </a:p>
         </p:txBody>
@@ -40948,8 +40949,8 @@
         </p:blipFill>
         <p:spPr>
           <a:xfrm>
-            <a:off x="640080" y="1996440"/>
-            <a:ext cx="5120640" cy="3413759"/>
+            <a:off x="640080" y="2103120"/>
+            <a:ext cx="5120640" cy="3200399"/>
           </a:xfrm>
           <a:prstGeom prst="rect">
             <a:avLst/>
@@ -41070,7 +41071,7 @@
                 </a:solidFill>
                 <a:latin typeface="Arial"/>
               </a:rPr>
-              <a:t>· Тип: штанговые насосы + ЭЦН (mature production)</a:t>
+              <a:t>· Тип: штанговые насосы + ЭЦН (зрелая добыча)</a:t>
             </a:r>
           </a:p>
           <a:p>
@@ -41086,7 +41087,7 @@
                 </a:solidFill>
                 <a:latin typeface="Arial"/>
               </a:rPr>
-              <a:t>· Baseline: 100–500 bopd per well</a:t>
+              <a:t>· Исходный уровень: 100–500 баррелей/день на скважину</a:t>
             </a:r>
           </a:p>
           <a:p>
@@ -41102,7 +41103,7 @@
                 </a:solidFill>
                 <a:latin typeface="Arial"/>
               </a:rPr>
-              <a:t>· Delta: +15% от per-well historical mean</a:t>
+              <a:t>· Прирост: +15% от среднего исторического</a:t>
             </a:r>
           </a:p>
           <a:p>
@@ -41118,7 +41119,7 @@
                 </a:solidFill>
                 <a:latin typeface="Arial"/>
               </a:rPr>
-              <a:t>· На 200 скважинах: +3 000–15 000 bopd total</a:t>
+              <a:t>· На 200 скважинах: +3 000–15 000 баррелей/день суммарно</a:t>
             </a:r>
           </a:p>
           <a:p>
@@ -41166,7 +41167,7 @@
                 </a:solidFill>
                 <a:latin typeface="Arial"/>
               </a:rPr>
-              <a:t>1. Verifiable baseline — не «спас $10M» без знаменателя.</a:t>
+              <a:t>1. Проверяемая база — не «спас $10 млн» без знаменателя.</a:t>
             </a:r>
           </a:p>
           <a:p>
@@ -41182,7 +41183,7 @@
                 </a:solidFill>
                 <a:latin typeface="Arial"/>
               </a:rPr>
-              <a:t>2. RL поверх классики — augmentation, не замена.</a:t>
+              <a:t>2. Обучение с подкреплением поверх классики — дополнение, не замена.</a:t>
             </a:r>
           </a:p>
           <a:p>
@@ -41285,7 +41286,7 @@
                 </a:solidFill>
                 <a:latin typeface="Arial"/>
               </a:rPr>
-              <a:t>Когда Ambyint НЕ работает: stripper wells &lt;10 bopd. +15% = +1,5 bopd; стоимость развёртывания &gt; извлечённой ценности.</a:t>
+              <a:t>Когда Ambyint НЕ работает: стрипперные скважины (&lt;10 баррелей/день). +15% = +1,5 барр./день; стоимость развёртывания &gt; извлечённой ценности.</a:t>
             </a:r>
           </a:p>
         </p:txBody>
